--- a/tools/rcn-graph-tool-intro.pptx
+++ b/tools/rcn-graph-tool-intro.pptx
@@ -14,6 +14,7 @@
     <p:sldId id="262" r:id="rId13"/>
     <p:sldId id="263" r:id="rId14"/>
     <p:sldId id="264" r:id="rId15"/>
+    <p:sldId id="269" r:id="rId20"/>
     <p:sldId id="265" r:id="rId16"/>
     <p:sldId id="266" r:id="rId17"/>
     <p:sldId id="267" r:id="rId18"/>
@@ -6279,6 +6280,616 @@
                 </a:solidFill>
               </a:rPr>
               <a:t>ReLocalize Creativity Network  ·  Open source  ·  Free by design</a:t>
+            </a:r>
+          </a:p>
+        </p:txBody>
+      </p:sp>
+    </p:spTree>
+  </p:cSld>
+  <p:clrMapOvr>
+    <a:masterClrMapping/>
+  </p:clrMapOvr>
+</p:sld>
+</file>
+
+<file path=ppt/slides/slide14.xml><?xml version="1.0" encoding="utf-8"?>
+<p:sld xmlns:a="http://schemas.openxmlformats.org/drawingml/2006/main" xmlns:p="http://schemas.openxmlformats.org/presentationml/2006/main" xmlns:r="http://schemas.openxmlformats.org/officeDocument/2006/relationships">
+  <p:cSld>
+    <p:spTree>
+      <p:nvGrpSpPr>
+        <p:cNvPr id="1" name=""/>
+        <p:cNvGrpSpPr/>
+        <p:nvPr/>
+      </p:nvGrpSpPr>
+      <p:grpSpPr/>
+      <p:sp>
+        <p:nvSpPr>
+          <p:cNvPr id="2" name="Rectangle 1"/>
+          <p:cNvSpPr/>
+          <p:nvPr/>
+        </p:nvSpPr>
+        <p:spPr>
+          <a:xfrm>
+            <a:off x="0" y="0"/>
+            <a:ext cx="12188952" cy="6858000"/>
+          </a:xfrm>
+          <a:prstGeom prst="rect">
+            <a:avLst/>
+          </a:prstGeom>
+          <a:solidFill>
+            <a:srgbClr val="F8FAFC"/>
+          </a:solidFill>
+          <a:ln>
+            <a:noFill/>
+          </a:ln>
+          <a:effectLst/>
+        </p:spPr>
+        <p:style>
+          <a:lnRef idx="1">
+            <a:schemeClr val="accent1"/>
+          </a:lnRef>
+          <a:fillRef idx="3">
+            <a:schemeClr val="accent1"/>
+          </a:fillRef>
+          <a:effectRef idx="2">
+            <a:schemeClr val="accent1"/>
+          </a:effectRef>
+          <a:fontRef idx="minor">
+            <a:schemeClr val="lt1"/>
+          </a:fontRef>
+        </p:style>
+        <p:txBody>
+          <a:bodyPr rtlCol="0" anchor="ctr"/>
+          <a:lstStyle/>
+          <a:p>
+            <a:pPr algn="ctr"/>
+          </a:p>
+        </p:txBody>
+      </p:sp>
+      <p:sp>
+        <p:nvSpPr>
+          <p:cNvPr id="3" name="Rectangle 2"/>
+          <p:cNvSpPr/>
+          <p:nvPr/>
+        </p:nvSpPr>
+        <p:spPr>
+          <a:xfrm>
+            <a:off x="0" y="0"/>
+            <a:ext cx="12188952" cy="1005840"/>
+          </a:xfrm>
+          <a:prstGeom prst="rect">
+            <a:avLst/>
+          </a:prstGeom>
+          <a:solidFill>
+            <a:srgbClr val="C2410C"/>
+          </a:solidFill>
+          <a:ln>
+            <a:noFill/>
+          </a:ln>
+          <a:effectLst/>
+        </p:spPr>
+        <p:style>
+          <a:lnRef idx="1">
+            <a:schemeClr val="accent1"/>
+          </a:lnRef>
+          <a:fillRef idx="3">
+            <a:schemeClr val="accent1"/>
+          </a:fillRef>
+          <a:effectRef idx="2">
+            <a:schemeClr val="accent1"/>
+          </a:effectRef>
+          <a:fontRef idx="minor">
+            <a:schemeClr val="lt1"/>
+          </a:fontRef>
+        </p:style>
+        <p:txBody>
+          <a:bodyPr rtlCol="0" anchor="ctr"/>
+          <a:lstStyle/>
+          <a:p>
+            <a:pPr algn="ctr"/>
+          </a:p>
+        </p:txBody>
+      </p:sp>
+      <p:sp>
+        <p:nvSpPr>
+          <p:cNvPr id="4" name="TextBox 3"/>
+          <p:cNvSpPr txBox="1"/>
+          <p:nvPr/>
+        </p:nvSpPr>
+        <p:spPr>
+          <a:xfrm>
+            <a:off x="457200" y="137160"/>
+            <a:ext cx="11247120" cy="731520"/>
+          </a:xfrm>
+          <a:prstGeom prst="rect">
+            <a:avLst/>
+          </a:prstGeom>
+          <a:noFill/>
+        </p:spPr>
+        <p:txBody>
+          <a:bodyPr wrap="square">
+            <a:spAutoFit/>
+          </a:bodyPr>
+          <a:lstStyle/>
+          <a:p>
+            <a:pPr>
+              <a:spcAft>
+                <a:spcPts val="600"/>
+              </a:spcAft>
+            </a:pPr>
+            <a:r>
+              <a:rPr sz="2800" b="1">
+                <a:solidFill>
+                  <a:srgbClr val="FFFFFF"/>
+                </a:solidFill>
+              </a:rPr>
+              <a:t>The legend is the registry</a:t>
+            </a:r>
+          </a:p>
+        </p:txBody>
+      </p:sp>
+      <p:sp>
+        <p:nvSpPr>
+          <p:cNvPr id="5" name="Rectangle 4"/>
+          <p:cNvSpPr/>
+          <p:nvPr/>
+        </p:nvSpPr>
+        <p:spPr>
+          <a:xfrm>
+            <a:off x="365760" y="1143000"/>
+            <a:ext cx="5486400" cy="5257800"/>
+          </a:xfrm>
+          <a:prstGeom prst="rect">
+            <a:avLst/>
+          </a:prstGeom>
+          <a:solidFill>
+            <a:srgbClr val="FFFFFF"/>
+          </a:solidFill>
+          <a:ln>
+            <a:noFill/>
+          </a:ln>
+          <a:effectLst/>
+        </p:spPr>
+        <p:style>
+          <a:lnRef idx="1">
+            <a:schemeClr val="accent1"/>
+          </a:lnRef>
+          <a:fillRef idx="3">
+            <a:schemeClr val="accent1"/>
+          </a:fillRef>
+          <a:effectRef idx="2">
+            <a:schemeClr val="accent1"/>
+          </a:effectRef>
+          <a:fontRef idx="minor">
+            <a:schemeClr val="lt1"/>
+          </a:fontRef>
+        </p:style>
+        <p:txBody>
+          <a:bodyPr rtlCol="0" anchor="ctr"/>
+          <a:lstStyle/>
+          <a:p>
+            <a:pPr algn="ctr"/>
+          </a:p>
+        </p:txBody>
+      </p:sp>
+      <p:sp>
+        <p:nvSpPr>
+          <p:cNvPr id="6" name="TextBox 5"/>
+          <p:cNvSpPr txBox="1"/>
+          <p:nvPr/>
+        </p:nvSpPr>
+        <p:spPr>
+          <a:xfrm>
+            <a:off x="548640" y="1234440"/>
+            <a:ext cx="5120640" cy="502920"/>
+          </a:xfrm>
+          <a:prstGeom prst="rect">
+            <a:avLst/>
+          </a:prstGeom>
+          <a:noFill/>
+        </p:spPr>
+        <p:txBody>
+          <a:bodyPr wrap="square">
+            <a:spAutoFit/>
+          </a:bodyPr>
+          <a:lstStyle/>
+          <a:p>
+            <a:pPr>
+              <a:spcAft>
+                <a:spcPts val="600"/>
+              </a:spcAft>
+            </a:pPr>
+            <a:r>
+              <a:rPr sz="1600" b="1">
+                <a:solidFill>
+                  <a:srgbClr val="C2410C"/>
+                </a:solidFill>
+              </a:rPr>
+              <a:t>Style by kind, not by element</a:t>
+            </a:r>
+          </a:p>
+        </p:txBody>
+      </p:sp>
+      <p:sp>
+        <p:nvSpPr>
+          <p:cNvPr id="7" name="TextBox 6"/>
+          <p:cNvSpPr txBox="1"/>
+          <p:nvPr/>
+        </p:nvSpPr>
+        <p:spPr>
+          <a:xfrm>
+            <a:off x="548640" y="1810512"/>
+            <a:ext cx="5120640" cy="457200"/>
+          </a:xfrm>
+          <a:prstGeom prst="rect">
+            <a:avLst/>
+          </a:prstGeom>
+          <a:noFill/>
+        </p:spPr>
+        <p:txBody>
+          <a:bodyPr wrap="square">
+            <a:spAutoFit/>
+          </a:bodyPr>
+          <a:lstStyle/>
+          <a:p>
+            <a:pPr>
+              <a:spcAft>
+                <a:spcPts val="600"/>
+              </a:spcAft>
+            </a:pPr>
+            <a:r>
+              <a:rPr sz="1300" b="0">
+                <a:solidFill>
+                  <a:srgbClr val="334155"/>
+                </a:solidFill>
+              </a:rPr>
+              <a:t>In most tools the legend is a picture of the colour scheme — kept in sync by hand, and the first thing to go stale.</a:t>
+            </a:r>
+          </a:p>
+        </p:txBody>
+      </p:sp>
+      <p:sp>
+        <p:nvSpPr>
+          <p:cNvPr id="8" name="TextBox 7"/>
+          <p:cNvSpPr txBox="1"/>
+          <p:nvPr/>
+        </p:nvSpPr>
+        <p:spPr>
+          <a:xfrm>
+            <a:off x="548640" y="2468880"/>
+            <a:ext cx="5120640" cy="3657600"/>
+          </a:xfrm>
+          <a:prstGeom prst="rect">
+            <a:avLst/>
+          </a:prstGeom>
+          <a:noFill/>
+        </p:spPr>
+        <p:txBody>
+          <a:bodyPr wrap="square">
+            <a:spAutoFit/>
+          </a:bodyPr>
+          <a:lstStyle/>
+          <a:p>
+            <a:pPr>
+              <a:spcAft>
+                <a:spcPts val="600"/>
+              </a:spcAft>
+            </a:pPr>
+            <a:r>
+              <a:rPr sz="1300" b="0">
+                <a:solidFill>
+                  <a:srgbClr val="0F172A"/>
+                </a:solidFill>
+              </a:rPr>
+              <a:t>• A legend row DEFINES a kind — its fill, border, width, dash</a:t>
+            </a:r>
+          </a:p>
+          <a:p>
+            <a:pPr>
+              <a:spcAft>
+                <a:spcPts val="600"/>
+              </a:spcAft>
+            </a:pPr>
+            <a:r>
+              <a:rPr sz="1300" b="0">
+                <a:solidFill>
+                  <a:srgbClr val="0F172A"/>
+                </a:solidFill>
+              </a:rPr>
+              <a:t>• Nodes and edges follow a row instead of carrying their own styling</a:t>
+            </a:r>
+          </a:p>
+          <a:p>
+            <a:pPr>
+              <a:spcAft>
+                <a:spcPts val="600"/>
+              </a:spcAft>
+            </a:pPr>
+            <a:r>
+              <a:rPr sz="1300" b="0">
+                <a:solidFill>
+                  <a:srgbClr val="0F172A"/>
+                </a:solidFill>
+              </a:rPr>
+              <a:t>• Change the row and every element following it changes at once</a:t>
+            </a:r>
+          </a:p>
+          <a:p>
+            <a:pPr>
+              <a:spcAft>
+                <a:spcPts val="600"/>
+              </a:spcAft>
+            </a:pPr>
+            <a:r>
+              <a:rPr sz="1300" b="0">
+                <a:solidFill>
+                  <a:srgbClr val="0F172A"/>
+                </a:solidFill>
+              </a:rPr>
+              <a:t>• Assign selection puts a selection on a row</a:t>
+            </a:r>
+          </a:p>
+          <a:p>
+            <a:pPr>
+              <a:spcAft>
+                <a:spcPts val="600"/>
+              </a:spcAft>
+            </a:pPr>
+            <a:r>
+              <a:rPr sz="1300" b="0">
+                <a:solidFill>
+                  <a:srgbClr val="0F172A"/>
+                </a:solidFill>
+              </a:rPr>
+              <a:t>• Override one element and it diverges on that property only — still following the row for everything else</a:t>
+            </a:r>
+          </a:p>
+          <a:p>
+            <a:pPr>
+              <a:spcAft>
+                <a:spcPts val="600"/>
+              </a:spcAft>
+            </a:pPr>
+            <a:r>
+              <a:rPr sz="1300" b="0">
+                <a:solidFill>
+                  <a:srgbClr val="0F172A"/>
+                </a:solidFill>
+              </a:rPr>
+              <a:t>• Clear overrides snaps every follower back to the row</a:t>
+            </a:r>
+          </a:p>
+          <a:p>
+            <a:pPr>
+              <a:spcAft>
+                <a:spcPts val="600"/>
+              </a:spcAft>
+            </a:pPr>
+            <a:r>
+              <a:rPr sz="1300" b="0">
+                <a:solidFill>
+                  <a:srgbClr val="0F172A"/>
+                </a:solidFill>
+              </a:rPr>
+              <a:t>• 6–8 kinds is what a group can read; the panel warns above 8, and says how many elements follow no row at all</a:t>
+            </a:r>
+          </a:p>
+        </p:txBody>
+      </p:sp>
+      <p:sp>
+        <p:nvSpPr>
+          <p:cNvPr id="9" name="Rectangle 8"/>
+          <p:cNvSpPr/>
+          <p:nvPr/>
+        </p:nvSpPr>
+        <p:spPr>
+          <a:xfrm>
+            <a:off x="6126480" y="1143000"/>
+            <a:ext cx="5669280" cy="5257800"/>
+          </a:xfrm>
+          <a:prstGeom prst="rect">
+            <a:avLst/>
+          </a:prstGeom>
+          <a:solidFill>
+            <a:srgbClr val="FFFFFF"/>
+          </a:solidFill>
+          <a:ln>
+            <a:noFill/>
+          </a:ln>
+          <a:effectLst/>
+        </p:spPr>
+        <p:style>
+          <a:lnRef idx="1">
+            <a:schemeClr val="accent1"/>
+          </a:lnRef>
+          <a:fillRef idx="3">
+            <a:schemeClr val="accent1"/>
+          </a:fillRef>
+          <a:effectRef idx="2">
+            <a:schemeClr val="accent1"/>
+          </a:effectRef>
+          <a:fontRef idx="minor">
+            <a:schemeClr val="lt1"/>
+          </a:fontRef>
+        </p:style>
+        <p:txBody>
+          <a:bodyPr rtlCol="0" anchor="ctr"/>
+          <a:lstStyle/>
+          <a:p>
+            <a:pPr algn="ctr"/>
+          </a:p>
+        </p:txBody>
+      </p:sp>
+      <p:sp>
+        <p:nvSpPr>
+          <p:cNvPr id="10" name="TextBox 9"/>
+          <p:cNvSpPr txBox="1"/>
+          <p:nvPr/>
+        </p:nvSpPr>
+        <p:spPr>
+          <a:xfrm>
+            <a:off x="6309360" y="1234440"/>
+            <a:ext cx="5303520" cy="502920"/>
+          </a:xfrm>
+          <a:prstGeom prst="rect">
+            <a:avLst/>
+          </a:prstGeom>
+          <a:noFill/>
+        </p:spPr>
+        <p:txBody>
+          <a:bodyPr wrap="square">
+            <a:spAutoFit/>
+          </a:bodyPr>
+          <a:lstStyle/>
+          <a:p>
+            <a:pPr>
+              <a:spcAft>
+                <a:spcPts val="600"/>
+              </a:spcAft>
+            </a:pPr>
+            <a:r>
+              <a:rPr sz="1600" b="1">
+                <a:solidFill>
+                  <a:srgbClr val="166A34"/>
+                </a:solidFill>
+              </a:rPr>
+              <a:t>Exports that describe themselves</a:t>
+            </a:r>
+          </a:p>
+        </p:txBody>
+      </p:sp>
+      <p:sp>
+        <p:nvSpPr>
+          <p:cNvPr id="11" name="TextBox 10"/>
+          <p:cNvSpPr txBox="1"/>
+          <p:nvPr/>
+        </p:nvSpPr>
+        <p:spPr>
+          <a:xfrm>
+            <a:off x="6309360" y="1810512"/>
+            <a:ext cx="5303520" cy="457200"/>
+          </a:xfrm>
+          <a:prstGeom prst="rect">
+            <a:avLst/>
+          </a:prstGeom>
+          <a:noFill/>
+        </p:spPr>
+        <p:txBody>
+          <a:bodyPr wrap="square">
+            <a:spAutoFit/>
+          </a:bodyPr>
+          <a:lstStyle/>
+          <a:p>
+            <a:pPr>
+              <a:spcAft>
+                <a:spcPts val="600"/>
+              </a:spcAft>
+            </a:pPr>
+            <a:r>
+              <a:rPr sz="1300" b="0">
+                <a:solidFill>
+                  <a:srgbClr val="334155"/>
+                </a:solidFill>
+              </a:rPr>
+              <a:t>Styling by registry creates a trap, and the tool closes it on the way out.</a:t>
+            </a:r>
+          </a:p>
+        </p:txBody>
+      </p:sp>
+      <p:sp>
+        <p:nvSpPr>
+          <p:cNvPr id="12" name="TextBox 11"/>
+          <p:cNvSpPr txBox="1"/>
+          <p:nvPr/>
+        </p:nvSpPr>
+        <p:spPr>
+          <a:xfrm>
+            <a:off x="6309360" y="2468880"/>
+            <a:ext cx="5303520" cy="3657600"/>
+          </a:xfrm>
+          <a:prstGeom prst="rect">
+            <a:avLst/>
+          </a:prstGeom>
+          <a:noFill/>
+        </p:spPr>
+        <p:txBody>
+          <a:bodyPr wrap="square">
+            <a:spAutoFit/>
+          </a:bodyPr>
+          <a:lstStyle/>
+          <a:p>
+            <a:pPr>
+              <a:spcAft>
+                <a:spcPts val="600"/>
+              </a:spcAft>
+            </a:pPr>
+            <a:r>
+              <a:rPr sz="1300" b="0">
+                <a:solidFill>
+                  <a:srgbClr val="0F172A"/>
+                </a:solidFill>
+              </a:rPr>
+              <a:t>• An element following a row needs no colour of its own to draw correctly</a:t>
+            </a:r>
+          </a:p>
+          <a:p>
+            <a:pPr>
+              <a:spcAft>
+                <a:spcPts val="600"/>
+              </a:spcAft>
+            </a:pPr>
+            <a:r>
+              <a:rPr sz="1300" b="0">
+                <a:solidFill>
+                  <a:srgbClr val="0F172A"/>
+                </a:solidFill>
+              </a:rPr>
+              <a:t>• So a saved file can be perfectly right on screen and look entirely unstyled to anything that is not this tool — a database projection, a converter, an AI assistant reading it, a person scanning the JSON</a:t>
+            </a:r>
+          </a:p>
+          <a:p>
+            <a:pPr>
+              <a:spcAft>
+                <a:spcPts val="600"/>
+              </a:spcAft>
+            </a:pPr>
+            <a:r>
+              <a:rPr sz="1300" b="0">
+                <a:solidFill>
+                  <a:srgbClr val="0F172A"/>
+                </a:solidFill>
+              </a:rPr>
+              <a:t>• On export the tool stamps each element’s resolved appearance alongside the row it follows, so the file says what you saw</a:t>
+            </a:r>
+          </a:p>
+          <a:p>
+            <a:pPr>
+              <a:spcAft>
+                <a:spcPts val="600"/>
+              </a:spcAft>
+            </a:pPr>
+            <a:r>
+              <a:rPr sz="1300" b="0">
+                <a:solidFill>
+                  <a:srgbClr val="0F172A"/>
+                </a:solidFill>
+              </a:rPr>
+              <a:t>• It also settles a contradiction: loading writes dash = solid onto every edge, so a dashed row drew dashed while the file claimed solid</a:t>
+            </a:r>
+          </a:p>
+          <a:p>
+            <a:pPr>
+              <a:spcAft>
+                <a:spcPts val="600"/>
+              </a:spcAft>
+            </a:pPr>
+            <a:r>
+              <a:rPr sz="1300" b="0">
+                <a:solidFill>
+                  <a:srgbClr val="0F172A"/>
+                </a:solidFill>
+              </a:rPr>
+              <a:t>• The row still wins on reload — the legend stays the single place to restyle</a:t>
             </a:r>
           </a:p>
         </p:txBody>

--- a/tools/rcn-graph-tool-intro.pptx
+++ b/tools/rcn-graph-tool-intro.pptx
@@ -14,13 +14,16 @@
     <p:sldId id="262" r:id="rId13"/>
     <p:sldId id="263" r:id="rId14"/>
     <p:sldId id="264" r:id="rId15"/>
-    <p:sldId id="269" r:id="rId20"/>
     <p:sldId id="265" r:id="rId16"/>
     <p:sldId id="266" r:id="rId17"/>
     <p:sldId id="267" r:id="rId18"/>
     <p:sldId id="268" r:id="rId19"/>
+    <p:sldId id="269" r:id="rId20"/>
+    <p:sldId id="270" r:id="rId21"/>
+    <p:sldId id="271" r:id="rId22"/>
+    <p:sldId id="272" r:id="rId23"/>
   </p:sldIdLst>
-  <p:sldSz cx="12188952" cy="6858000" type="screen4x3"/>
+  <p:sldSz cx="12191695" cy="6858000" type="screen4x3"/>
   <p:notesSz cx="6858000" cy="9144000"/>
   <p:defaultTextStyle>
     <a:defPPr>
@@ -3399,7 +3402,7 @@
             <a:avLst/>
           </a:prstGeom>
           <a:solidFill>
-            <a:srgbClr val="0F172A"/>
+            <a:srgbClr val="1D4ED8"/>
           </a:solidFill>
           <a:ln>
             <a:noFill/>
@@ -3456,21 +3459,55 @@
                   <a:srgbClr val="FFFFFF"/>
                 </a:solidFill>
               </a:rPr>
-              <a:t>Export — your diagram lives beyond the tool</a:t>
-            </a:r>
-          </a:p>
-        </p:txBody>
-      </p:sp>
-      <p:sp>
-        <p:nvSpPr>
-          <p:cNvPr id="5" name="Rectangle 4"/>
+              <a:t>Wardley mode — where things are, and what is held back</a:t>
+            </a:r>
+          </a:p>
+        </p:txBody>
+      </p:sp>
+      <p:sp>
+        <p:nvSpPr>
+          <p:cNvPr id="5" name="TextBox 4"/>
+          <p:cNvSpPr txBox="1"/>
+          <p:nvPr/>
+        </p:nvSpPr>
+        <p:spPr>
+          <a:xfrm>
+            <a:off x="548640" y="1143000"/>
+            <a:ext cx="11064240" cy="548640"/>
+          </a:xfrm>
+          <a:prstGeom prst="rect">
+            <a:avLst/>
+          </a:prstGeom>
+          <a:noFill/>
+        </p:spPr>
+        <p:txBody>
+          <a:bodyPr wrap="square">
+            <a:spAutoFit/>
+          </a:bodyPr>
+          <a:lstStyle/>
+          <a:p>
+            <a:pPr algn="l"/>
+            <a:r>
+              <a:rPr sz="1700" b="0" i="0">
+                <a:solidFill>
+                  <a:srgbClr val="334155"/>
+                </a:solidFill>
+              </a:rPr>
+              <a:t>A Wardley map says where each component sits. Rent Band Analysis adds where it lands once someone stops paying to hold it there.</a:t>
+            </a:r>
+          </a:p>
+        </p:txBody>
+      </p:sp>
+      <p:sp>
+        <p:nvSpPr>
+          <p:cNvPr id="6" name="Rectangle 5"/>
           <p:cNvSpPr/>
           <p:nvPr/>
         </p:nvSpPr>
         <p:spPr>
           <a:xfrm>
-            <a:off x="365760" y="1143000"/>
-            <a:ext cx="5577840" cy="1691640"/>
+            <a:off x="457200" y="1920240"/>
+            <a:ext cx="11247120" cy="1005840"/>
           </a:xfrm>
           <a:prstGeom prst="rect">
             <a:avLst/>
@@ -3506,14 +3543,14 @@
       </p:sp>
       <p:sp>
         <p:nvSpPr>
-          <p:cNvPr id="6" name="TextBox 5"/>
-          <p:cNvSpPr txBox="1"/>
-          <p:nvPr/>
-        </p:nvSpPr>
-        <p:spPr>
-          <a:xfrm>
-            <a:off x="548640" y="1234440"/>
-            <a:ext cx="2286000" cy="411480"/>
+          <p:cNvPr id="7" name="TextBox 6"/>
+          <p:cNvSpPr txBox="1"/>
+          <p:nvPr/>
+        </p:nvSpPr>
+        <p:spPr>
+          <a:xfrm>
+            <a:off x="640080" y="1975104"/>
+            <a:ext cx="3200400" cy="457200"/>
           </a:xfrm>
           <a:prstGeom prst="rect">
             <a:avLst/>
@@ -3528,26 +3565,26 @@
           <a:p>
             <a:pPr algn="l"/>
             <a:r>
-              <a:rPr sz="1500" b="1" i="0">
-                <a:solidFill>
-                  <a:srgbClr val="0F766E"/>
-                </a:solidFill>
-              </a:rPr>
-              <a:t>Presentation</a:t>
-            </a:r>
-          </a:p>
-        </p:txBody>
-      </p:sp>
-      <p:sp>
-        <p:nvSpPr>
-          <p:cNvPr id="7" name="TextBox 6"/>
-          <p:cNvSpPr txBox="1"/>
-          <p:nvPr/>
-        </p:nvSpPr>
-        <p:spPr>
-          <a:xfrm>
-            <a:off x="548640" y="1618488"/>
-            <a:ext cx="5212080" cy="411480"/>
+              <a:rPr sz="1400" b="1" i="0">
+                <a:solidFill>
+                  <a:srgbClr val="1D4ED8"/>
+                </a:solidFill>
+              </a:rPr>
+              <a:t>Evolution and value chain</a:t>
+            </a:r>
+          </a:p>
+        </p:txBody>
+      </p:sp>
+      <p:sp>
+        <p:nvSpPr>
+          <p:cNvPr id="8" name="TextBox 7"/>
+          <p:cNvSpPr txBox="1"/>
+          <p:nvPr/>
+        </p:nvSpPr>
+        <p:spPr>
+          <a:xfrm>
+            <a:off x="640080" y="2377440"/>
+            <a:ext cx="10789920" cy="502920"/>
           </a:xfrm>
           <a:prstGeom prst="rect">
             <a:avLst/>
@@ -3562,47 +3599,12 @@
           <a:p>
             <a:pPr algn="l"/>
             <a:r>
-              <a:rPr sz="1200" b="0" i="0">
-                <a:solidFill>
-                  <a:srgbClr val="475569"/>
-                </a:solidFill>
-              </a:rPr>
-              <a:t>SVG · PNG (2×) · Copy to clipboard · Print</a:t>
-            </a:r>
-          </a:p>
-        </p:txBody>
-      </p:sp>
-      <p:sp>
-        <p:nvSpPr>
-          <p:cNvPr id="8" name="TextBox 7"/>
-          <p:cNvSpPr txBox="1"/>
-          <p:nvPr/>
-        </p:nvSpPr>
-        <p:spPr>
-          <a:xfrm>
-            <a:off x="548640" y="2057400"/>
-            <a:ext cx="5212080" cy="685800"/>
-          </a:xfrm>
-          <a:prstGeom prst="rect">
-            <a:avLst/>
-          </a:prstGeom>
-          <a:noFill/>
-        </p:spPr>
-        <p:txBody>
-          <a:bodyPr wrap="square">
-            <a:spAutoFit/>
-          </a:bodyPr>
-          <a:lstStyle/>
-          <a:p>
-            <a:pPr algn="l"/>
-            <a:r>
-              <a:rPr sz="1200" b="0" i="0">
+              <a:rPr sz="1300" b="0" i="0">
                 <a:solidFill>
                   <a:srgbClr val="334155"/>
                 </a:solidFill>
               </a:rPr>
-              <a:t>Paste directly into PowerPoint or Google Slides.
-Export SVG for documents that need to scale.</a:t>
+              <a:t>Genesis to Commodity across the bottom, visible to buried down the side. Position carries meaning here, so auto-layout is switched off and dragging is the edit.</a:t>
             </a:r>
           </a:p>
         </p:txBody>
@@ -3615,8 +3617,8 @@
         </p:nvSpPr>
         <p:spPr>
           <a:xfrm>
-            <a:off x="6263640" y="1143000"/>
-            <a:ext cx="5577840" cy="1691640"/>
+            <a:off x="457200" y="3063240"/>
+            <a:ext cx="11247120" cy="1005840"/>
           </a:xfrm>
           <a:prstGeom prst="rect">
             <a:avLst/>
@@ -3658,8 +3660,8 @@
         </p:nvSpPr>
         <p:spPr>
           <a:xfrm>
-            <a:off x="6446520" y="1234440"/>
-            <a:ext cx="2286000" cy="411480"/>
+            <a:off x="640080" y="3118104"/>
+            <a:ext cx="3200400" cy="457200"/>
           </a:xfrm>
           <a:prstGeom prst="rect">
             <a:avLst/>
@@ -3674,12 +3676,12 @@
           <a:p>
             <a:pPr algn="l"/>
             <a:r>
-              <a:rPr sz="1500" b="1" i="0">
-                <a:solidFill>
-                  <a:srgbClr val="0F766E"/>
-                </a:solidFill>
-              </a:rPr>
-              <a:t>Share</a:t>
+              <a:rPr sz="1400" b="1" i="0">
+                <a:solidFill>
+                  <a:srgbClr val="1D4ED8"/>
+                </a:solidFill>
+              </a:rPr>
+              <a:t>The shadow and the band</a:t>
             </a:r>
           </a:p>
         </p:txBody>
@@ -3692,8 +3694,8 @@
         </p:nvSpPr>
         <p:spPr>
           <a:xfrm>
-            <a:off x="6446520" y="1618488"/>
-            <a:ext cx="5212080" cy="411480"/>
+            <a:off x="640080" y="3520440"/>
+            <a:ext cx="10789920" cy="502920"/>
           </a:xfrm>
           <a:prstGeom prst="rect">
             <a:avLst/>
@@ -3708,62 +3710,26 @@
           <a:p>
             <a:pPr algn="l"/>
             <a:r>
-              <a:rPr sz="1200" b="0" i="0">
-                <a:solidFill>
-                  <a:srgbClr val="475569"/>
-                </a:solidFill>
-              </a:rPr>
-              <a:t>URL encode · JSON · Snapshot</a:t>
-            </a:r>
-          </a:p>
-        </p:txBody>
-      </p:sp>
-      <p:sp>
-        <p:nvSpPr>
-          <p:cNvPr id="12" name="TextBox 11"/>
-          <p:cNvSpPr txBox="1"/>
-          <p:nvPr/>
-        </p:nvSpPr>
-        <p:spPr>
-          <a:xfrm>
-            <a:off x="6446520" y="2057400"/>
-            <a:ext cx="5212080" cy="685800"/>
-          </a:xfrm>
-          <a:prstGeom prst="rect">
-            <a:avLst/>
-          </a:prstGeom>
-          <a:noFill/>
-        </p:spPr>
-        <p:txBody>
-          <a:bodyPr wrap="square">
-            <a:spAutoFit/>
-          </a:bodyPr>
-          <a:lstStyle/>
-          <a:p>
-            <a:pPr algn="l"/>
-            <a:r>
-              <a:rPr sz="1200" b="0" i="0">
+              <a:rPr sz="1300" b="0" i="0">
                 <a:solidFill>
                   <a:srgbClr val="334155"/>
                 </a:solidFill>
               </a:rPr>
-              <a:t>URL export encodes the full diagram in a link — share it, no file needed.
-Snapshot downloads one HTML file with the diagram baked in — open in any browser, no companion file.
-JSON is the lossless save format.</a:t>
-            </a:r>
-          </a:p>
-        </p:txBody>
-      </p:sp>
-      <p:sp>
-        <p:nvSpPr>
-          <p:cNvPr id="13" name="Rectangle 12"/>
+              <a:t>A dashed node marks the forecast position when the pinning stops. The translucent band between the two is the excess rent, drawn as an object you can point at and measure.</a:t>
+            </a:r>
+          </a:p>
+        </p:txBody>
+      </p:sp>
+      <p:sp>
+        <p:nvSpPr>
+          <p:cNvPr id="12" name="Rectangle 11"/>
           <p:cNvSpPr/>
           <p:nvPr/>
         </p:nvSpPr>
         <p:spPr>
           <a:xfrm>
-            <a:off x="365760" y="2971800"/>
-            <a:ext cx="5577840" cy="1691640"/>
+            <a:off x="457200" y="4206240"/>
+            <a:ext cx="11247120" cy="1005840"/>
           </a:xfrm>
           <a:prstGeom prst="rect">
             <a:avLst/>
@@ -3799,14 +3765,48 @@
       </p:sp>
       <p:sp>
         <p:nvSpPr>
+          <p:cNvPr id="13" name="TextBox 12"/>
+          <p:cNvSpPr txBox="1"/>
+          <p:nvPr/>
+        </p:nvSpPr>
+        <p:spPr>
+          <a:xfrm>
+            <a:off x="640080" y="4261103"/>
+            <a:ext cx="3200400" cy="457200"/>
+          </a:xfrm>
+          <a:prstGeom prst="rect">
+            <a:avLst/>
+          </a:prstGeom>
+          <a:noFill/>
+        </p:spPr>
+        <p:txBody>
+          <a:bodyPr wrap="square">
+            <a:spAutoFit/>
+          </a:bodyPr>
+          <a:lstStyle/>
+          <a:p>
+            <a:pPr algn="l"/>
+            <a:r>
+              <a:rPr sz="1400" b="1" i="0">
+                <a:solidFill>
+                  <a:srgbClr val="1D4ED8"/>
+                </a:solidFill>
+              </a:rPr>
+              <a:t>The pin and the pressure arrow</a:t>
+            </a:r>
+          </a:p>
+        </p:txBody>
+      </p:sp>
+      <p:sp>
+        <p:nvSpPr>
           <p:cNvPr id="14" name="TextBox 13"/>
           <p:cNvSpPr txBox="1"/>
           <p:nvPr/>
         </p:nvSpPr>
         <p:spPr>
           <a:xfrm>
-            <a:off x="548640" y="3063240"/>
-            <a:ext cx="2286000" cy="411480"/>
+            <a:off x="640080" y="4663440"/>
+            <a:ext cx="10789920" cy="502920"/>
           </a:xfrm>
           <a:prstGeom prst="rect">
             <a:avLst/>
@@ -3821,95 +3821,26 @@
           <a:p>
             <a:pPr algn="l"/>
             <a:r>
-              <a:rPr sz="1500" b="1" i="0">
-                <a:solidFill>
-                  <a:srgbClr val="0F766E"/>
-                </a:solidFill>
-              </a:rPr>
-              <a:t>Neo4j</a:t>
-            </a:r>
-          </a:p>
-        </p:txBody>
-      </p:sp>
-      <p:sp>
-        <p:nvSpPr>
-          <p:cNvPr id="15" name="TextBox 14"/>
-          <p:cNvSpPr txBox="1"/>
-          <p:nvPr/>
-        </p:nvSpPr>
-        <p:spPr>
-          <a:xfrm>
-            <a:off x="548640" y="3447288"/>
-            <a:ext cx="5212080" cy="411480"/>
-          </a:xfrm>
-          <a:prstGeom prst="rect">
-            <a:avLst/>
-          </a:prstGeom>
-          <a:noFill/>
-        </p:spPr>
-        <p:txBody>
-          <a:bodyPr wrap="square">
-            <a:spAutoFit/>
-          </a:bodyPr>
-          <a:lstStyle/>
-          <a:p>
-            <a:pPr algn="l"/>
-            <a:r>
-              <a:rPr sz="1200" b="0" i="0">
-                <a:solidFill>
-                  <a:srgbClr val="475569"/>
-                </a:solidFill>
-              </a:rPr>
-              <a:t>Cypher CREATE · MATCH import · OPM→Cypher · NRM→Cypher</a:t>
-            </a:r>
-          </a:p>
-        </p:txBody>
-      </p:sp>
-      <p:sp>
-        <p:nvSpPr>
-          <p:cNvPr id="16" name="TextBox 15"/>
-          <p:cNvSpPr txBox="1"/>
-          <p:nvPr/>
-        </p:nvSpPr>
-        <p:spPr>
-          <a:xfrm>
-            <a:off x="548640" y="3886200"/>
-            <a:ext cx="5212080" cy="685800"/>
-          </a:xfrm>
-          <a:prstGeom prst="rect">
-            <a:avLst/>
-          </a:prstGeom>
-          <a:noFill/>
-        </p:spPr>
-        <p:txBody>
-          <a:bodyPr wrap="square">
-            <a:spAutoFit/>
-          </a:bodyPr>
-          <a:lstStyle/>
-          <a:p>
-            <a:pPr algn="l"/>
-            <a:r>
-              <a:rPr sz="1200" b="0" i="0">
+              <a:rPr sz="1300" b="0" i="0">
                 <a:solidFill>
                   <a:srgbClr val="334155"/>
                 </a:solidFill>
               </a:rPr>
-              <a:t>Design schemas here, paste into Neo4j Browser.
-Bring live graph data back with MATCH import.</a:t>
-            </a:r>
-          </a:p>
-        </p:txBody>
-      </p:sp>
-      <p:sp>
-        <p:nvSpPr>
-          <p:cNvPr id="17" name="Rectangle 16"/>
+              <a:t>A pin names the causal loop holding the component left. The arrow lists the forces pushing right and the mechanisms resisting, each with what it costs the resistor every year.</a:t>
+            </a:r>
+          </a:p>
+        </p:txBody>
+      </p:sp>
+      <p:sp>
+        <p:nvSpPr>
+          <p:cNvPr id="15" name="Rectangle 14"/>
           <p:cNvSpPr/>
           <p:nvPr/>
         </p:nvSpPr>
         <p:spPr>
           <a:xfrm>
-            <a:off x="6263640" y="2971800"/>
-            <a:ext cx="5577840" cy="1691640"/>
+            <a:off x="457200" y="5349240"/>
+            <a:ext cx="11247120" cy="1005840"/>
           </a:xfrm>
           <a:prstGeom prst="rect">
             <a:avLst/>
@@ -3945,14 +3876,14 @@
       </p:sp>
       <p:sp>
         <p:nvSpPr>
-          <p:cNvPr id="18" name="TextBox 17"/>
-          <p:cNvSpPr txBox="1"/>
-          <p:nvPr/>
-        </p:nvSpPr>
-        <p:spPr>
-          <a:xfrm>
-            <a:off x="6446520" y="3063240"/>
-            <a:ext cx="2286000" cy="411480"/>
+          <p:cNvPr id="16" name="TextBox 15"/>
+          <p:cNvSpPr txBox="1"/>
+          <p:nvPr/>
+        </p:nvSpPr>
+        <p:spPr>
+          <a:xfrm>
+            <a:off x="640080" y="5404103"/>
+            <a:ext cx="3200400" cy="457200"/>
           </a:xfrm>
           <a:prstGeom prst="rect">
             <a:avLst/>
@@ -3967,26 +3898,26 @@
           <a:p>
             <a:pPr algn="l"/>
             <a:r>
-              <a:rPr sz="1500" b="1" i="0">
-                <a:solidFill>
-                  <a:srgbClr val="0F766E"/>
-                </a:solidFill>
-              </a:rPr>
-              <a:t>OPM text</a:t>
-            </a:r>
-          </a:p>
-        </p:txBody>
-      </p:sp>
-      <p:sp>
-        <p:nvSpPr>
-          <p:cNvPr id="19" name="TextBox 18"/>
-          <p:cNvSpPr txBox="1"/>
-          <p:nvPr/>
-        </p:nvSpPr>
-        <p:spPr>
-          <a:xfrm>
-            <a:off x="6446520" y="3447288"/>
-            <a:ext cx="5212080" cy="411480"/>
+              <a:rPr sz="1400" b="1" i="0">
+                <a:solidFill>
+                  <a:srgbClr val="1D4ED8"/>
+                </a:solidFill>
+              </a:rPr>
+              <a:t>It survives leaving the tool</a:t>
+            </a:r>
+          </a:p>
+        </p:txBody>
+      </p:sp>
+      <p:sp>
+        <p:nvSpPr>
+          <p:cNvPr id="17" name="TextBox 16"/>
+          <p:cNvSpPr txBox="1"/>
+          <p:nvPr/>
+        </p:nvSpPr>
+        <p:spPr>
+          <a:xfrm>
+            <a:off x="640080" y="5806440"/>
+            <a:ext cx="10789920" cy="502920"/>
           </a:xfrm>
           <a:prstGeom prst="rect">
             <a:avLst/>
@@ -4001,339 +3932,12 @@
           <a:p>
             <a:pPr algn="l"/>
             <a:r>
-              <a:rPr sz="1200" b="0" i="0">
-                <a:solidFill>
-                  <a:srgbClr val="475569"/>
-                </a:solidFill>
-              </a:rPr>
-              <a:t>OPM→OPL · OPM→CSV</a:t>
-            </a:r>
-          </a:p>
-        </p:txBody>
-      </p:sp>
-      <p:sp>
-        <p:nvSpPr>
-          <p:cNvPr id="20" name="TextBox 19"/>
-          <p:cNvSpPr txBox="1"/>
-          <p:nvPr/>
-        </p:nvSpPr>
-        <p:spPr>
-          <a:xfrm>
-            <a:off x="6446520" y="3886200"/>
-            <a:ext cx="5212080" cy="685800"/>
-          </a:xfrm>
-          <a:prstGeom prst="rect">
-            <a:avLst/>
-          </a:prstGeom>
-          <a:noFill/>
-        </p:spPr>
-        <p:txBody>
-          <a:bodyPr wrap="square">
-            <a:spAutoFit/>
-          </a:bodyPr>
-          <a:lstStyle/>
-          <a:p>
-            <a:pPr algn="l"/>
-            <a:r>
-              <a:rPr sz="1200" b="0" i="0">
+              <a:rPr sz="1300" b="0" i="0">
                 <a:solidFill>
                   <a:srgbClr val="334155"/>
                 </a:solidFill>
               </a:rPr>
-              <a:t>Plain-text OPL for documentation, CSV triples for
-spreadsheets or other tools.</a:t>
-            </a:r>
-          </a:p>
-        </p:txBody>
-      </p:sp>
-      <p:sp>
-        <p:nvSpPr>
-          <p:cNvPr id="21" name="Rectangle 20"/>
-          <p:cNvSpPr/>
-          <p:nvPr/>
-        </p:nvSpPr>
-        <p:spPr>
-          <a:xfrm>
-            <a:off x="365760" y="4800600"/>
-            <a:ext cx="5577840" cy="1691640"/>
-          </a:xfrm>
-          <a:prstGeom prst="rect">
-            <a:avLst/>
-          </a:prstGeom>
-          <a:solidFill>
-            <a:srgbClr val="FFFFFF"/>
-          </a:solidFill>
-          <a:ln>
-            <a:noFill/>
-          </a:ln>
-        </p:spPr>
-        <p:style>
-          <a:lnRef idx="1">
-            <a:schemeClr val="accent1"/>
-          </a:lnRef>
-          <a:fillRef idx="3">
-            <a:schemeClr val="accent1"/>
-          </a:fillRef>
-          <a:effectRef idx="2">
-            <a:schemeClr val="accent1"/>
-          </a:effectRef>
-          <a:fontRef idx="minor">
-            <a:schemeClr val="lt1"/>
-          </a:fontRef>
-        </p:style>
-        <p:txBody>
-          <a:bodyPr rtlCol="0" anchor="ctr"/>
-          <a:lstStyle/>
-          <a:p>
-            <a:pPr algn="ctr"/>
-          </a:p>
-        </p:txBody>
-      </p:sp>
-      <p:sp>
-        <p:nvSpPr>
-          <p:cNvPr id="22" name="TextBox 21"/>
-          <p:cNvSpPr txBox="1"/>
-          <p:nvPr/>
-        </p:nvSpPr>
-        <p:spPr>
-          <a:xfrm>
-            <a:off x="548640" y="4892040"/>
-            <a:ext cx="2286000" cy="411480"/>
-          </a:xfrm>
-          <a:prstGeom prst="rect">
-            <a:avLst/>
-          </a:prstGeom>
-          <a:noFill/>
-        </p:spPr>
-        <p:txBody>
-          <a:bodyPr wrap="square">
-            <a:spAutoFit/>
-          </a:bodyPr>
-          <a:lstStyle/>
-          <a:p>
-            <a:pPr algn="l"/>
-            <a:r>
-              <a:rPr sz="1500" b="1" i="0">
-                <a:solidFill>
-                  <a:srgbClr val="0F766E"/>
-                </a:solidFill>
-              </a:rPr>
-              <a:t>Vensim</a:t>
-            </a:r>
-          </a:p>
-        </p:txBody>
-      </p:sp>
-      <p:sp>
-        <p:nvSpPr>
-          <p:cNvPr id="23" name="TextBox 22"/>
-          <p:cNvSpPr txBox="1"/>
-          <p:nvPr/>
-        </p:nvSpPr>
-        <p:spPr>
-          <a:xfrm>
-            <a:off x="548640" y="5276088"/>
-            <a:ext cx="5212080" cy="411480"/>
-          </a:xfrm>
-          <a:prstGeom prst="rect">
-            <a:avLst/>
-          </a:prstGeom>
-          <a:noFill/>
-        </p:spPr>
-        <p:txBody>
-          <a:bodyPr wrap="square">
-            <a:spAutoFit/>
-          </a:bodyPr>
-          <a:lstStyle/>
-          <a:p>
-            <a:pPr algn="l"/>
-            <a:r>
-              <a:rPr sz="1200" b="0" i="0">
-                <a:solidFill>
-                  <a:srgbClr val="475569"/>
-                </a:solidFill>
-              </a:rPr>
-              <a:t>Export .mdl · Export XMILE · Import .mdl · Import XMILE</a:t>
-            </a:r>
-          </a:p>
-        </p:txBody>
-      </p:sp>
-      <p:sp>
-        <p:nvSpPr>
-          <p:cNvPr id="24" name="TextBox 23"/>
-          <p:cNvSpPr txBox="1"/>
-          <p:nvPr/>
-        </p:nvSpPr>
-        <p:spPr>
-          <a:xfrm>
-            <a:off x="548640" y="5715000"/>
-            <a:ext cx="5212080" cy="685800"/>
-          </a:xfrm>
-          <a:prstGeom prst="rect">
-            <a:avLst/>
-          </a:prstGeom>
-          <a:noFill/>
-        </p:spPr>
-        <p:txBody>
-          <a:bodyPr wrap="square">
-            <a:spAutoFit/>
-          </a:bodyPr>
-          <a:lstStyle/>
-          <a:p>
-            <a:pPr algn="l"/>
-            <a:r>
-              <a:rPr sz="1200" b="0" i="0">
-                <a:solidFill>
-                  <a:srgbClr val="334155"/>
-                </a:solidFill>
-              </a:rPr>
-              <a:t>Sketch causal structure here, move to Vensim
-for simulation when ready.</a:t>
-            </a:r>
-          </a:p>
-        </p:txBody>
-      </p:sp>
-      <p:sp>
-        <p:nvSpPr>
-          <p:cNvPr id="25" name="Rectangle 24"/>
-          <p:cNvSpPr/>
-          <p:nvPr/>
-        </p:nvSpPr>
-        <p:spPr>
-          <a:xfrm>
-            <a:off x="6263640" y="4800600"/>
-            <a:ext cx="5577840" cy="1691640"/>
-          </a:xfrm>
-          <a:prstGeom prst="rect">
-            <a:avLst/>
-          </a:prstGeom>
-          <a:solidFill>
-            <a:srgbClr val="FFFFFF"/>
-          </a:solidFill>
-          <a:ln>
-            <a:noFill/>
-          </a:ln>
-        </p:spPr>
-        <p:style>
-          <a:lnRef idx="1">
-            <a:schemeClr val="accent1"/>
-          </a:lnRef>
-          <a:fillRef idx="3">
-            <a:schemeClr val="accent1"/>
-          </a:fillRef>
-          <a:effectRef idx="2">
-            <a:schemeClr val="accent1"/>
-          </a:effectRef>
-          <a:fontRef idx="minor">
-            <a:schemeClr val="lt1"/>
-          </a:fontRef>
-        </p:style>
-        <p:txBody>
-          <a:bodyPr rtlCol="0" anchor="ctr"/>
-          <a:lstStyle/>
-          <a:p>
-            <a:pPr algn="ctr"/>
-          </a:p>
-        </p:txBody>
-      </p:sp>
-      <p:sp>
-        <p:nvSpPr>
-          <p:cNvPr id="26" name="TextBox 25"/>
-          <p:cNvSpPr txBox="1"/>
-          <p:nvPr/>
-        </p:nvSpPr>
-        <p:spPr>
-          <a:xfrm>
-            <a:off x="6446520" y="4892040"/>
-            <a:ext cx="2286000" cy="411480"/>
-          </a:xfrm>
-          <a:prstGeom prst="rect">
-            <a:avLst/>
-          </a:prstGeom>
-          <a:noFill/>
-        </p:spPr>
-        <p:txBody>
-          <a:bodyPr wrap="square">
-            <a:spAutoFit/>
-          </a:bodyPr>
-          <a:lstStyle/>
-          <a:p>
-            <a:pPr algn="l"/>
-            <a:r>
-              <a:rPr sz="1500" b="1" i="0">
-                <a:solidFill>
-                  <a:srgbClr val="0F766E"/>
-                </a:solidFill>
-              </a:rPr>
-              <a:t>Graphviz</a:t>
-            </a:r>
-          </a:p>
-        </p:txBody>
-      </p:sp>
-      <p:sp>
-        <p:nvSpPr>
-          <p:cNvPr id="27" name="TextBox 26"/>
-          <p:cNvSpPr txBox="1"/>
-          <p:nvPr/>
-        </p:nvSpPr>
-        <p:spPr>
-          <a:xfrm>
-            <a:off x="6446520" y="5276088"/>
-            <a:ext cx="5212080" cy="411480"/>
-          </a:xfrm>
-          <a:prstGeom prst="rect">
-            <a:avLst/>
-          </a:prstGeom>
-          <a:noFill/>
-        </p:spPr>
-        <p:txBody>
-          <a:bodyPr wrap="square">
-            <a:spAutoFit/>
-          </a:bodyPr>
-          <a:lstStyle/>
-          <a:p>
-            <a:pPr algn="l"/>
-            <a:r>
-              <a:rPr sz="1200" b="0" i="0">
-                <a:solidFill>
-                  <a:srgbClr val="475569"/>
-                </a:solidFill>
-              </a:rPr>
-              <a:t>Export .dot · Import .dot</a:t>
-            </a:r>
-          </a:p>
-        </p:txBody>
-      </p:sp>
-      <p:sp>
-        <p:nvSpPr>
-          <p:cNvPr id="28" name="TextBox 27"/>
-          <p:cNvSpPr txBox="1"/>
-          <p:nvPr/>
-        </p:nvSpPr>
-        <p:spPr>
-          <a:xfrm>
-            <a:off x="6446520" y="5715000"/>
-            <a:ext cx="5212080" cy="685800"/>
-          </a:xfrm>
-          <a:prstGeom prst="rect">
-            <a:avLst/>
-          </a:prstGeom>
-          <a:noFill/>
-        </p:spPr>
-        <p:txBody>
-          <a:bodyPr wrap="square">
-            <a:spAutoFit/>
-          </a:bodyPr>
-          <a:lstStyle/>
-          <a:p>
-            <a:pPr algn="l"/>
-            <a:r>
-              <a:rPr sz="1200" b="0" i="0">
-                <a:solidFill>
-                  <a:srgbClr val="334155"/>
-                </a:solidFill>
-              </a:rPr>
-              <a:t>Full round-trip with the Graphviz / Gephi ecosystem.
-Colors, shapes, edge weights all preserved.</a:t>
+              <a:t>Every hover annotation exports into the SVG, so a printed or federated map still answers the question a rent figure always attracts: says who, and when.</a:t>
             </a:r>
           </a:p>
         </p:txBody>
@@ -4471,21 +4075,55 @@
                   <a:srgbClr val="FFFFFF"/>
                 </a:solidFill>
               </a:rPr>
-              <a:t>What you can map for a neighborhood</a:t>
-            </a:r>
-          </a:p>
-        </p:txBody>
-      </p:sp>
-      <p:sp>
-        <p:nvSpPr>
-          <p:cNvPr id="5" name="Rectangle 4"/>
+              <a:t>Wardley maps written by Claude Chat</a:t>
+            </a:r>
+          </a:p>
+        </p:txBody>
+      </p:sp>
+      <p:sp>
+        <p:nvSpPr>
+          <p:cNvPr id="5" name="TextBox 4"/>
+          <p:cNvSpPr txBox="1"/>
+          <p:nvPr/>
+        </p:nvSpPr>
+        <p:spPr>
+          <a:xfrm>
+            <a:off x="548640" y="1097280"/>
+            <a:ext cx="11064240" cy="457200"/>
+          </a:xfrm>
+          <a:prstGeom prst="rect">
+            <a:avLst/>
+          </a:prstGeom>
+          <a:noFill/>
+        </p:spPr>
+        <p:txBody>
+          <a:bodyPr wrap="square">
+            <a:spAutoFit/>
+          </a:bodyPr>
+          <a:lstStyle/>
+          <a:p>
+            <a:pPr algn="l"/>
+            <a:r>
+              <a:rPr sz="1700" b="0" i="0">
+                <a:solidFill>
+                  <a:srgbClr val="334155"/>
+                </a:solidFill>
+              </a:rPr>
+              <a:t>Chat writes the map, the tool draws it, you correct it. Correcting the positions is the analysis.</a:t>
+            </a:r>
+          </a:p>
+        </p:txBody>
+      </p:sp>
+      <p:sp>
+        <p:nvSpPr>
+          <p:cNvPr id="6" name="Rectangle 5"/>
           <p:cNvSpPr/>
           <p:nvPr/>
         </p:nvSpPr>
         <p:spPr>
           <a:xfrm>
-            <a:off x="365760" y="1143000"/>
-            <a:ext cx="5577840" cy="2423160"/>
+            <a:off x="365760" y="1691640"/>
+            <a:ext cx="5577840" cy="1463040"/>
           </a:xfrm>
           <a:prstGeom prst="rect">
             <a:avLst/>
@@ -4521,14 +4159,65 @@
       </p:sp>
       <p:sp>
         <p:nvSpPr>
-          <p:cNvPr id="6" name="TextBox 5"/>
-          <p:cNvSpPr txBox="1"/>
-          <p:nvPr/>
-        </p:nvSpPr>
-        <p:spPr>
-          <a:xfrm>
-            <a:off x="548640" y="1234440"/>
-            <a:ext cx="5212080" cy="731520"/>
+          <p:cNvPr id="7" name="Rectangle 6"/>
+          <p:cNvSpPr/>
+          <p:nvPr/>
+        </p:nvSpPr>
+        <p:spPr>
+          <a:xfrm>
+            <a:off x="502920" y="1828800"/>
+            <a:ext cx="502920" cy="502920"/>
+          </a:xfrm>
+          <a:prstGeom prst="rect">
+            <a:avLst/>
+          </a:prstGeom>
+          <a:solidFill>
+            <a:srgbClr val="0F766E"/>
+          </a:solidFill>
+          <a:ln>
+            <a:noFill/>
+          </a:ln>
+        </p:spPr>
+        <p:style>
+          <a:lnRef idx="1">
+            <a:schemeClr val="accent1"/>
+          </a:lnRef>
+          <a:fillRef idx="3">
+            <a:schemeClr val="accent1"/>
+          </a:fillRef>
+          <a:effectRef idx="2">
+            <a:schemeClr val="accent1"/>
+          </a:effectRef>
+          <a:fontRef idx="minor">
+            <a:schemeClr val="lt1"/>
+          </a:fontRef>
+        </p:style>
+        <p:txBody>
+          <a:bodyPr rtlCol="0" anchor="ctr"/>
+          <a:lstStyle/>
+          <a:p>
+            <a:pPr algn="ctr"/>
+            <a:r>
+              <a:rPr sz="1600" b="1">
+                <a:solidFill>
+                  <a:srgbClr val="FFFFFF"/>
+                </a:solidFill>
+              </a:rPr>
+              <a:t>1</a:t>
+            </a:r>
+          </a:p>
+        </p:txBody>
+      </p:sp>
+      <p:sp>
+        <p:nvSpPr>
+          <p:cNvPr id="8" name="TextBox 7"/>
+          <p:cNvSpPr txBox="1"/>
+          <p:nvPr/>
+        </p:nvSpPr>
+        <p:spPr>
+          <a:xfrm>
+            <a:off x="1115568" y="1801368"/>
+            <a:ext cx="4663440" cy="411480"/>
           </a:xfrm>
           <a:prstGeom prst="rect">
             <a:avLst/>
@@ -4543,27 +4232,26 @@
           <a:p>
             <a:pPr algn="l"/>
             <a:r>
-              <a:rPr sz="1800" b="1" i="0">
-                <a:solidFill>
-                  <a:srgbClr val="1D4ED8"/>
-                </a:solidFill>
-              </a:rPr>
-              <a:t>Commercial district
-systems</a:t>
-            </a:r>
-          </a:p>
-        </p:txBody>
-      </p:sp>
-      <p:sp>
-        <p:nvSpPr>
-          <p:cNvPr id="7" name="TextBox 6"/>
-          <p:cNvSpPr txBox="1"/>
-          <p:nvPr/>
-        </p:nvSpPr>
-        <p:spPr>
-          <a:xfrm>
-            <a:off x="548640" y="2011680"/>
-            <a:ext cx="5212080" cy="1463040"/>
+              <a:rPr sz="1500" b="1" i="0">
+                <a:solidFill>
+                  <a:srgbClr val="0F172A"/>
+                </a:solidFill>
+              </a:rPr>
+              <a:t>Hand Chat the card</a:t>
+            </a:r>
+          </a:p>
+        </p:txBody>
+      </p:sp>
+      <p:sp>
+        <p:nvSpPr>
+          <p:cNvPr id="9" name="TextBox 8"/>
+          <p:cNvSpPr txBox="1"/>
+          <p:nvPr/>
+        </p:nvSpPr>
+        <p:spPr>
+          <a:xfrm>
+            <a:off x="1115568" y="2221992"/>
+            <a:ext cx="4663440" cy="822960"/>
           </a:xfrm>
           <a:prstGeom prst="rect">
             <a:avLst/>
@@ -4583,21 +4271,22 @@
                   <a:srgbClr val="334155"/>
                 </a:solidFill>
               </a:rPr>
-              <a:t>Map businesses by type (OPM: Classification-Instantiation), ownership structure (Aggregation-Participation), and governance relationships (EIP). Export OPL as documentation.</a:t>
-            </a:r>
-          </a:p>
-        </p:txBody>
-      </p:sp>
-      <p:sp>
-        <p:nvSpPr>
-          <p:cNvPr id="8" name="Rectangle 7"/>
+              <a:t>Paste wardley-chat-card.md into a new conversation,
+then say what you want mapped.</a:t>
+            </a:r>
+          </a:p>
+        </p:txBody>
+      </p:sp>
+      <p:sp>
+        <p:nvSpPr>
+          <p:cNvPr id="10" name="Rectangle 9"/>
           <p:cNvSpPr/>
           <p:nvPr/>
         </p:nvSpPr>
         <p:spPr>
           <a:xfrm>
-            <a:off x="6263640" y="1143000"/>
-            <a:ext cx="5577840" cy="2423160"/>
+            <a:off x="6263640" y="1691640"/>
+            <a:ext cx="5577840" cy="1463040"/>
           </a:xfrm>
           <a:prstGeom prst="rect">
             <a:avLst/>
@@ -4633,83 +4322,134 @@
       </p:sp>
       <p:sp>
         <p:nvSpPr>
-          <p:cNvPr id="9" name="TextBox 8"/>
-          <p:cNvSpPr txBox="1"/>
-          <p:nvPr/>
-        </p:nvSpPr>
-        <p:spPr>
-          <a:xfrm>
-            <a:off x="6446520" y="1234440"/>
-            <a:ext cx="5212080" cy="731520"/>
-          </a:xfrm>
-          <a:prstGeom prst="rect">
-            <a:avLst/>
-          </a:prstGeom>
-          <a:noFill/>
-        </p:spPr>
-        <p:txBody>
-          <a:bodyPr wrap="square">
-            <a:spAutoFit/>
-          </a:bodyPr>
-          <a:lstStyle/>
-          <a:p>
-            <a:pPr algn="l"/>
-            <a:r>
-              <a:rPr sz="1800" b="1" i="0">
-                <a:solidFill>
-                  <a:srgbClr val="1D4ED8"/>
-                </a:solidFill>
-              </a:rPr>
-              <a:t>Causal chains in
-community risk</a:t>
-            </a:r>
-          </a:p>
-        </p:txBody>
-      </p:sp>
-      <p:sp>
-        <p:nvSpPr>
-          <p:cNvPr id="10" name="TextBox 9"/>
-          <p:cNvSpPr txBox="1"/>
-          <p:nvPr/>
-        </p:nvSpPr>
-        <p:spPr>
-          <a:xfrm>
-            <a:off x="6446520" y="2011680"/>
-            <a:ext cx="5212080" cy="1463040"/>
-          </a:xfrm>
-          <a:prstGeom prst="rect">
-            <a:avLst/>
-          </a:prstGeom>
-          <a:noFill/>
-        </p:spPr>
-        <p:txBody>
-          <a:bodyPr wrap="square">
-            <a:spAutoFit/>
-          </a:bodyPr>
-          <a:lstStyle/>
-          <a:p>
-            <a:pPr algn="l"/>
-            <a:r>
-              <a:rPr sz="1300" b="0" i="0">
-                <a:solidFill>
-                  <a:srgbClr val="334155"/>
-                </a:solidFill>
-              </a:rPr>
-              <a:t>Use NRM mode to trace from Underlying Causes through Preconditions to Incident. Identify missing or failed barriers. Switch to CLD to find reinforcing loops.</a:t>
-            </a:r>
-          </a:p>
-        </p:txBody>
-      </p:sp>
-      <p:sp>
-        <p:nvSpPr>
           <p:cNvPr id="11" name="Rectangle 10"/>
           <p:cNvSpPr/>
           <p:nvPr/>
         </p:nvSpPr>
         <p:spPr>
           <a:xfrm>
-            <a:off x="365760" y="3794760"/>
-            <a:ext cx="5577840" cy="2423160"/>
+            <a:off x="6400800" y="1828800"/>
+            <a:ext cx="502920" cy="502920"/>
+          </a:xfrm>
+          <a:prstGeom prst="rect">
+            <a:avLst/>
+          </a:prstGeom>
+          <a:solidFill>
+            <a:srgbClr val="0F766E"/>
+          </a:solidFill>
+          <a:ln>
+            <a:noFill/>
+          </a:ln>
+        </p:spPr>
+        <p:style>
+          <a:lnRef idx="1">
+            <a:schemeClr val="accent1"/>
+          </a:lnRef>
+          <a:fillRef idx="3">
+            <a:schemeClr val="accent1"/>
+          </a:fillRef>
+          <a:effectRef idx="2">
+            <a:schemeClr val="accent1"/>
+          </a:effectRef>
+          <a:fontRef idx="minor">
+            <a:schemeClr val="lt1"/>
+          </a:fontRef>
+        </p:style>
+        <p:txBody>
+          <a:bodyPr rtlCol="0" anchor="ctr"/>
+          <a:lstStyle/>
+          <a:p>
+            <a:pPr algn="ctr"/>
+            <a:r>
+              <a:rPr sz="1600" b="1">
+                <a:solidFill>
+                  <a:srgbClr val="FFFFFF"/>
+                </a:solidFill>
+              </a:rPr>
+              <a:t>2</a:t>
+            </a:r>
+          </a:p>
+        </p:txBody>
+      </p:sp>
+      <p:sp>
+        <p:nvSpPr>
+          <p:cNvPr id="12" name="TextBox 11"/>
+          <p:cNvSpPr txBox="1"/>
+          <p:nvPr/>
+        </p:nvSpPr>
+        <p:spPr>
+          <a:xfrm>
+            <a:off x="7013448" y="1801368"/>
+            <a:ext cx="4663440" cy="411480"/>
+          </a:xfrm>
+          <a:prstGeom prst="rect">
+            <a:avLst/>
+          </a:prstGeom>
+          <a:noFill/>
+        </p:spPr>
+        <p:txBody>
+          <a:bodyPr wrap="square">
+            <a:spAutoFit/>
+          </a:bodyPr>
+          <a:lstStyle/>
+          <a:p>
+            <a:pPr algn="l"/>
+            <a:r>
+              <a:rPr sz="1500" b="1" i="0">
+                <a:solidFill>
+                  <a:srgbClr val="0F172A"/>
+                </a:solidFill>
+              </a:rPr>
+              <a:t>Save what comes back</a:t>
+            </a:r>
+          </a:p>
+        </p:txBody>
+      </p:sp>
+      <p:sp>
+        <p:nvSpPr>
+          <p:cNvPr id="13" name="TextBox 12"/>
+          <p:cNvSpPr txBox="1"/>
+          <p:nvPr/>
+        </p:nvSpPr>
+        <p:spPr>
+          <a:xfrm>
+            <a:off x="7013448" y="2221992"/>
+            <a:ext cx="4663440" cy="822960"/>
+          </a:xfrm>
+          <a:prstGeom prst="rect">
+            <a:avLst/>
+          </a:prstGeom>
+          <a:noFill/>
+        </p:spPr>
+        <p:txBody>
+          <a:bodyPr wrap="square">
+            <a:spAutoFit/>
+          </a:bodyPr>
+          <a:lstStyle/>
+          <a:p>
+            <a:pPr algn="l"/>
+            <a:r>
+              <a:rPr sz="1300" b="0" i="0">
+                <a:solidFill>
+                  <a:srgbClr val="334155"/>
+                </a:solidFill>
+              </a:rPr>
+              <a:t>One JSON block. A node needs four fields — id, label,
+evolution, visibility — so there is little to get wrong.</a:t>
+            </a:r>
+          </a:p>
+        </p:txBody>
+      </p:sp>
+      <p:sp>
+        <p:nvSpPr>
+          <p:cNvPr id="14" name="Rectangle 13"/>
+          <p:cNvSpPr/>
+          <p:nvPr/>
+        </p:nvSpPr>
+        <p:spPr>
+          <a:xfrm>
+            <a:off x="365760" y="3291840"/>
+            <a:ext cx="5577840" cy="1463040"/>
           </a:xfrm>
           <a:prstGeom prst="rect">
             <a:avLst/>
@@ -4745,14 +4485,65 @@
       </p:sp>
       <p:sp>
         <p:nvSpPr>
-          <p:cNvPr id="12" name="TextBox 11"/>
-          <p:cNvSpPr txBox="1"/>
-          <p:nvPr/>
-        </p:nvSpPr>
-        <p:spPr>
-          <a:xfrm>
-            <a:off x="548640" y="3886200"/>
-            <a:ext cx="5212080" cy="731520"/>
+          <p:cNvPr id="15" name="Rectangle 14"/>
+          <p:cNvSpPr/>
+          <p:nvPr/>
+        </p:nvSpPr>
+        <p:spPr>
+          <a:xfrm>
+            <a:off x="502920" y="3429000"/>
+            <a:ext cx="502920" cy="502920"/>
+          </a:xfrm>
+          <a:prstGeom prst="rect">
+            <a:avLst/>
+          </a:prstGeom>
+          <a:solidFill>
+            <a:srgbClr val="0F766E"/>
+          </a:solidFill>
+          <a:ln>
+            <a:noFill/>
+          </a:ln>
+        </p:spPr>
+        <p:style>
+          <a:lnRef idx="1">
+            <a:schemeClr val="accent1"/>
+          </a:lnRef>
+          <a:fillRef idx="3">
+            <a:schemeClr val="accent1"/>
+          </a:fillRef>
+          <a:effectRef idx="2">
+            <a:schemeClr val="accent1"/>
+          </a:effectRef>
+          <a:fontRef idx="minor">
+            <a:schemeClr val="lt1"/>
+          </a:fontRef>
+        </p:style>
+        <p:txBody>
+          <a:bodyPr rtlCol="0" anchor="ctr"/>
+          <a:lstStyle/>
+          <a:p>
+            <a:pPr algn="ctr"/>
+            <a:r>
+              <a:rPr sz="1600" b="1">
+                <a:solidFill>
+                  <a:srgbClr val="FFFFFF"/>
+                </a:solidFill>
+              </a:rPr>
+              <a:t>3</a:t>
+            </a:r>
+          </a:p>
+        </p:txBody>
+      </p:sp>
+      <p:sp>
+        <p:nvSpPr>
+          <p:cNvPr id="16" name="TextBox 15"/>
+          <p:cNvSpPr txBox="1"/>
+          <p:nvPr/>
+        </p:nvSpPr>
+        <p:spPr>
+          <a:xfrm>
+            <a:off x="1115568" y="3401568"/>
+            <a:ext cx="4663440" cy="411480"/>
           </a:xfrm>
           <a:prstGeom prst="rect">
             <a:avLst/>
@@ -4767,27 +4558,26 @@
           <a:p>
             <a:pPr algn="l"/>
             <a:r>
-              <a:rPr sz="1800" b="1" i="0">
-                <a:solidFill>
-                  <a:srgbClr val="1D4ED8"/>
-                </a:solidFill>
-              </a:rPr>
-              <a:t>Health systems
-mapping</a:t>
-            </a:r>
-          </a:p>
-        </p:txBody>
-      </p:sp>
-      <p:sp>
-        <p:nvSpPr>
-          <p:cNvPr id="13" name="TextBox 12"/>
-          <p:cNvSpPr txBox="1"/>
-          <p:nvPr/>
-        </p:nvSpPr>
-        <p:spPr>
-          <a:xfrm>
-            <a:off x="548640" y="4663440"/>
-            <a:ext cx="5212080" cy="1463040"/>
+              <a:rPr sz="1500" b="1" i="0">
+                <a:solidFill>
+                  <a:srgbClr val="0F172A"/>
+                </a:solidFill>
+              </a:rPr>
+              <a:t>Check it before you open it</a:t>
+            </a:r>
+          </a:p>
+        </p:txBody>
+      </p:sp>
+      <p:sp>
+        <p:nvSpPr>
+          <p:cNvPr id="17" name="TextBox 16"/>
+          <p:cNvSpPr txBox="1"/>
+          <p:nvPr/>
+        </p:nvSpPr>
+        <p:spPr>
+          <a:xfrm>
+            <a:off x="1115568" y="3822191"/>
+            <a:ext cx="4663440" cy="822960"/>
           </a:xfrm>
           <a:prstGeom prst="rect">
             <a:avLst/>
@@ -4807,21 +4597,22 @@
                   <a:srgbClr val="334155"/>
                 </a:solidFill>
               </a:rPr>
-              <a:t>Map service providers (Objects), care processes (Processes), and the relationships between them. Generate OPL for shared care plan documentation. Export Cypher for database integration.</a:t>
-            </a:r>
-          </a:p>
-        </p:txBody>
-      </p:sp>
-      <p:sp>
-        <p:nvSpPr>
-          <p:cNvPr id="14" name="Rectangle 13"/>
+              <a:t>node validate-rcn-graph.js yourmap.json
+Fix anything it calls an ERROR. Warnings are advice.</a:t>
+            </a:r>
+          </a:p>
+        </p:txBody>
+      </p:sp>
+      <p:sp>
+        <p:nvSpPr>
+          <p:cNvPr id="18" name="Rectangle 17"/>
           <p:cNvSpPr/>
           <p:nvPr/>
         </p:nvSpPr>
         <p:spPr>
           <a:xfrm>
-            <a:off x="6263640" y="3794760"/>
-            <a:ext cx="5577840" cy="2423160"/>
+            <a:off x="6263640" y="3291840"/>
+            <a:ext cx="5577840" cy="1463040"/>
           </a:xfrm>
           <a:prstGeom prst="rect">
             <a:avLst/>
@@ -4857,14 +4648,65 @@
       </p:sp>
       <p:sp>
         <p:nvSpPr>
-          <p:cNvPr id="15" name="TextBox 14"/>
-          <p:cNvSpPr txBox="1"/>
-          <p:nvPr/>
-        </p:nvSpPr>
-        <p:spPr>
-          <a:xfrm>
-            <a:off x="6446520" y="3886200"/>
-            <a:ext cx="5212080" cy="731520"/>
+          <p:cNvPr id="19" name="Rectangle 18"/>
+          <p:cNvSpPr/>
+          <p:nvPr/>
+        </p:nvSpPr>
+        <p:spPr>
+          <a:xfrm>
+            <a:off x="6400800" y="3429000"/>
+            <a:ext cx="502920" cy="502920"/>
+          </a:xfrm>
+          <a:prstGeom prst="rect">
+            <a:avLst/>
+          </a:prstGeom>
+          <a:solidFill>
+            <a:srgbClr val="0F766E"/>
+          </a:solidFill>
+          <a:ln>
+            <a:noFill/>
+          </a:ln>
+        </p:spPr>
+        <p:style>
+          <a:lnRef idx="1">
+            <a:schemeClr val="accent1"/>
+          </a:lnRef>
+          <a:fillRef idx="3">
+            <a:schemeClr val="accent1"/>
+          </a:fillRef>
+          <a:effectRef idx="2">
+            <a:schemeClr val="accent1"/>
+          </a:effectRef>
+          <a:fontRef idx="minor">
+            <a:schemeClr val="lt1"/>
+          </a:fontRef>
+        </p:style>
+        <p:txBody>
+          <a:bodyPr rtlCol="0" anchor="ctr"/>
+          <a:lstStyle/>
+          <a:p>
+            <a:pPr algn="ctr"/>
+            <a:r>
+              <a:rPr sz="1600" b="1">
+                <a:solidFill>
+                  <a:srgbClr val="FFFFFF"/>
+                </a:solidFill>
+              </a:rPr>
+              <a:t>4</a:t>
+            </a:r>
+          </a:p>
+        </p:txBody>
+      </p:sp>
+      <p:sp>
+        <p:nvSpPr>
+          <p:cNvPr id="20" name="TextBox 19"/>
+          <p:cNvSpPr txBox="1"/>
+          <p:nvPr/>
+        </p:nvSpPr>
+        <p:spPr>
+          <a:xfrm>
+            <a:off x="7013448" y="3401568"/>
+            <a:ext cx="4663440" cy="411480"/>
           </a:xfrm>
           <a:prstGeom prst="rect">
             <a:avLst/>
@@ -4879,27 +4721,26 @@
           <a:p>
             <a:pPr algn="l"/>
             <a:r>
-              <a:rPr sz="1800" b="1" i="0">
-                <a:solidFill>
-                  <a:srgbClr val="1D4ED8"/>
-                </a:solidFill>
-              </a:rPr>
-              <a:t>Policy and
-governance</a:t>
-            </a:r>
-          </a:p>
-        </p:txBody>
-      </p:sp>
-      <p:sp>
-        <p:nvSpPr>
-          <p:cNvPr id="16" name="TextBox 15"/>
-          <p:cNvSpPr txBox="1"/>
-          <p:nvPr/>
-        </p:nvSpPr>
-        <p:spPr>
-          <a:xfrm>
-            <a:off x="6446520" y="4663440"/>
-            <a:ext cx="5212080" cy="1463040"/>
+              <a:rPr sz="1500" b="1" i="0">
+                <a:solidFill>
+                  <a:srgbClr val="0F172A"/>
+                </a:solidFill>
+              </a:rPr>
+              <a:t>Drag it in, then drag the nodes</a:t>
+            </a:r>
+          </a:p>
+        </p:txBody>
+      </p:sp>
+      <p:sp>
+        <p:nvSpPr>
+          <p:cNvPr id="21" name="TextBox 20"/>
+          <p:cNvSpPr txBox="1"/>
+          <p:nvPr/>
+        </p:nvSpPr>
+        <p:spPr>
+          <a:xfrm>
+            <a:off x="7013448" y="3822191"/>
+            <a:ext cx="4663440" cy="822960"/>
           </a:xfrm>
           <a:prstGeom prst="rect">
             <a:avLst/>
@@ -4919,7 +4760,119 @@
                   <a:srgbClr val="334155"/>
                 </a:solidFill>
               </a:rPr>
-              <a:t>Use EIP columns to position stakeholders, institutions, and ecological factors. Use Triples to attach agreements or interventions to specific causal links. Animate pathways with Trace mode for presentations.</a:t>
+              <a:t>IMPORT → JSON. The map opens in Wardley mode itself.
+Your corrections are written back into the file on export.</a:t>
+            </a:r>
+          </a:p>
+        </p:txBody>
+      </p:sp>
+      <p:sp>
+        <p:nvSpPr>
+          <p:cNvPr id="22" name="Rectangle 21"/>
+          <p:cNvSpPr/>
+          <p:nvPr/>
+        </p:nvSpPr>
+        <p:spPr>
+          <a:xfrm>
+            <a:off x="365760" y="5029200"/>
+            <a:ext cx="11475720" cy="1234440"/>
+          </a:xfrm>
+          <a:prstGeom prst="rect">
+            <a:avLst/>
+          </a:prstGeom>
+          <a:solidFill>
+            <a:srgbClr val="0F172A"/>
+          </a:solidFill>
+          <a:ln>
+            <a:noFill/>
+          </a:ln>
+        </p:spPr>
+        <p:style>
+          <a:lnRef idx="1">
+            <a:schemeClr val="accent1"/>
+          </a:lnRef>
+          <a:fillRef idx="3">
+            <a:schemeClr val="accent1"/>
+          </a:fillRef>
+          <a:effectRef idx="2">
+            <a:schemeClr val="accent1"/>
+          </a:effectRef>
+          <a:fontRef idx="minor">
+            <a:schemeClr val="lt1"/>
+          </a:fontRef>
+        </p:style>
+        <p:txBody>
+          <a:bodyPr rtlCol="0" anchor="ctr"/>
+          <a:lstStyle/>
+          <a:p>
+            <a:pPr algn="ctr"/>
+          </a:p>
+        </p:txBody>
+      </p:sp>
+      <p:sp>
+        <p:nvSpPr>
+          <p:cNvPr id="23" name="TextBox 22"/>
+          <p:cNvSpPr txBox="1"/>
+          <p:nvPr/>
+        </p:nvSpPr>
+        <p:spPr>
+          <a:xfrm>
+            <a:off x="640080" y="5138928"/>
+            <a:ext cx="10972800" cy="365760"/>
+          </a:xfrm>
+          <a:prstGeom prst="rect">
+            <a:avLst/>
+          </a:prstGeom>
+          <a:noFill/>
+        </p:spPr>
+        <p:txBody>
+          <a:bodyPr wrap="square">
+            <a:spAutoFit/>
+          </a:bodyPr>
+          <a:lstStyle/>
+          <a:p>
+            <a:pPr algn="l"/>
+            <a:r>
+              <a:rPr sz="1500" b="1" i="0">
+                <a:solidFill>
+                  <a:srgbClr val="F0FDFA"/>
+                </a:solidFill>
+              </a:rPr>
+              <a:t>The one thing that goes badly wrong: which way the evolution axis runs</a:t>
+            </a:r>
+          </a:p>
+        </p:txBody>
+      </p:sp>
+      <p:sp>
+        <p:nvSpPr>
+          <p:cNvPr id="24" name="TextBox 23"/>
+          <p:cNvSpPr txBox="1"/>
+          <p:nvPr/>
+        </p:nvSpPr>
+        <p:spPr>
+          <a:xfrm>
+            <a:off x="640080" y="5504688"/>
+            <a:ext cx="10972800" cy="731520"/>
+          </a:xfrm>
+          <a:prstGeom prst="rect">
+            <a:avLst/>
+          </a:prstGeom>
+          <a:noFill/>
+        </p:spPr>
+        <p:txBody>
+          <a:bodyPr wrap="square">
+            <a:spAutoFit/>
+          </a:bodyPr>
+          <a:lstStyle/>
+          <a:p>
+            <a:pPr algn="l"/>
+            <a:r>
+              <a:rPr sz="1300" b="0" i="0">
+                <a:solidFill>
+                  <a:srgbClr val="CBD5E1"/>
+                </a:solidFill>
+              </a:rPr>
+              <a:t>Two conventions are in circulation and they run opposite ways. RCN and standard Wardley put Commodity on the right; the Wardley Map Generator's own format puts Genesis there. Get it backwards and every commodity renders in Genesis, looking entirely deliberate. The tool refuses to guess — a file that does not say will not load.</a:t>
             </a:r>
           </a:p>
         </p:txBody>
@@ -5000,7 +4953,7 @@
             <a:avLst/>
           </a:prstGeom>
           <a:solidFill>
-            <a:srgbClr val="0F766E"/>
+            <a:srgbClr val="C2410C"/>
           </a:solidFill>
           <a:ln>
             <a:noFill/>
@@ -5057,7 +5010,7 @@
                   <a:srgbClr val="FFFFFF"/>
                 </a:solidFill>
               </a:rPr>
-              <a:t>Getting started — in under 5 minutes</a:t>
+              <a:t>The legend is the registry</a:t>
             </a:r>
           </a:p>
         </p:txBody>
@@ -5070,8 +5023,8 @@
         </p:nvSpPr>
         <p:spPr>
           <a:xfrm>
-            <a:off x="365760" y="1188720"/>
-            <a:ext cx="5577840" cy="1645920"/>
+            <a:off x="365760" y="1143000"/>
+            <a:ext cx="5486400" cy="5257800"/>
           </a:xfrm>
           <a:prstGeom prst="rect">
             <a:avLst/>
@@ -5107,51 +5060,34 @@
       </p:sp>
       <p:sp>
         <p:nvSpPr>
-          <p:cNvPr id="6" name="Oval 5"/>
-          <p:cNvSpPr/>
-          <p:nvPr/>
-        </p:nvSpPr>
-        <p:spPr>
-          <a:xfrm>
-            <a:off x="502920" y="1325880"/>
-            <a:ext cx="502920" cy="502920"/>
-          </a:xfrm>
-          <a:prstGeom prst="ellipse">
-            <a:avLst/>
-          </a:prstGeom>
-          <a:solidFill>
-            <a:srgbClr val="0F766E"/>
-          </a:solidFill>
-          <a:ln>
-            <a:noFill/>
-          </a:ln>
-        </p:spPr>
-        <p:style>
-          <a:lnRef idx="1">
-            <a:schemeClr val="accent1"/>
-          </a:lnRef>
-          <a:fillRef idx="3">
-            <a:schemeClr val="accent1"/>
-          </a:fillRef>
-          <a:effectRef idx="2">
-            <a:schemeClr val="accent1"/>
-          </a:effectRef>
-          <a:fontRef idx="minor">
-            <a:schemeClr val="lt1"/>
-          </a:fontRef>
-        </p:style>
-        <p:txBody>
-          <a:bodyPr rtlCol="0" anchor="ctr"/>
-          <a:lstStyle/>
-          <a:p>
-            <a:pPr algn="ctr"/>
-            <a:r>
-              <a:rPr sz="1600" b="1">
-                <a:solidFill>
-                  <a:srgbClr val="FFFFFF"/>
-                </a:solidFill>
-              </a:rPr>
-              <a:t>1</a:t>
+          <p:cNvPr id="6" name="TextBox 5"/>
+          <p:cNvSpPr txBox="1"/>
+          <p:nvPr/>
+        </p:nvSpPr>
+        <p:spPr>
+          <a:xfrm>
+            <a:off x="548640" y="1234440"/>
+            <a:ext cx="5120640" cy="502920"/>
+          </a:xfrm>
+          <a:prstGeom prst="rect">
+            <a:avLst/>
+          </a:prstGeom>
+          <a:noFill/>
+        </p:spPr>
+        <p:txBody>
+          <a:bodyPr wrap="square">
+            <a:spAutoFit/>
+          </a:bodyPr>
+          <a:lstStyle/>
+          <a:p>
+            <a:pPr algn="l"/>
+            <a:r>
+              <a:rPr sz="1600" b="1" i="0">
+                <a:solidFill>
+                  <a:srgbClr val="C2410C"/>
+                </a:solidFill>
+              </a:rPr>
+              <a:t>Style by kind, not by element</a:t>
             </a:r>
           </a:p>
         </p:txBody>
@@ -5164,8 +5100,8 @@
         </p:nvSpPr>
         <p:spPr>
           <a:xfrm>
-            <a:off x="1115568" y="1298448"/>
-            <a:ext cx="4663440" cy="411480"/>
+            <a:off x="548640" y="1810512"/>
+            <a:ext cx="5120640" cy="457200"/>
           </a:xfrm>
           <a:prstGeom prst="rect">
             <a:avLst/>
@@ -5180,47 +5116,140 @@
           <a:p>
             <a:pPr algn="l"/>
             <a:r>
-              <a:rPr sz="1500" b="1" i="0">
+              <a:rPr sz="1300" b="0" i="0">
+                <a:solidFill>
+                  <a:srgbClr val="334155"/>
+                </a:solidFill>
+              </a:rPr>
+              <a:t>In most tools the legend is a picture of the colour scheme — kept in sync by hand, and the first thing to go stale.</a:t>
+            </a:r>
+          </a:p>
+        </p:txBody>
+      </p:sp>
+      <p:sp>
+        <p:nvSpPr>
+          <p:cNvPr id="8" name="TextBox 7"/>
+          <p:cNvSpPr txBox="1"/>
+          <p:nvPr/>
+        </p:nvSpPr>
+        <p:spPr>
+          <a:xfrm>
+            <a:off x="548640" y="2468880"/>
+            <a:ext cx="5120640" cy="3657600"/>
+          </a:xfrm>
+          <a:prstGeom prst="rect">
+            <a:avLst/>
+          </a:prstGeom>
+          <a:noFill/>
+        </p:spPr>
+        <p:txBody>
+          <a:bodyPr wrap="square">
+            <a:spAutoFit/>
+          </a:bodyPr>
+          <a:lstStyle/>
+          <a:p>
+            <a:pPr>
+              <a:spcAft>
+                <a:spcPts val="600"/>
+              </a:spcAft>
+            </a:pPr>
+            <a:r>
+              <a:rPr sz="1300" b="0">
                 <a:solidFill>
                   <a:srgbClr val="0F172A"/>
                 </a:solidFill>
               </a:rPr>
-              <a:t>Open the file</a:t>
-            </a:r>
-          </a:p>
-        </p:txBody>
-      </p:sp>
-      <p:sp>
-        <p:nvSpPr>
-          <p:cNvPr id="8" name="TextBox 7"/>
-          <p:cNvSpPr txBox="1"/>
-          <p:nvPr/>
-        </p:nvSpPr>
-        <p:spPr>
-          <a:xfrm>
-            <a:off x="1115568" y="1737360"/>
-            <a:ext cx="4663440" cy="914400"/>
-          </a:xfrm>
-          <a:prstGeom prst="rect">
-            <a:avLst/>
-          </a:prstGeom>
-          <a:noFill/>
-        </p:spPr>
-        <p:txBody>
-          <a:bodyPr wrap="square">
-            <a:spAutoFit/>
-          </a:bodyPr>
-          <a:lstStyle/>
-          <a:p>
-            <a:pPr algn="l"/>
-            <a:r>
-              <a:rPr sz="1300" b="0" i="0">
-                <a:solidFill>
-                  <a:srgbClr val="334155"/>
-                </a:solidFill>
-              </a:rPr>
-              <a:t>Open graph-tool-v22.html in any modern browser.
-No install. No account. No internet required after loading.</a:t>
+              <a:t>• A legend row DEFINES a kind — its fill, border, width, dash</a:t>
+            </a:r>
+          </a:p>
+          <a:p>
+            <a:pPr>
+              <a:spcAft>
+                <a:spcPts val="600"/>
+              </a:spcAft>
+            </a:pPr>
+            <a:r>
+              <a:rPr sz="1300" b="0">
+                <a:solidFill>
+                  <a:srgbClr val="0F172A"/>
+                </a:solidFill>
+              </a:rPr>
+              <a:t>• Nodes and edges follow a row instead of carrying their own styling</a:t>
+            </a:r>
+          </a:p>
+          <a:p>
+            <a:pPr>
+              <a:spcAft>
+                <a:spcPts val="600"/>
+              </a:spcAft>
+            </a:pPr>
+            <a:r>
+              <a:rPr sz="1300" b="0">
+                <a:solidFill>
+                  <a:srgbClr val="0F172A"/>
+                </a:solidFill>
+              </a:rPr>
+              <a:t>• Change the row and every element following it changes at once</a:t>
+            </a:r>
+          </a:p>
+          <a:p>
+            <a:pPr>
+              <a:spcAft>
+                <a:spcPts val="600"/>
+              </a:spcAft>
+            </a:pPr>
+            <a:r>
+              <a:rPr sz="1300" b="0">
+                <a:solidFill>
+                  <a:srgbClr val="0F172A"/>
+                </a:solidFill>
+              </a:rPr>
+              <a:t>• Assign selection puts a selection on a row</a:t>
+            </a:r>
+          </a:p>
+          <a:p>
+            <a:pPr>
+              <a:spcAft>
+                <a:spcPts val="600"/>
+              </a:spcAft>
+            </a:pPr>
+            <a:r>
+              <a:rPr sz="1300" b="0">
+                <a:solidFill>
+                  <a:srgbClr val="0F172A"/>
+                </a:solidFill>
+              </a:rPr>
+              <a:t>• Override one element and it diverges on that property only — still following the row for everything else</a:t>
+            </a:r>
+          </a:p>
+          <a:p>
+            <a:pPr>
+              <a:spcAft>
+                <a:spcPts val="600"/>
+              </a:spcAft>
+            </a:pPr>
+            <a:r>
+              <a:rPr sz="1300" b="0">
+                <a:solidFill>
+                  <a:srgbClr val="0F172A"/>
+                </a:solidFill>
+              </a:rPr>
+              <a:t>• Clear overrides snaps every follower back to the row</a:t>
+            </a:r>
+          </a:p>
+          <a:p>
+            <a:pPr>
+              <a:spcAft>
+                <a:spcPts val="600"/>
+              </a:spcAft>
+            </a:pPr>
+            <a:r>
+              <a:rPr sz="1300" b="0">
+                <a:solidFill>
+                  <a:srgbClr val="0F172A"/>
+                </a:solidFill>
+              </a:rPr>
+              <a:t>• 6–8 kinds is what a group can read; the panel warns above 8, and says how many elements follow no row at all</a:t>
             </a:r>
           </a:p>
         </p:txBody>
@@ -5233,8 +5262,8 @@
         </p:nvSpPr>
         <p:spPr>
           <a:xfrm>
-            <a:off x="6263640" y="1188720"/>
-            <a:ext cx="5577840" cy="1645920"/>
+            <a:off x="6126480" y="1143000"/>
+            <a:ext cx="5669280" cy="5257800"/>
           </a:xfrm>
           <a:prstGeom prst="rect">
             <a:avLst/>
@@ -5270,51 +5299,34 @@
       </p:sp>
       <p:sp>
         <p:nvSpPr>
-          <p:cNvPr id="10" name="Oval 9"/>
-          <p:cNvSpPr/>
-          <p:nvPr/>
-        </p:nvSpPr>
-        <p:spPr>
-          <a:xfrm>
-            <a:off x="6400800" y="1325880"/>
-            <a:ext cx="502920" cy="502920"/>
-          </a:xfrm>
-          <a:prstGeom prst="ellipse">
-            <a:avLst/>
-          </a:prstGeom>
-          <a:solidFill>
-            <a:srgbClr val="0F766E"/>
-          </a:solidFill>
-          <a:ln>
-            <a:noFill/>
-          </a:ln>
-        </p:spPr>
-        <p:style>
-          <a:lnRef idx="1">
-            <a:schemeClr val="accent1"/>
-          </a:lnRef>
-          <a:fillRef idx="3">
-            <a:schemeClr val="accent1"/>
-          </a:fillRef>
-          <a:effectRef idx="2">
-            <a:schemeClr val="accent1"/>
-          </a:effectRef>
-          <a:fontRef idx="minor">
-            <a:schemeClr val="lt1"/>
-          </a:fontRef>
-        </p:style>
-        <p:txBody>
-          <a:bodyPr rtlCol="0" anchor="ctr"/>
-          <a:lstStyle/>
-          <a:p>
-            <a:pPr algn="ctr"/>
-            <a:r>
-              <a:rPr sz="1600" b="1">
-                <a:solidFill>
-                  <a:srgbClr val="FFFFFF"/>
-                </a:solidFill>
-              </a:rPr>
-              <a:t>2</a:t>
+          <p:cNvPr id="10" name="TextBox 9"/>
+          <p:cNvSpPr txBox="1"/>
+          <p:nvPr/>
+        </p:nvSpPr>
+        <p:spPr>
+          <a:xfrm>
+            <a:off x="6309360" y="1234440"/>
+            <a:ext cx="5303520" cy="502920"/>
+          </a:xfrm>
+          <a:prstGeom prst="rect">
+            <a:avLst/>
+          </a:prstGeom>
+          <a:noFill/>
+        </p:spPr>
+        <p:txBody>
+          <a:bodyPr wrap="square">
+            <a:spAutoFit/>
+          </a:bodyPr>
+          <a:lstStyle/>
+          <a:p>
+            <a:pPr algn="l"/>
+            <a:r>
+              <a:rPr sz="1600" b="1" i="0">
+                <a:solidFill>
+                  <a:srgbClr val="166A34"/>
+                </a:solidFill>
+              </a:rPr>
+              <a:t>Exports that describe themselves</a:t>
             </a:r>
           </a:p>
         </p:txBody>
@@ -5327,8 +5339,8 @@
         </p:nvSpPr>
         <p:spPr>
           <a:xfrm>
-            <a:off x="7013448" y="1298448"/>
-            <a:ext cx="4663440" cy="411480"/>
+            <a:off x="6309360" y="1810512"/>
+            <a:ext cx="5303520" cy="457200"/>
           </a:xfrm>
           <a:prstGeom prst="rect">
             <a:avLst/>
@@ -5343,700 +5355,110 @@
           <a:p>
             <a:pPr algn="l"/>
             <a:r>
-              <a:rPr sz="1500" b="1" i="0">
+              <a:rPr sz="1300" b="0" i="0">
+                <a:solidFill>
+                  <a:srgbClr val="334155"/>
+                </a:solidFill>
+              </a:rPr>
+              <a:t>Styling by registry creates a trap, and the tool closes it on the way out.</a:t>
+            </a:r>
+          </a:p>
+        </p:txBody>
+      </p:sp>
+      <p:sp>
+        <p:nvSpPr>
+          <p:cNvPr id="12" name="TextBox 11"/>
+          <p:cNvSpPr txBox="1"/>
+          <p:nvPr/>
+        </p:nvSpPr>
+        <p:spPr>
+          <a:xfrm>
+            <a:off x="6309360" y="2468880"/>
+            <a:ext cx="5303520" cy="3657600"/>
+          </a:xfrm>
+          <a:prstGeom prst="rect">
+            <a:avLst/>
+          </a:prstGeom>
+          <a:noFill/>
+        </p:spPr>
+        <p:txBody>
+          <a:bodyPr wrap="square">
+            <a:spAutoFit/>
+          </a:bodyPr>
+          <a:lstStyle/>
+          <a:p>
+            <a:pPr>
+              <a:spcAft>
+                <a:spcPts val="600"/>
+              </a:spcAft>
+            </a:pPr>
+            <a:r>
+              <a:rPr sz="1300" b="0">
                 <a:solidFill>
                   <a:srgbClr val="0F172A"/>
                 </a:solidFill>
               </a:rPr>
-              <a:t>Set a model name</a:t>
-            </a:r>
-          </a:p>
-        </p:txBody>
-      </p:sp>
-      <p:sp>
-        <p:nvSpPr>
-          <p:cNvPr id="12" name="TextBox 11"/>
-          <p:cNvSpPr txBox="1"/>
-          <p:nvPr/>
-        </p:nvSpPr>
-        <p:spPr>
-          <a:xfrm>
-            <a:off x="7013448" y="1737360"/>
-            <a:ext cx="4663440" cy="914400"/>
-          </a:xfrm>
-          <a:prstGeom prst="rect">
-            <a:avLst/>
-          </a:prstGeom>
-          <a:noFill/>
-        </p:spPr>
-        <p:txBody>
-          <a:bodyPr wrap="square">
-            <a:spAutoFit/>
-          </a:bodyPr>
-          <a:lstStyle/>
-          <a:p>
-            <a:pPr algn="l"/>
-            <a:r>
-              <a:rPr sz="1300" b="0" i="0">
-                <a:solidFill>
-                  <a:srgbClr val="334155"/>
-                </a:solidFill>
-              </a:rPr>
-              <a:t>Type a name in the Model Name field at the top of the sidebar.
-This becomes the filename for all exports.</a:t>
-            </a:r>
-          </a:p>
-        </p:txBody>
-      </p:sp>
-      <p:sp>
-        <p:nvSpPr>
-          <p:cNvPr id="13" name="Rectangle 12"/>
-          <p:cNvSpPr/>
-          <p:nvPr/>
-        </p:nvSpPr>
-        <p:spPr>
-          <a:xfrm>
-            <a:off x="365760" y="2971800"/>
-            <a:ext cx="5577840" cy="1645920"/>
-          </a:xfrm>
-          <a:prstGeom prst="rect">
-            <a:avLst/>
-          </a:prstGeom>
-          <a:solidFill>
-            <a:srgbClr val="FFFFFF"/>
-          </a:solidFill>
-          <a:ln>
-            <a:noFill/>
-          </a:ln>
-        </p:spPr>
-        <p:style>
-          <a:lnRef idx="1">
-            <a:schemeClr val="accent1"/>
-          </a:lnRef>
-          <a:fillRef idx="3">
-            <a:schemeClr val="accent1"/>
-          </a:fillRef>
-          <a:effectRef idx="2">
-            <a:schemeClr val="accent1"/>
-          </a:effectRef>
-          <a:fontRef idx="minor">
-            <a:schemeClr val="lt1"/>
-          </a:fontRef>
-        </p:style>
-        <p:txBody>
-          <a:bodyPr rtlCol="0" anchor="ctr"/>
-          <a:lstStyle/>
-          <a:p>
-            <a:pPr algn="ctr"/>
-          </a:p>
-        </p:txBody>
-      </p:sp>
-      <p:sp>
-        <p:nvSpPr>
-          <p:cNvPr id="14" name="Oval 13"/>
-          <p:cNvSpPr/>
-          <p:nvPr/>
-        </p:nvSpPr>
-        <p:spPr>
-          <a:xfrm>
-            <a:off x="502920" y="3108960"/>
-            <a:ext cx="502920" cy="502920"/>
-          </a:xfrm>
-          <a:prstGeom prst="ellipse">
-            <a:avLst/>
-          </a:prstGeom>
-          <a:solidFill>
-            <a:srgbClr val="0F766E"/>
-          </a:solidFill>
-          <a:ln>
-            <a:noFill/>
-          </a:ln>
-        </p:spPr>
-        <p:style>
-          <a:lnRef idx="1">
-            <a:schemeClr val="accent1"/>
-          </a:lnRef>
-          <a:fillRef idx="3">
-            <a:schemeClr val="accent1"/>
-          </a:fillRef>
-          <a:effectRef idx="2">
-            <a:schemeClr val="accent1"/>
-          </a:effectRef>
-          <a:fontRef idx="minor">
-            <a:schemeClr val="lt1"/>
-          </a:fontRef>
-        </p:style>
-        <p:txBody>
-          <a:bodyPr rtlCol="0" anchor="ctr"/>
-          <a:lstStyle/>
-          <a:p>
-            <a:pPr algn="ctr"/>
-            <a:r>
-              <a:rPr sz="1600" b="1">
-                <a:solidFill>
-                  <a:srgbClr val="FFFFFF"/>
-                </a:solidFill>
-              </a:rPr>
-              <a:t>3</a:t>
-            </a:r>
-          </a:p>
-        </p:txBody>
-      </p:sp>
-      <p:sp>
-        <p:nvSpPr>
-          <p:cNvPr id="15" name="TextBox 14"/>
-          <p:cNvSpPr txBox="1"/>
-          <p:nvPr/>
-        </p:nvSpPr>
-        <p:spPr>
-          <a:xfrm>
-            <a:off x="1115568" y="3081528"/>
-            <a:ext cx="4663440" cy="411480"/>
-          </a:xfrm>
-          <a:prstGeom prst="rect">
-            <a:avLst/>
-          </a:prstGeom>
-          <a:noFill/>
-        </p:spPr>
-        <p:txBody>
-          <a:bodyPr wrap="square">
-            <a:spAutoFit/>
-          </a:bodyPr>
-          <a:lstStyle/>
-          <a:p>
-            <a:pPr algn="l"/>
-            <a:r>
-              <a:rPr sz="1500" b="1" i="0">
+              <a:t>• An element following a row needs no colour of its own to draw correctly</a:t>
+            </a:r>
+          </a:p>
+          <a:p>
+            <a:pPr>
+              <a:spcAft>
+                <a:spcPts val="600"/>
+              </a:spcAft>
+            </a:pPr>
+            <a:r>
+              <a:rPr sz="1300" b="0">
                 <a:solidFill>
                   <a:srgbClr val="0F172A"/>
                 </a:solidFill>
               </a:rPr>
-              <a:t>Place nodes</a:t>
-            </a:r>
-          </a:p>
-        </p:txBody>
-      </p:sp>
-      <p:sp>
-        <p:nvSpPr>
-          <p:cNvPr id="16" name="TextBox 15"/>
-          <p:cNvSpPr txBox="1"/>
-          <p:nvPr/>
-        </p:nvSpPr>
-        <p:spPr>
-          <a:xfrm>
-            <a:off x="1115568" y="3520440"/>
-            <a:ext cx="4663440" cy="914400"/>
-          </a:xfrm>
-          <a:prstGeom prst="rect">
-            <a:avLst/>
-          </a:prstGeom>
-          <a:noFill/>
-        </p:spPr>
-        <p:txBody>
-          <a:bodyPr wrap="square">
-            <a:spAutoFit/>
-          </a:bodyPr>
-          <a:lstStyle/>
-          <a:p>
-            <a:pPr algn="l"/>
-            <a:r>
-              <a:rPr sz="1300" b="0" i="0">
-                <a:solidFill>
-                  <a:srgbClr val="334155"/>
-                </a:solidFill>
-              </a:rPr>
-              <a:t>Click + Node, then click the canvas to place it.
-Double-tap to type a label. Press n for sticky Node mode.</a:t>
-            </a:r>
-          </a:p>
-        </p:txBody>
-      </p:sp>
-      <p:sp>
-        <p:nvSpPr>
-          <p:cNvPr id="17" name="Rectangle 16"/>
-          <p:cNvSpPr/>
-          <p:nvPr/>
-        </p:nvSpPr>
-        <p:spPr>
-          <a:xfrm>
-            <a:off x="6263640" y="2971800"/>
-            <a:ext cx="5577840" cy="1645920"/>
-          </a:xfrm>
-          <a:prstGeom prst="rect">
-            <a:avLst/>
-          </a:prstGeom>
-          <a:solidFill>
-            <a:srgbClr val="FFFFFF"/>
-          </a:solidFill>
-          <a:ln>
-            <a:noFill/>
-          </a:ln>
-        </p:spPr>
-        <p:style>
-          <a:lnRef idx="1">
-            <a:schemeClr val="accent1"/>
-          </a:lnRef>
-          <a:fillRef idx="3">
-            <a:schemeClr val="accent1"/>
-          </a:fillRef>
-          <a:effectRef idx="2">
-            <a:schemeClr val="accent1"/>
-          </a:effectRef>
-          <a:fontRef idx="minor">
-            <a:schemeClr val="lt1"/>
-          </a:fontRef>
-        </p:style>
-        <p:txBody>
-          <a:bodyPr rtlCol="0" anchor="ctr"/>
-          <a:lstStyle/>
-          <a:p>
-            <a:pPr algn="ctr"/>
-          </a:p>
-        </p:txBody>
-      </p:sp>
-      <p:sp>
-        <p:nvSpPr>
-          <p:cNvPr id="18" name="Oval 17"/>
-          <p:cNvSpPr/>
-          <p:nvPr/>
-        </p:nvSpPr>
-        <p:spPr>
-          <a:xfrm>
-            <a:off x="6400800" y="3108960"/>
-            <a:ext cx="502920" cy="502920"/>
-          </a:xfrm>
-          <a:prstGeom prst="ellipse">
-            <a:avLst/>
-          </a:prstGeom>
-          <a:solidFill>
-            <a:srgbClr val="0F766E"/>
-          </a:solidFill>
-          <a:ln>
-            <a:noFill/>
-          </a:ln>
-        </p:spPr>
-        <p:style>
-          <a:lnRef idx="1">
-            <a:schemeClr val="accent1"/>
-          </a:lnRef>
-          <a:fillRef idx="3">
-            <a:schemeClr val="accent1"/>
-          </a:fillRef>
-          <a:effectRef idx="2">
-            <a:schemeClr val="accent1"/>
-          </a:effectRef>
-          <a:fontRef idx="minor">
-            <a:schemeClr val="lt1"/>
-          </a:fontRef>
-        </p:style>
-        <p:txBody>
-          <a:bodyPr rtlCol="0" anchor="ctr"/>
-          <a:lstStyle/>
-          <a:p>
-            <a:pPr algn="ctr"/>
-            <a:r>
-              <a:rPr sz="1600" b="1">
-                <a:solidFill>
-                  <a:srgbClr val="FFFFFF"/>
-                </a:solidFill>
-              </a:rPr>
-              <a:t>4</a:t>
-            </a:r>
-          </a:p>
-        </p:txBody>
-      </p:sp>
-      <p:sp>
-        <p:nvSpPr>
-          <p:cNvPr id="19" name="TextBox 18"/>
-          <p:cNvSpPr txBox="1"/>
-          <p:nvPr/>
-        </p:nvSpPr>
-        <p:spPr>
-          <a:xfrm>
-            <a:off x="7013448" y="3081528"/>
-            <a:ext cx="4663440" cy="411480"/>
-          </a:xfrm>
-          <a:prstGeom prst="rect">
-            <a:avLst/>
-          </a:prstGeom>
-          <a:noFill/>
-        </p:spPr>
-        <p:txBody>
-          <a:bodyPr wrap="square">
-            <a:spAutoFit/>
-          </a:bodyPr>
-          <a:lstStyle/>
-          <a:p>
-            <a:pPr algn="l"/>
-            <a:r>
-              <a:rPr sz="1500" b="1" i="0">
+              <a:t>• So a saved file can be perfectly right on screen and look entirely unstyled to anything that is not this tool — a database projection, a converter, an AI assistant reading it, a person scanning the JSON</a:t>
+            </a:r>
+          </a:p>
+          <a:p>
+            <a:pPr>
+              <a:spcAft>
+                <a:spcPts val="600"/>
+              </a:spcAft>
+            </a:pPr>
+            <a:r>
+              <a:rPr sz="1300" b="0">
                 <a:solidFill>
                   <a:srgbClr val="0F172A"/>
                 </a:solidFill>
               </a:rPr>
-              <a:t>Draw edges</a:t>
-            </a:r>
-          </a:p>
-        </p:txBody>
-      </p:sp>
-      <p:sp>
-        <p:nvSpPr>
-          <p:cNvPr id="20" name="TextBox 19"/>
-          <p:cNvSpPr txBox="1"/>
-          <p:nvPr/>
-        </p:nvSpPr>
-        <p:spPr>
-          <a:xfrm>
-            <a:off x="7013448" y="3520440"/>
-            <a:ext cx="4663440" cy="914400"/>
-          </a:xfrm>
-          <a:prstGeom prst="rect">
-            <a:avLst/>
-          </a:prstGeom>
-          <a:noFill/>
-        </p:spPr>
-        <p:txBody>
-          <a:bodyPr wrap="square">
-            <a:spAutoFit/>
-          </a:bodyPr>
-          <a:lstStyle/>
-          <a:p>
-            <a:pPr algn="l"/>
-            <a:r>
-              <a:rPr sz="1300" b="0" i="0">
-                <a:solidFill>
-                  <a:srgbClr val="334155"/>
-                </a:solidFill>
-              </a:rPr>
-              <a:t>Click + Edge, then drag from source to target.
-Press e for sticky Edge mode to chain many edges quickly.</a:t>
-            </a:r>
-          </a:p>
-        </p:txBody>
-      </p:sp>
-      <p:sp>
-        <p:nvSpPr>
-          <p:cNvPr id="21" name="Rectangle 20"/>
-          <p:cNvSpPr/>
-          <p:nvPr/>
-        </p:nvSpPr>
-        <p:spPr>
-          <a:xfrm>
-            <a:off x="365760" y="4754880"/>
-            <a:ext cx="5577840" cy="1645920"/>
-          </a:xfrm>
-          <a:prstGeom prst="rect">
-            <a:avLst/>
-          </a:prstGeom>
-          <a:solidFill>
-            <a:srgbClr val="FFFFFF"/>
-          </a:solidFill>
-          <a:ln>
-            <a:noFill/>
-          </a:ln>
-        </p:spPr>
-        <p:style>
-          <a:lnRef idx="1">
-            <a:schemeClr val="accent1"/>
-          </a:lnRef>
-          <a:fillRef idx="3">
-            <a:schemeClr val="accent1"/>
-          </a:fillRef>
-          <a:effectRef idx="2">
-            <a:schemeClr val="accent1"/>
-          </a:effectRef>
-          <a:fontRef idx="minor">
-            <a:schemeClr val="lt1"/>
-          </a:fontRef>
-        </p:style>
-        <p:txBody>
-          <a:bodyPr rtlCol="0" anchor="ctr"/>
-          <a:lstStyle/>
-          <a:p>
-            <a:pPr algn="ctr"/>
-          </a:p>
-        </p:txBody>
-      </p:sp>
-      <p:sp>
-        <p:nvSpPr>
-          <p:cNvPr id="22" name="Oval 21"/>
-          <p:cNvSpPr/>
-          <p:nvPr/>
-        </p:nvSpPr>
-        <p:spPr>
-          <a:xfrm>
-            <a:off x="502920" y="4892040"/>
-            <a:ext cx="502920" cy="502920"/>
-          </a:xfrm>
-          <a:prstGeom prst="ellipse">
-            <a:avLst/>
-          </a:prstGeom>
-          <a:solidFill>
-            <a:srgbClr val="0F766E"/>
-          </a:solidFill>
-          <a:ln>
-            <a:noFill/>
-          </a:ln>
-        </p:spPr>
-        <p:style>
-          <a:lnRef idx="1">
-            <a:schemeClr val="accent1"/>
-          </a:lnRef>
-          <a:fillRef idx="3">
-            <a:schemeClr val="accent1"/>
-          </a:fillRef>
-          <a:effectRef idx="2">
-            <a:schemeClr val="accent1"/>
-          </a:effectRef>
-          <a:fontRef idx="minor">
-            <a:schemeClr val="lt1"/>
-          </a:fontRef>
-        </p:style>
-        <p:txBody>
-          <a:bodyPr rtlCol="0" anchor="ctr"/>
-          <a:lstStyle/>
-          <a:p>
-            <a:pPr algn="ctr"/>
-            <a:r>
-              <a:rPr sz="1600" b="1">
-                <a:solidFill>
-                  <a:srgbClr val="FFFFFF"/>
-                </a:solidFill>
-              </a:rPr>
-              <a:t>5</a:t>
-            </a:r>
-          </a:p>
-        </p:txBody>
-      </p:sp>
-      <p:sp>
-        <p:nvSpPr>
-          <p:cNvPr id="23" name="TextBox 22"/>
-          <p:cNvSpPr txBox="1"/>
-          <p:nvPr/>
-        </p:nvSpPr>
-        <p:spPr>
-          <a:xfrm>
-            <a:off x="1115568" y="4864608"/>
-            <a:ext cx="4663440" cy="411480"/>
-          </a:xfrm>
-          <a:prstGeom prst="rect">
-            <a:avLst/>
-          </a:prstGeom>
-          <a:noFill/>
-        </p:spPr>
-        <p:txBody>
-          <a:bodyPr wrap="square">
-            <a:spAutoFit/>
-          </a:bodyPr>
-          <a:lstStyle/>
-          <a:p>
-            <a:pPr algn="l"/>
-            <a:r>
-              <a:rPr sz="1500" b="1" i="0">
+              <a:t>• On export the tool stamps each element’s resolved appearance alongside the row it follows, so the file says what you saw</a:t>
+            </a:r>
+          </a:p>
+          <a:p>
+            <a:pPr>
+              <a:spcAft>
+                <a:spcPts val="600"/>
+              </a:spcAft>
+            </a:pPr>
+            <a:r>
+              <a:rPr sz="1300" b="0">
                 <a:solidFill>
                   <a:srgbClr val="0F172A"/>
                 </a:solidFill>
               </a:rPr>
-              <a:t>Choose a mode</a:t>
-            </a:r>
-          </a:p>
-        </p:txBody>
-      </p:sp>
-      <p:sp>
-        <p:nvSpPr>
-          <p:cNvPr id="24" name="TextBox 23"/>
-          <p:cNvSpPr txBox="1"/>
-          <p:nvPr/>
-        </p:nvSpPr>
-        <p:spPr>
-          <a:xfrm>
-            <a:off x="1115568" y="5303520"/>
-            <a:ext cx="4663440" cy="914400"/>
-          </a:xfrm>
-          <a:prstGeom prst="rect">
-            <a:avLst/>
-          </a:prstGeom>
-          <a:noFill/>
-        </p:spPr>
-        <p:txBody>
-          <a:bodyPr wrap="square">
-            <a:spAutoFit/>
-          </a:bodyPr>
-          <a:lstStyle/>
-          <a:p>
-            <a:pPr algn="l"/>
-            <a:r>
-              <a:rPr sz="1300" b="0" i="0">
-                <a:solidFill>
-                  <a:srgbClr val="334155"/>
-                </a:solidFill>
-              </a:rPr>
-              <a:t>Click CLD for feedback loop analysis, OPM for typed relationships,
-NRM for risk mapping, or EIP for domain overlay.</a:t>
-            </a:r>
-          </a:p>
-        </p:txBody>
-      </p:sp>
-      <p:sp>
-        <p:nvSpPr>
-          <p:cNvPr id="25" name="Rectangle 24"/>
-          <p:cNvSpPr/>
-          <p:nvPr/>
-        </p:nvSpPr>
-        <p:spPr>
-          <a:xfrm>
-            <a:off x="6263640" y="4754880"/>
-            <a:ext cx="5577840" cy="1645920"/>
-          </a:xfrm>
-          <a:prstGeom prst="rect">
-            <a:avLst/>
-          </a:prstGeom>
-          <a:solidFill>
-            <a:srgbClr val="FFFFFF"/>
-          </a:solidFill>
-          <a:ln>
-            <a:noFill/>
-          </a:ln>
-        </p:spPr>
-        <p:style>
-          <a:lnRef idx="1">
-            <a:schemeClr val="accent1"/>
-          </a:lnRef>
-          <a:fillRef idx="3">
-            <a:schemeClr val="accent1"/>
-          </a:fillRef>
-          <a:effectRef idx="2">
-            <a:schemeClr val="accent1"/>
-          </a:effectRef>
-          <a:fontRef idx="minor">
-            <a:schemeClr val="lt1"/>
-          </a:fontRef>
-        </p:style>
-        <p:txBody>
-          <a:bodyPr rtlCol="0" anchor="ctr"/>
-          <a:lstStyle/>
-          <a:p>
-            <a:pPr algn="ctr"/>
-          </a:p>
-        </p:txBody>
-      </p:sp>
-      <p:sp>
-        <p:nvSpPr>
-          <p:cNvPr id="26" name="Oval 25"/>
-          <p:cNvSpPr/>
-          <p:nvPr/>
-        </p:nvSpPr>
-        <p:spPr>
-          <a:xfrm>
-            <a:off x="6400800" y="4892040"/>
-            <a:ext cx="502920" cy="502920"/>
-          </a:xfrm>
-          <a:prstGeom prst="ellipse">
-            <a:avLst/>
-          </a:prstGeom>
-          <a:solidFill>
-            <a:srgbClr val="0F766E"/>
-          </a:solidFill>
-          <a:ln>
-            <a:noFill/>
-          </a:ln>
-        </p:spPr>
-        <p:style>
-          <a:lnRef idx="1">
-            <a:schemeClr val="accent1"/>
-          </a:lnRef>
-          <a:fillRef idx="3">
-            <a:schemeClr val="accent1"/>
-          </a:fillRef>
-          <a:effectRef idx="2">
-            <a:schemeClr val="accent1"/>
-          </a:effectRef>
-          <a:fontRef idx="minor">
-            <a:schemeClr val="lt1"/>
-          </a:fontRef>
-        </p:style>
-        <p:txBody>
-          <a:bodyPr rtlCol="0" anchor="ctr"/>
-          <a:lstStyle/>
-          <a:p>
-            <a:pPr algn="ctr"/>
-            <a:r>
-              <a:rPr sz="1600" b="1">
-                <a:solidFill>
-                  <a:srgbClr val="FFFFFF"/>
-                </a:solidFill>
-              </a:rPr>
-              <a:t>6</a:t>
-            </a:r>
-          </a:p>
-        </p:txBody>
-      </p:sp>
-      <p:sp>
-        <p:nvSpPr>
-          <p:cNvPr id="27" name="TextBox 26"/>
-          <p:cNvSpPr txBox="1"/>
-          <p:nvPr/>
-        </p:nvSpPr>
-        <p:spPr>
-          <a:xfrm>
-            <a:off x="7013448" y="4864608"/>
-            <a:ext cx="4663440" cy="411480"/>
-          </a:xfrm>
-          <a:prstGeom prst="rect">
-            <a:avLst/>
-          </a:prstGeom>
-          <a:noFill/>
-        </p:spPr>
-        <p:txBody>
-          <a:bodyPr wrap="square">
-            <a:spAutoFit/>
-          </a:bodyPr>
-          <a:lstStyle/>
-          <a:p>
-            <a:pPr algn="l"/>
-            <a:r>
-              <a:rPr sz="1500" b="1" i="0">
+              <a:t>• It also settles a contradiction: loading writes dash = solid onto every edge, so a dashed row drew dashed while the file claimed solid</a:t>
+            </a:r>
+          </a:p>
+          <a:p>
+            <a:pPr>
+              <a:spcAft>
+                <a:spcPts val="600"/>
+              </a:spcAft>
+            </a:pPr>
+            <a:r>
+              <a:rPr sz="1300" b="0">
                 <a:solidFill>
                   <a:srgbClr val="0F172A"/>
                 </a:solidFill>
               </a:rPr>
-              <a:t>Export</a:t>
-            </a:r>
-          </a:p>
-        </p:txBody>
-      </p:sp>
-      <p:sp>
-        <p:nvSpPr>
-          <p:cNvPr id="28" name="TextBox 27"/>
-          <p:cNvSpPr txBox="1"/>
-          <p:nvPr/>
-        </p:nvSpPr>
-        <p:spPr>
-          <a:xfrm>
-            <a:off x="7013448" y="5303520"/>
-            <a:ext cx="4663440" cy="914400"/>
-          </a:xfrm>
-          <a:prstGeom prst="rect">
-            <a:avLst/>
-          </a:prstGeom>
-          <a:noFill/>
-        </p:spPr>
-        <p:txBody>
-          <a:bodyPr wrap="square">
-            <a:spAutoFit/>
-          </a:bodyPr>
-          <a:lstStyle/>
-          <a:p>
-            <a:pPr algn="l"/>
-            <a:r>
-              <a:rPr sz="1300" b="0" i="0">
-                <a:solidFill>
-                  <a:srgbClr val="334155"/>
-                </a:solidFill>
-              </a:rPr>
-              <a:t>Export JSON to save. SVG/PNG for presentation.
-URL to share as a link. Snapshot to share as a single file.
-OPM→OPL for plain-text documentation.</a:t>
+              <a:t>• The row still wins on reload — the legend stays the single place to restyle</a:t>
             </a:r>
           </a:p>
         </p:txBody>
@@ -6074,6 +5496,49 @@
             <a:avLst/>
           </a:prstGeom>
           <a:solidFill>
+            <a:srgbClr val="F8FAFC"/>
+          </a:solidFill>
+          <a:ln>
+            <a:noFill/>
+          </a:ln>
+        </p:spPr>
+        <p:style>
+          <a:lnRef idx="1">
+            <a:schemeClr val="accent1"/>
+          </a:lnRef>
+          <a:fillRef idx="3">
+            <a:schemeClr val="accent1"/>
+          </a:fillRef>
+          <a:effectRef idx="2">
+            <a:schemeClr val="accent1"/>
+          </a:effectRef>
+          <a:fontRef idx="minor">
+            <a:schemeClr val="lt1"/>
+          </a:fontRef>
+        </p:style>
+        <p:txBody>
+          <a:bodyPr rtlCol="0" anchor="ctr"/>
+          <a:lstStyle/>
+          <a:p>
+            <a:pPr algn="ctr"/>
+          </a:p>
+        </p:txBody>
+      </p:sp>
+      <p:sp>
+        <p:nvSpPr>
+          <p:cNvPr id="3" name="Rectangle 2"/>
+          <p:cNvSpPr/>
+          <p:nvPr/>
+        </p:nvSpPr>
+        <p:spPr>
+          <a:xfrm>
+            <a:off x="0" y="0"/>
+            <a:ext cx="12188952" cy="1005840"/>
+          </a:xfrm>
+          <a:prstGeom prst="rect">
+            <a:avLst/>
+          </a:prstGeom>
+          <a:solidFill>
             <a:srgbClr val="0F172A"/>
           </a:solidFill>
           <a:ln>
@@ -6104,20 +5569,54 @@
       </p:sp>
       <p:sp>
         <p:nvSpPr>
-          <p:cNvPr id="3" name="Rectangle 2"/>
+          <p:cNvPr id="4" name="TextBox 3"/>
+          <p:cNvSpPr txBox="1"/>
+          <p:nvPr/>
+        </p:nvSpPr>
+        <p:spPr>
+          <a:xfrm>
+            <a:off x="457200" y="137160"/>
+            <a:ext cx="11247120" cy="731520"/>
+          </a:xfrm>
+          <a:prstGeom prst="rect">
+            <a:avLst/>
+          </a:prstGeom>
+          <a:noFill/>
+        </p:spPr>
+        <p:txBody>
+          <a:bodyPr wrap="square">
+            <a:spAutoFit/>
+          </a:bodyPr>
+          <a:lstStyle/>
+          <a:p>
+            <a:pPr algn="l"/>
+            <a:r>
+              <a:rPr sz="2800" b="1" i="0">
+                <a:solidFill>
+                  <a:srgbClr val="FFFFFF"/>
+                </a:solidFill>
+              </a:rPr>
+              <a:t>Export — your diagram lives beyond the tool</a:t>
+            </a:r>
+          </a:p>
+        </p:txBody>
+      </p:sp>
+      <p:sp>
+        <p:nvSpPr>
+          <p:cNvPr id="5" name="Rectangle 4"/>
           <p:cNvSpPr/>
           <p:nvPr/>
         </p:nvSpPr>
         <p:spPr>
           <a:xfrm>
-            <a:off x="0" y="5303520"/>
-            <a:ext cx="12188952" cy="73152"/>
+            <a:off x="365760" y="1143000"/>
+            <a:ext cx="5577840" cy="1691640"/>
           </a:xfrm>
           <a:prstGeom prst="rect">
             <a:avLst/>
           </a:prstGeom>
           <a:solidFill>
-            <a:srgbClr val="0F766E"/>
+            <a:srgbClr val="FFFFFF"/>
           </a:solidFill>
           <a:ln>
             <a:noFill/>
@@ -6147,139 +5646,835 @@
       </p:sp>
       <p:sp>
         <p:nvSpPr>
-          <p:cNvPr id="4" name="TextBox 3"/>
-          <p:cNvSpPr txBox="1"/>
-          <p:nvPr/>
-        </p:nvSpPr>
-        <p:spPr>
-          <a:xfrm>
-            <a:off x="640080" y="1371600"/>
-            <a:ext cx="10881360" cy="822960"/>
-          </a:xfrm>
-          <a:prstGeom prst="rect">
-            <a:avLst/>
-          </a:prstGeom>
-          <a:noFill/>
-        </p:spPr>
-        <p:txBody>
-          <a:bodyPr wrap="square">
-            <a:spAutoFit/>
-          </a:bodyPr>
+          <p:cNvPr id="6" name="TextBox 5"/>
+          <p:cNvSpPr txBox="1"/>
+          <p:nvPr/>
+        </p:nvSpPr>
+        <p:spPr>
+          <a:xfrm>
+            <a:off x="548640" y="1234440"/>
+            <a:ext cx="2286000" cy="411480"/>
+          </a:xfrm>
+          <a:prstGeom prst="rect">
+            <a:avLst/>
+          </a:prstGeom>
+          <a:noFill/>
+        </p:spPr>
+        <p:txBody>
+          <a:bodyPr wrap="square">
+            <a:spAutoFit/>
+          </a:bodyPr>
+          <a:lstStyle/>
+          <a:p>
+            <a:pPr algn="l"/>
+            <a:r>
+              <a:rPr sz="1500" b="1" i="0">
+                <a:solidFill>
+                  <a:srgbClr val="0F766E"/>
+                </a:solidFill>
+              </a:rPr>
+              <a:t>Presentation</a:t>
+            </a:r>
+          </a:p>
+        </p:txBody>
+      </p:sp>
+      <p:sp>
+        <p:nvSpPr>
+          <p:cNvPr id="7" name="TextBox 6"/>
+          <p:cNvSpPr txBox="1"/>
+          <p:nvPr/>
+        </p:nvSpPr>
+        <p:spPr>
+          <a:xfrm>
+            <a:off x="548640" y="1618488"/>
+            <a:ext cx="5212080" cy="411480"/>
+          </a:xfrm>
+          <a:prstGeom prst="rect">
+            <a:avLst/>
+          </a:prstGeom>
+          <a:noFill/>
+        </p:spPr>
+        <p:txBody>
+          <a:bodyPr wrap="square">
+            <a:spAutoFit/>
+          </a:bodyPr>
+          <a:lstStyle/>
+          <a:p>
+            <a:pPr algn="l"/>
+            <a:r>
+              <a:rPr sz="1200" b="0" i="0">
+                <a:solidFill>
+                  <a:srgbClr val="475569"/>
+                </a:solidFill>
+              </a:rPr>
+              <a:t>SVG · PNG (2×) · Copy to clipboard · Print</a:t>
+            </a:r>
+          </a:p>
+        </p:txBody>
+      </p:sp>
+      <p:sp>
+        <p:nvSpPr>
+          <p:cNvPr id="8" name="TextBox 7"/>
+          <p:cNvSpPr txBox="1"/>
+          <p:nvPr/>
+        </p:nvSpPr>
+        <p:spPr>
+          <a:xfrm>
+            <a:off x="548640" y="2057400"/>
+            <a:ext cx="5212080" cy="685800"/>
+          </a:xfrm>
+          <a:prstGeom prst="rect">
+            <a:avLst/>
+          </a:prstGeom>
+          <a:noFill/>
+        </p:spPr>
+        <p:txBody>
+          <a:bodyPr wrap="square">
+            <a:spAutoFit/>
+          </a:bodyPr>
+          <a:lstStyle/>
+          <a:p>
+            <a:pPr algn="l"/>
+            <a:r>
+              <a:rPr sz="1200" b="0" i="0">
+                <a:solidFill>
+                  <a:srgbClr val="334155"/>
+                </a:solidFill>
+              </a:rPr>
+              <a:t>Paste directly into PowerPoint or Google Slides.
+Export SVG for documents that need to scale.
+Or show it live: press P for presentation view.</a:t>
+            </a:r>
+          </a:p>
+        </p:txBody>
+      </p:sp>
+      <p:sp>
+        <p:nvSpPr>
+          <p:cNvPr id="9" name="Rectangle 8"/>
+          <p:cNvSpPr/>
+          <p:nvPr/>
+        </p:nvSpPr>
+        <p:spPr>
+          <a:xfrm>
+            <a:off x="6263640" y="1143000"/>
+            <a:ext cx="5577840" cy="1691640"/>
+          </a:xfrm>
+          <a:prstGeom prst="rect">
+            <a:avLst/>
+          </a:prstGeom>
+          <a:solidFill>
+            <a:srgbClr val="FFFFFF"/>
+          </a:solidFill>
+          <a:ln>
+            <a:noFill/>
+          </a:ln>
+        </p:spPr>
+        <p:style>
+          <a:lnRef idx="1">
+            <a:schemeClr val="accent1"/>
+          </a:lnRef>
+          <a:fillRef idx="3">
+            <a:schemeClr val="accent1"/>
+          </a:fillRef>
+          <a:effectRef idx="2">
+            <a:schemeClr val="accent1"/>
+          </a:effectRef>
+          <a:fontRef idx="minor">
+            <a:schemeClr val="lt1"/>
+          </a:fontRef>
+        </p:style>
+        <p:txBody>
+          <a:bodyPr rtlCol="0" anchor="ctr"/>
           <a:lstStyle/>
           <a:p>
             <a:pPr algn="ctr"/>
-            <a:r>
-              <a:rPr sz="4200" b="1" i="0">
-                <a:solidFill>
-                  <a:srgbClr val="FFFFFF"/>
-                </a:solidFill>
-              </a:rPr>
-              <a:t>Free. Open source. One file.</a:t>
-            </a:r>
-          </a:p>
-        </p:txBody>
-      </p:sp>
-      <p:sp>
-        <p:nvSpPr>
-          <p:cNvPr id="5" name="TextBox 4"/>
-          <p:cNvSpPr txBox="1"/>
-          <p:nvPr/>
-        </p:nvSpPr>
-        <p:spPr>
-          <a:xfrm>
-            <a:off x="640080" y="2423160"/>
-            <a:ext cx="10881360" cy="1645920"/>
-          </a:xfrm>
-          <a:prstGeom prst="rect">
-            <a:avLst/>
-          </a:prstGeom>
-          <a:noFill/>
-        </p:spPr>
-        <p:txBody>
-          <a:bodyPr wrap="square">
-            <a:spAutoFit/>
-          </a:bodyPr>
+          </a:p>
+        </p:txBody>
+      </p:sp>
+      <p:sp>
+        <p:nvSpPr>
+          <p:cNvPr id="10" name="TextBox 9"/>
+          <p:cNvSpPr txBox="1"/>
+          <p:nvPr/>
+        </p:nvSpPr>
+        <p:spPr>
+          <a:xfrm>
+            <a:off x="6446520" y="1234440"/>
+            <a:ext cx="2286000" cy="411480"/>
+          </a:xfrm>
+          <a:prstGeom prst="rect">
+            <a:avLst/>
+          </a:prstGeom>
+          <a:noFill/>
+        </p:spPr>
+        <p:txBody>
+          <a:bodyPr wrap="square">
+            <a:spAutoFit/>
+          </a:bodyPr>
+          <a:lstStyle/>
+          <a:p>
+            <a:pPr algn="l"/>
+            <a:r>
+              <a:rPr sz="1500" b="1" i="0">
+                <a:solidFill>
+                  <a:srgbClr val="0F766E"/>
+                </a:solidFill>
+              </a:rPr>
+              <a:t>Share</a:t>
+            </a:r>
+          </a:p>
+        </p:txBody>
+      </p:sp>
+      <p:sp>
+        <p:nvSpPr>
+          <p:cNvPr id="11" name="TextBox 10"/>
+          <p:cNvSpPr txBox="1"/>
+          <p:nvPr/>
+        </p:nvSpPr>
+        <p:spPr>
+          <a:xfrm>
+            <a:off x="6446520" y="1618488"/>
+            <a:ext cx="5212080" cy="411480"/>
+          </a:xfrm>
+          <a:prstGeom prst="rect">
+            <a:avLst/>
+          </a:prstGeom>
+          <a:noFill/>
+        </p:spPr>
+        <p:txBody>
+          <a:bodyPr wrap="square">
+            <a:spAutoFit/>
+          </a:bodyPr>
+          <a:lstStyle/>
+          <a:p>
+            <a:pPr algn="l"/>
+            <a:r>
+              <a:rPr sz="1200" b="0" i="0">
+                <a:solidFill>
+                  <a:srgbClr val="475569"/>
+                </a:solidFill>
+              </a:rPr>
+              <a:t>URL encode · JSON · Snapshot</a:t>
+            </a:r>
+          </a:p>
+        </p:txBody>
+      </p:sp>
+      <p:sp>
+        <p:nvSpPr>
+          <p:cNvPr id="12" name="TextBox 11"/>
+          <p:cNvSpPr txBox="1"/>
+          <p:nvPr/>
+        </p:nvSpPr>
+        <p:spPr>
+          <a:xfrm>
+            <a:off x="6446520" y="2057400"/>
+            <a:ext cx="5212080" cy="685800"/>
+          </a:xfrm>
+          <a:prstGeom prst="rect">
+            <a:avLst/>
+          </a:prstGeom>
+          <a:noFill/>
+        </p:spPr>
+        <p:txBody>
+          <a:bodyPr wrap="square">
+            <a:spAutoFit/>
+          </a:bodyPr>
+          <a:lstStyle/>
+          <a:p>
+            <a:pPr algn="l"/>
+            <a:r>
+              <a:rPr sz="1200" b="0" i="0">
+                <a:solidFill>
+                  <a:srgbClr val="334155"/>
+                </a:solidFill>
+              </a:rPr>
+              <a:t>URL export encodes the full diagram in a link — share it, no file needed.
+Snapshot downloads one HTML file with the diagram baked in — open in any browser, no companion file.
+JSON is the lossless save format.</a:t>
+            </a:r>
+          </a:p>
+        </p:txBody>
+      </p:sp>
+      <p:sp>
+        <p:nvSpPr>
+          <p:cNvPr id="13" name="Rectangle 12"/>
+          <p:cNvSpPr/>
+          <p:nvPr/>
+        </p:nvSpPr>
+        <p:spPr>
+          <a:xfrm>
+            <a:off x="365760" y="2971800"/>
+            <a:ext cx="5577840" cy="1691640"/>
+          </a:xfrm>
+          <a:prstGeom prst="rect">
+            <a:avLst/>
+          </a:prstGeom>
+          <a:solidFill>
+            <a:srgbClr val="FFFFFF"/>
+          </a:solidFill>
+          <a:ln>
+            <a:noFill/>
+          </a:ln>
+        </p:spPr>
+        <p:style>
+          <a:lnRef idx="1">
+            <a:schemeClr val="accent1"/>
+          </a:lnRef>
+          <a:fillRef idx="3">
+            <a:schemeClr val="accent1"/>
+          </a:fillRef>
+          <a:effectRef idx="2">
+            <a:schemeClr val="accent1"/>
+          </a:effectRef>
+          <a:fontRef idx="minor">
+            <a:schemeClr val="lt1"/>
+          </a:fontRef>
+        </p:style>
+        <p:txBody>
+          <a:bodyPr rtlCol="0" anchor="ctr"/>
           <a:lstStyle/>
           <a:p>
             <a:pPr algn="ctr"/>
-            <a:r>
-              <a:rPr sz="1700" b="0" i="0">
-                <a:solidFill>
-                  <a:srgbClr val="CBD5E1"/>
-                </a:solidFill>
-              </a:rPr>
-              <a:t>The RCN Graph Tool is the only free, browser-based tool that combines
-Neo4j data modeling · Causal Loop Diagrams · OPM typed relationships · OPL export
-Tripod Beta risk analysis · EIP overlay · Wardley mapping · Pathway animation
-— all in a single HTML file, on the same graph.</a:t>
-            </a:r>
-          </a:p>
-        </p:txBody>
-      </p:sp>
-      <p:sp>
-        <p:nvSpPr>
-          <p:cNvPr id="6" name="TextBox 5"/>
-          <p:cNvSpPr txBox="1"/>
-          <p:nvPr/>
-        </p:nvSpPr>
-        <p:spPr>
-          <a:xfrm>
-            <a:off x="640080" y="4343400"/>
-            <a:ext cx="10881360" cy="457200"/>
-          </a:xfrm>
-          <a:prstGeom prst="rect">
-            <a:avLst/>
-          </a:prstGeom>
-          <a:noFill/>
-        </p:spPr>
-        <p:txBody>
-          <a:bodyPr wrap="square">
-            <a:spAutoFit/>
-          </a:bodyPr>
+          </a:p>
+        </p:txBody>
+      </p:sp>
+      <p:sp>
+        <p:nvSpPr>
+          <p:cNvPr id="14" name="TextBox 13"/>
+          <p:cNvSpPr txBox="1"/>
+          <p:nvPr/>
+        </p:nvSpPr>
+        <p:spPr>
+          <a:xfrm>
+            <a:off x="548640" y="3063240"/>
+            <a:ext cx="2286000" cy="411480"/>
+          </a:xfrm>
+          <a:prstGeom prst="rect">
+            <a:avLst/>
+          </a:prstGeom>
+          <a:noFill/>
+        </p:spPr>
+        <p:txBody>
+          <a:bodyPr wrap="square">
+            <a:spAutoFit/>
+          </a:bodyPr>
+          <a:lstStyle/>
+          <a:p>
+            <a:pPr algn="l"/>
+            <a:r>
+              <a:rPr sz="1500" b="1" i="0">
+                <a:solidFill>
+                  <a:srgbClr val="0F766E"/>
+                </a:solidFill>
+              </a:rPr>
+              <a:t>Neo4j</a:t>
+            </a:r>
+          </a:p>
+        </p:txBody>
+      </p:sp>
+      <p:sp>
+        <p:nvSpPr>
+          <p:cNvPr id="15" name="TextBox 14"/>
+          <p:cNvSpPr txBox="1"/>
+          <p:nvPr/>
+        </p:nvSpPr>
+        <p:spPr>
+          <a:xfrm>
+            <a:off x="548640" y="3447288"/>
+            <a:ext cx="5212080" cy="411480"/>
+          </a:xfrm>
+          <a:prstGeom prst="rect">
+            <a:avLst/>
+          </a:prstGeom>
+          <a:noFill/>
+        </p:spPr>
+        <p:txBody>
+          <a:bodyPr wrap="square">
+            <a:spAutoFit/>
+          </a:bodyPr>
+          <a:lstStyle/>
+          <a:p>
+            <a:pPr algn="l"/>
+            <a:r>
+              <a:rPr sz="1200" b="0" i="0">
+                <a:solidFill>
+                  <a:srgbClr val="475569"/>
+                </a:solidFill>
+              </a:rPr>
+              <a:t>Cypher CREATE · MATCH import · OPM→Cypher · NRM→Cypher</a:t>
+            </a:r>
+          </a:p>
+        </p:txBody>
+      </p:sp>
+      <p:sp>
+        <p:nvSpPr>
+          <p:cNvPr id="16" name="TextBox 15"/>
+          <p:cNvSpPr txBox="1"/>
+          <p:nvPr/>
+        </p:nvSpPr>
+        <p:spPr>
+          <a:xfrm>
+            <a:off x="548640" y="3886200"/>
+            <a:ext cx="5212080" cy="685800"/>
+          </a:xfrm>
+          <a:prstGeom prst="rect">
+            <a:avLst/>
+          </a:prstGeom>
+          <a:noFill/>
+        </p:spPr>
+        <p:txBody>
+          <a:bodyPr wrap="square">
+            <a:spAutoFit/>
+          </a:bodyPr>
+          <a:lstStyle/>
+          <a:p>
+            <a:pPr algn="l"/>
+            <a:r>
+              <a:rPr sz="1200" b="0" i="0">
+                <a:solidFill>
+                  <a:srgbClr val="334155"/>
+                </a:solidFill>
+              </a:rPr>
+              <a:t>Design schemas here, paste into Neo4j Browser.
+Bring live graph data back with MATCH import.</a:t>
+            </a:r>
+          </a:p>
+        </p:txBody>
+      </p:sp>
+      <p:sp>
+        <p:nvSpPr>
+          <p:cNvPr id="17" name="Rectangle 16"/>
+          <p:cNvSpPr/>
+          <p:nvPr/>
+        </p:nvSpPr>
+        <p:spPr>
+          <a:xfrm>
+            <a:off x="6263640" y="2971800"/>
+            <a:ext cx="5577840" cy="1691640"/>
+          </a:xfrm>
+          <a:prstGeom prst="rect">
+            <a:avLst/>
+          </a:prstGeom>
+          <a:solidFill>
+            <a:srgbClr val="FFFFFF"/>
+          </a:solidFill>
+          <a:ln>
+            <a:noFill/>
+          </a:ln>
+        </p:spPr>
+        <p:style>
+          <a:lnRef idx="1">
+            <a:schemeClr val="accent1"/>
+          </a:lnRef>
+          <a:fillRef idx="3">
+            <a:schemeClr val="accent1"/>
+          </a:fillRef>
+          <a:effectRef idx="2">
+            <a:schemeClr val="accent1"/>
+          </a:effectRef>
+          <a:fontRef idx="minor">
+            <a:schemeClr val="lt1"/>
+          </a:fontRef>
+        </p:style>
+        <p:txBody>
+          <a:bodyPr rtlCol="0" anchor="ctr"/>
           <a:lstStyle/>
           <a:p>
             <a:pPr algn="ctr"/>
-            <a:r>
-              <a:rPr sz="1400" b="0" i="0">
+          </a:p>
+        </p:txBody>
+      </p:sp>
+      <p:sp>
+        <p:nvSpPr>
+          <p:cNvPr id="18" name="TextBox 17"/>
+          <p:cNvSpPr txBox="1"/>
+          <p:nvPr/>
+        </p:nvSpPr>
+        <p:spPr>
+          <a:xfrm>
+            <a:off x="6446520" y="3063240"/>
+            <a:ext cx="2286000" cy="411480"/>
+          </a:xfrm>
+          <a:prstGeom prst="rect">
+            <a:avLst/>
+          </a:prstGeom>
+          <a:noFill/>
+        </p:spPr>
+        <p:txBody>
+          <a:bodyPr wrap="square">
+            <a:spAutoFit/>
+          </a:bodyPr>
+          <a:lstStyle/>
+          <a:p>
+            <a:pPr algn="l"/>
+            <a:r>
+              <a:rPr sz="1500" b="1" i="0">
                 <a:solidFill>
                   <a:srgbClr val="0F766E"/>
                 </a:solidFill>
               </a:rPr>
-              <a:t>graph-tool-v22.html  ·  Introduction: graph-tool-intro.html  ·  Manual: graph-tool-manual.html</a:t>
-            </a:r>
-          </a:p>
-        </p:txBody>
-      </p:sp>
-      <p:sp>
-        <p:nvSpPr>
-          <p:cNvPr id="7" name="TextBox 6"/>
-          <p:cNvSpPr txBox="1"/>
-          <p:nvPr/>
-        </p:nvSpPr>
-        <p:spPr>
-          <a:xfrm>
-            <a:off x="640080" y="5577840"/>
-            <a:ext cx="10881360" cy="457200"/>
-          </a:xfrm>
-          <a:prstGeom prst="rect">
-            <a:avLst/>
-          </a:prstGeom>
-          <a:noFill/>
-        </p:spPr>
-        <p:txBody>
-          <a:bodyPr wrap="square">
-            <a:spAutoFit/>
-          </a:bodyPr>
+              <a:t>OPM text</a:t>
+            </a:r>
+          </a:p>
+        </p:txBody>
+      </p:sp>
+      <p:sp>
+        <p:nvSpPr>
+          <p:cNvPr id="19" name="TextBox 18"/>
+          <p:cNvSpPr txBox="1"/>
+          <p:nvPr/>
+        </p:nvSpPr>
+        <p:spPr>
+          <a:xfrm>
+            <a:off x="6446520" y="3447288"/>
+            <a:ext cx="5212080" cy="411480"/>
+          </a:xfrm>
+          <a:prstGeom prst="rect">
+            <a:avLst/>
+          </a:prstGeom>
+          <a:noFill/>
+        </p:spPr>
+        <p:txBody>
+          <a:bodyPr wrap="square">
+            <a:spAutoFit/>
+          </a:bodyPr>
+          <a:lstStyle/>
+          <a:p>
+            <a:pPr algn="l"/>
+            <a:r>
+              <a:rPr sz="1200" b="0" i="0">
+                <a:solidFill>
+                  <a:srgbClr val="475569"/>
+                </a:solidFill>
+              </a:rPr>
+              <a:t>OPM→OPL · OPM→CSV</a:t>
+            </a:r>
+          </a:p>
+        </p:txBody>
+      </p:sp>
+      <p:sp>
+        <p:nvSpPr>
+          <p:cNvPr id="20" name="TextBox 19"/>
+          <p:cNvSpPr txBox="1"/>
+          <p:nvPr/>
+        </p:nvSpPr>
+        <p:spPr>
+          <a:xfrm>
+            <a:off x="6446520" y="3886200"/>
+            <a:ext cx="5212080" cy="685800"/>
+          </a:xfrm>
+          <a:prstGeom prst="rect">
+            <a:avLst/>
+          </a:prstGeom>
+          <a:noFill/>
+        </p:spPr>
+        <p:txBody>
+          <a:bodyPr wrap="square">
+            <a:spAutoFit/>
+          </a:bodyPr>
+          <a:lstStyle/>
+          <a:p>
+            <a:pPr algn="l"/>
+            <a:r>
+              <a:rPr sz="1200" b="0" i="0">
+                <a:solidFill>
+                  <a:srgbClr val="334155"/>
+                </a:solidFill>
+              </a:rPr>
+              <a:t>Plain-text OPL for documentation, CSV triples for
+spreadsheets or other tools.</a:t>
+            </a:r>
+          </a:p>
+        </p:txBody>
+      </p:sp>
+      <p:sp>
+        <p:nvSpPr>
+          <p:cNvPr id="21" name="Rectangle 20"/>
+          <p:cNvSpPr/>
+          <p:nvPr/>
+        </p:nvSpPr>
+        <p:spPr>
+          <a:xfrm>
+            <a:off x="365760" y="4800600"/>
+            <a:ext cx="5577840" cy="1691640"/>
+          </a:xfrm>
+          <a:prstGeom prst="rect">
+            <a:avLst/>
+          </a:prstGeom>
+          <a:solidFill>
+            <a:srgbClr val="FFFFFF"/>
+          </a:solidFill>
+          <a:ln>
+            <a:noFill/>
+          </a:ln>
+        </p:spPr>
+        <p:style>
+          <a:lnRef idx="1">
+            <a:schemeClr val="accent1"/>
+          </a:lnRef>
+          <a:fillRef idx="3">
+            <a:schemeClr val="accent1"/>
+          </a:fillRef>
+          <a:effectRef idx="2">
+            <a:schemeClr val="accent1"/>
+          </a:effectRef>
+          <a:fontRef idx="minor">
+            <a:schemeClr val="lt1"/>
+          </a:fontRef>
+        </p:style>
+        <p:txBody>
+          <a:bodyPr rtlCol="0" anchor="ctr"/>
           <a:lstStyle/>
           <a:p>
             <a:pPr algn="ctr"/>
-            <a:r>
-              <a:rPr sz="1300" b="0" i="0">
-                <a:solidFill>
-                  <a:srgbClr val="94A3B8"/>
-                </a:solidFill>
-              </a:rPr>
-              <a:t>ReLocalize Creativity Network  ·  Open source  ·  Free by design</a:t>
+          </a:p>
+        </p:txBody>
+      </p:sp>
+      <p:sp>
+        <p:nvSpPr>
+          <p:cNvPr id="22" name="TextBox 21"/>
+          <p:cNvSpPr txBox="1"/>
+          <p:nvPr/>
+        </p:nvSpPr>
+        <p:spPr>
+          <a:xfrm>
+            <a:off x="548640" y="4892040"/>
+            <a:ext cx="2286000" cy="411480"/>
+          </a:xfrm>
+          <a:prstGeom prst="rect">
+            <a:avLst/>
+          </a:prstGeom>
+          <a:noFill/>
+        </p:spPr>
+        <p:txBody>
+          <a:bodyPr wrap="square">
+            <a:spAutoFit/>
+          </a:bodyPr>
+          <a:lstStyle/>
+          <a:p>
+            <a:pPr algn="l"/>
+            <a:r>
+              <a:rPr sz="1500" b="1" i="0">
+                <a:solidFill>
+                  <a:srgbClr val="0F766E"/>
+                </a:solidFill>
+              </a:rPr>
+              <a:t>Vensim</a:t>
+            </a:r>
+          </a:p>
+        </p:txBody>
+      </p:sp>
+      <p:sp>
+        <p:nvSpPr>
+          <p:cNvPr id="23" name="TextBox 22"/>
+          <p:cNvSpPr txBox="1"/>
+          <p:nvPr/>
+        </p:nvSpPr>
+        <p:spPr>
+          <a:xfrm>
+            <a:off x="548640" y="5276088"/>
+            <a:ext cx="5212080" cy="411480"/>
+          </a:xfrm>
+          <a:prstGeom prst="rect">
+            <a:avLst/>
+          </a:prstGeom>
+          <a:noFill/>
+        </p:spPr>
+        <p:txBody>
+          <a:bodyPr wrap="square">
+            <a:spAutoFit/>
+          </a:bodyPr>
+          <a:lstStyle/>
+          <a:p>
+            <a:pPr algn="l"/>
+            <a:r>
+              <a:rPr sz="1200" b="0" i="0">
+                <a:solidFill>
+                  <a:srgbClr val="475569"/>
+                </a:solidFill>
+              </a:rPr>
+              <a:t>Export .mdl · Export XMILE · Import .mdl · Import XMILE</a:t>
+            </a:r>
+          </a:p>
+        </p:txBody>
+      </p:sp>
+      <p:sp>
+        <p:nvSpPr>
+          <p:cNvPr id="24" name="TextBox 23"/>
+          <p:cNvSpPr txBox="1"/>
+          <p:nvPr/>
+        </p:nvSpPr>
+        <p:spPr>
+          <a:xfrm>
+            <a:off x="548640" y="5715000"/>
+            <a:ext cx="5212080" cy="685800"/>
+          </a:xfrm>
+          <a:prstGeom prst="rect">
+            <a:avLst/>
+          </a:prstGeom>
+          <a:noFill/>
+        </p:spPr>
+        <p:txBody>
+          <a:bodyPr wrap="square">
+            <a:spAutoFit/>
+          </a:bodyPr>
+          <a:lstStyle/>
+          <a:p>
+            <a:pPr algn="l"/>
+            <a:r>
+              <a:rPr sz="1200" b="0" i="0">
+                <a:solidFill>
+                  <a:srgbClr val="334155"/>
+                </a:solidFill>
+              </a:rPr>
+              <a:t>Sketch causal structure here, move to Vensim
+for simulation when ready.</a:t>
+            </a:r>
+          </a:p>
+        </p:txBody>
+      </p:sp>
+      <p:sp>
+        <p:nvSpPr>
+          <p:cNvPr id="25" name="Rectangle 24"/>
+          <p:cNvSpPr/>
+          <p:nvPr/>
+        </p:nvSpPr>
+        <p:spPr>
+          <a:xfrm>
+            <a:off x="6263640" y="4800600"/>
+            <a:ext cx="5577840" cy="1691640"/>
+          </a:xfrm>
+          <a:prstGeom prst="rect">
+            <a:avLst/>
+          </a:prstGeom>
+          <a:solidFill>
+            <a:srgbClr val="FFFFFF"/>
+          </a:solidFill>
+          <a:ln>
+            <a:noFill/>
+          </a:ln>
+        </p:spPr>
+        <p:style>
+          <a:lnRef idx="1">
+            <a:schemeClr val="accent1"/>
+          </a:lnRef>
+          <a:fillRef idx="3">
+            <a:schemeClr val="accent1"/>
+          </a:fillRef>
+          <a:effectRef idx="2">
+            <a:schemeClr val="accent1"/>
+          </a:effectRef>
+          <a:fontRef idx="minor">
+            <a:schemeClr val="lt1"/>
+          </a:fontRef>
+        </p:style>
+        <p:txBody>
+          <a:bodyPr rtlCol="0" anchor="ctr"/>
+          <a:lstStyle/>
+          <a:p>
+            <a:pPr algn="ctr"/>
+          </a:p>
+        </p:txBody>
+      </p:sp>
+      <p:sp>
+        <p:nvSpPr>
+          <p:cNvPr id="26" name="TextBox 25"/>
+          <p:cNvSpPr txBox="1"/>
+          <p:nvPr/>
+        </p:nvSpPr>
+        <p:spPr>
+          <a:xfrm>
+            <a:off x="6446520" y="4892040"/>
+            <a:ext cx="2286000" cy="411480"/>
+          </a:xfrm>
+          <a:prstGeom prst="rect">
+            <a:avLst/>
+          </a:prstGeom>
+          <a:noFill/>
+        </p:spPr>
+        <p:txBody>
+          <a:bodyPr wrap="square">
+            <a:spAutoFit/>
+          </a:bodyPr>
+          <a:lstStyle/>
+          <a:p>
+            <a:pPr algn="l"/>
+            <a:r>
+              <a:rPr sz="1500" b="1" i="0">
+                <a:solidFill>
+                  <a:srgbClr val="0F766E"/>
+                </a:solidFill>
+              </a:rPr>
+              <a:t>Graphviz</a:t>
+            </a:r>
+          </a:p>
+        </p:txBody>
+      </p:sp>
+      <p:sp>
+        <p:nvSpPr>
+          <p:cNvPr id="27" name="TextBox 26"/>
+          <p:cNvSpPr txBox="1"/>
+          <p:nvPr/>
+        </p:nvSpPr>
+        <p:spPr>
+          <a:xfrm>
+            <a:off x="6446520" y="5276088"/>
+            <a:ext cx="5212080" cy="411480"/>
+          </a:xfrm>
+          <a:prstGeom prst="rect">
+            <a:avLst/>
+          </a:prstGeom>
+          <a:noFill/>
+        </p:spPr>
+        <p:txBody>
+          <a:bodyPr wrap="square">
+            <a:spAutoFit/>
+          </a:bodyPr>
+          <a:lstStyle/>
+          <a:p>
+            <a:pPr algn="l"/>
+            <a:r>
+              <a:rPr sz="1200" b="0" i="0">
+                <a:solidFill>
+                  <a:srgbClr val="475569"/>
+                </a:solidFill>
+              </a:rPr>
+              <a:t>Export .dot · Import .dot</a:t>
+            </a:r>
+          </a:p>
+        </p:txBody>
+      </p:sp>
+      <p:sp>
+        <p:nvSpPr>
+          <p:cNvPr id="28" name="TextBox 27"/>
+          <p:cNvSpPr txBox="1"/>
+          <p:nvPr/>
+        </p:nvSpPr>
+        <p:spPr>
+          <a:xfrm>
+            <a:off x="6446520" y="5715000"/>
+            <a:ext cx="5212080" cy="685800"/>
+          </a:xfrm>
+          <a:prstGeom prst="rect">
+            <a:avLst/>
+          </a:prstGeom>
+          <a:noFill/>
+        </p:spPr>
+        <p:txBody>
+          <a:bodyPr wrap="square">
+            <a:spAutoFit/>
+          </a:bodyPr>
+          <a:lstStyle/>
+          <a:p>
+            <a:pPr algn="l"/>
+            <a:r>
+              <a:rPr sz="1200" b="0" i="0">
+                <a:solidFill>
+                  <a:srgbClr val="334155"/>
+                </a:solidFill>
+              </a:rPr>
+              <a:t>Full round-trip with the Graphviz / Gephi ecosystem.
+Colors, shapes, edge weights all preserved.</a:t>
             </a:r>
           </a:p>
         </p:txBody>
@@ -6322,7 +6517,6 @@
           <a:ln>
             <a:noFill/>
           </a:ln>
-          <a:effectLst/>
         </p:spPr>
         <p:style>
           <a:lnRef idx="1">
@@ -6361,12 +6555,11 @@
             <a:avLst/>
           </a:prstGeom>
           <a:solidFill>
-            <a:srgbClr val="C2410C"/>
+            <a:srgbClr val="0F766E"/>
           </a:solidFill>
           <a:ln>
             <a:noFill/>
           </a:ln>
-          <a:effectLst/>
         </p:spPr>
         <p:style>
           <a:lnRef idx="1">
@@ -6412,32 +6605,62 @@
           </a:bodyPr>
           <a:lstStyle/>
           <a:p>
-            <a:pPr>
-              <a:spcAft>
-                <a:spcPts val="600"/>
-              </a:spcAft>
-            </a:pPr>
-            <a:r>
-              <a:rPr sz="2800" b="1">
+            <a:pPr algn="l"/>
+            <a:r>
+              <a:rPr sz="2800" b="1" i="0">
                 <a:solidFill>
                   <a:srgbClr val="FFFFFF"/>
                 </a:solidFill>
               </a:rPr>
-              <a:t>The legend is the registry</a:t>
-            </a:r>
-          </a:p>
-        </p:txBody>
-      </p:sp>
-      <p:sp>
-        <p:nvSpPr>
-          <p:cNvPr id="5" name="Rectangle 4"/>
+              <a:t>Presenting — hand the whole screen to the graph</a:t>
+            </a:r>
+          </a:p>
+        </p:txBody>
+      </p:sp>
+      <p:sp>
+        <p:nvSpPr>
+          <p:cNvPr id="5" name="TextBox 4"/>
+          <p:cNvSpPr txBox="1"/>
+          <p:nvPr/>
+        </p:nvSpPr>
+        <p:spPr>
+          <a:xfrm>
+            <a:off x="548640" y="1143000"/>
+            <a:ext cx="11064240" cy="548640"/>
+          </a:xfrm>
+          <a:prstGeom prst="rect">
+            <a:avLst/>
+          </a:prstGeom>
+          <a:noFill/>
+        </p:spPr>
+        <p:txBody>
+          <a:bodyPr wrap="square">
+            <a:spAutoFit/>
+          </a:bodyPr>
+          <a:lstStyle/>
+          <a:p>
+            <a:pPr algn="l"/>
+            <a:r>
+              <a:rPr sz="1700" b="0" i="0">
+                <a:solidFill>
+                  <a:srgbClr val="334155"/>
+                </a:solidFill>
+              </a:rPr>
+              <a:t>The goal is a picture a group can read together. Presentation view takes away everything that is not the picture.</a:t>
+            </a:r>
+          </a:p>
+        </p:txBody>
+      </p:sp>
+      <p:sp>
+        <p:nvSpPr>
+          <p:cNvPr id="6" name="Rectangle 5"/>
           <p:cNvSpPr/>
           <p:nvPr/>
         </p:nvSpPr>
         <p:spPr>
           <a:xfrm>
-            <a:off x="365760" y="1143000"/>
-            <a:ext cx="5486400" cy="5257800"/>
+            <a:off x="457200" y="1920240"/>
+            <a:ext cx="11247120" cy="1005840"/>
           </a:xfrm>
           <a:prstGeom prst="rect">
             <a:avLst/>
@@ -6448,7 +6671,6 @@
           <a:ln>
             <a:noFill/>
           </a:ln>
-          <a:effectLst/>
         </p:spPr>
         <p:style>
           <a:lnRef idx="1">
@@ -6474,204 +6696,68 @@
       </p:sp>
       <p:sp>
         <p:nvSpPr>
-          <p:cNvPr id="6" name="TextBox 5"/>
-          <p:cNvSpPr txBox="1"/>
-          <p:nvPr/>
-        </p:nvSpPr>
-        <p:spPr>
-          <a:xfrm>
-            <a:off x="548640" y="1234440"/>
-            <a:ext cx="5120640" cy="502920"/>
-          </a:xfrm>
-          <a:prstGeom prst="rect">
-            <a:avLst/>
-          </a:prstGeom>
-          <a:noFill/>
-        </p:spPr>
-        <p:txBody>
-          <a:bodyPr wrap="square">
-            <a:spAutoFit/>
-          </a:bodyPr>
-          <a:lstStyle/>
-          <a:p>
-            <a:pPr>
-              <a:spcAft>
-                <a:spcPts val="600"/>
-              </a:spcAft>
-            </a:pPr>
-            <a:r>
-              <a:rPr sz="1600" b="1">
-                <a:solidFill>
-                  <a:srgbClr val="C2410C"/>
-                </a:solidFill>
-              </a:rPr>
-              <a:t>Style by kind, not by element</a:t>
-            </a:r>
-          </a:p>
-        </p:txBody>
-      </p:sp>
-      <p:sp>
-        <p:nvSpPr>
           <p:cNvPr id="7" name="TextBox 6"/>
           <p:cNvSpPr txBox="1"/>
           <p:nvPr/>
         </p:nvSpPr>
         <p:spPr>
           <a:xfrm>
-            <a:off x="548640" y="1810512"/>
-            <a:ext cx="5120640" cy="457200"/>
-          </a:xfrm>
-          <a:prstGeom prst="rect">
-            <a:avLst/>
-          </a:prstGeom>
-          <a:noFill/>
-        </p:spPr>
-        <p:txBody>
-          <a:bodyPr wrap="square">
-            <a:spAutoFit/>
-          </a:bodyPr>
-          <a:lstStyle/>
-          <a:p>
-            <a:pPr>
-              <a:spcAft>
-                <a:spcPts val="600"/>
-              </a:spcAft>
-            </a:pPr>
-            <a:r>
-              <a:rPr sz="1300" b="0">
+            <a:off x="640080" y="1975104"/>
+            <a:ext cx="3840480" cy="457200"/>
+          </a:xfrm>
+          <a:prstGeom prst="rect">
+            <a:avLst/>
+          </a:prstGeom>
+          <a:noFill/>
+        </p:spPr>
+        <p:txBody>
+          <a:bodyPr wrap="square">
+            <a:spAutoFit/>
+          </a:bodyPr>
+          <a:lstStyle/>
+          <a:p>
+            <a:pPr algn="l"/>
+            <a:r>
+              <a:rPr sz="1400" b="1" i="0">
+                <a:solidFill>
+                  <a:srgbClr val="0F766E"/>
+                </a:solidFill>
+              </a:rPr>
+              <a:t>One key, no chrome</a:t>
+            </a:r>
+          </a:p>
+        </p:txBody>
+      </p:sp>
+      <p:sp>
+        <p:nvSpPr>
+          <p:cNvPr id="8" name="TextBox 7"/>
+          <p:cNvSpPr txBox="1"/>
+          <p:nvPr/>
+        </p:nvSpPr>
+        <p:spPr>
+          <a:xfrm>
+            <a:off x="640080" y="2377440"/>
+            <a:ext cx="10789920" cy="502920"/>
+          </a:xfrm>
+          <a:prstGeom prst="rect">
+            <a:avLst/>
+          </a:prstGeom>
+          <a:noFill/>
+        </p:spPr>
+        <p:txBody>
+          <a:bodyPr wrap="square">
+            <a:spAutoFit/>
+          </a:bodyPr>
+          <a:lstStyle/>
+          <a:p>
+            <a:pPr algn="l"/>
+            <a:r>
+              <a:rPr sz="1300" b="0" i="0">
                 <a:solidFill>
                   <a:srgbClr val="334155"/>
                 </a:solidFill>
               </a:rPr>
-              <a:t>In most tools the legend is a picture of the colour scheme — kept in sync by hand, and the first thing to go stale.</a:t>
-            </a:r>
-          </a:p>
-        </p:txBody>
-      </p:sp>
-      <p:sp>
-        <p:nvSpPr>
-          <p:cNvPr id="8" name="TextBox 7"/>
-          <p:cNvSpPr txBox="1"/>
-          <p:nvPr/>
-        </p:nvSpPr>
-        <p:spPr>
-          <a:xfrm>
-            <a:off x="548640" y="2468880"/>
-            <a:ext cx="5120640" cy="3657600"/>
-          </a:xfrm>
-          <a:prstGeom prst="rect">
-            <a:avLst/>
-          </a:prstGeom>
-          <a:noFill/>
-        </p:spPr>
-        <p:txBody>
-          <a:bodyPr wrap="square">
-            <a:spAutoFit/>
-          </a:bodyPr>
-          <a:lstStyle/>
-          <a:p>
-            <a:pPr>
-              <a:spcAft>
-                <a:spcPts val="600"/>
-              </a:spcAft>
-            </a:pPr>
-            <a:r>
-              <a:rPr sz="1300" b="0">
-                <a:solidFill>
-                  <a:srgbClr val="0F172A"/>
-                </a:solidFill>
-              </a:rPr>
-              <a:t>• A legend row DEFINES a kind — its fill, border, width, dash</a:t>
-            </a:r>
-          </a:p>
-          <a:p>
-            <a:pPr>
-              <a:spcAft>
-                <a:spcPts val="600"/>
-              </a:spcAft>
-            </a:pPr>
-            <a:r>
-              <a:rPr sz="1300" b="0">
-                <a:solidFill>
-                  <a:srgbClr val="0F172A"/>
-                </a:solidFill>
-              </a:rPr>
-              <a:t>• Nodes and edges follow a row instead of carrying their own styling</a:t>
-            </a:r>
-          </a:p>
-          <a:p>
-            <a:pPr>
-              <a:spcAft>
-                <a:spcPts val="600"/>
-              </a:spcAft>
-            </a:pPr>
-            <a:r>
-              <a:rPr sz="1300" b="0">
-                <a:solidFill>
-                  <a:srgbClr val="0F172A"/>
-                </a:solidFill>
-              </a:rPr>
-              <a:t>• Change the row and every element following it changes at once</a:t>
-            </a:r>
-          </a:p>
-          <a:p>
-            <a:pPr>
-              <a:spcAft>
-                <a:spcPts val="600"/>
-              </a:spcAft>
-            </a:pPr>
-            <a:r>
-              <a:rPr sz="1300" b="0">
-                <a:solidFill>
-                  <a:srgbClr val="0F172A"/>
-                </a:solidFill>
-              </a:rPr>
-              <a:t>• Assign selection puts a selection on a row</a:t>
-            </a:r>
-          </a:p>
-          <a:p>
-            <a:pPr>
-              <a:spcAft>
-                <a:spcPts val="600"/>
-              </a:spcAft>
-            </a:pPr>
-            <a:r>
-              <a:rPr sz="1300" b="0">
-                <a:solidFill>
-                  <a:srgbClr val="0F172A"/>
-                </a:solidFill>
-              </a:rPr>
-              <a:t>• Override one element and it diverges on that property only — still following the row for everything else</a:t>
-            </a:r>
-          </a:p>
-          <a:p>
-            <a:pPr>
-              <a:spcAft>
-                <a:spcPts val="600"/>
-              </a:spcAft>
-            </a:pPr>
-            <a:r>
-              <a:rPr sz="1300" b="0">
-                <a:solidFill>
-                  <a:srgbClr val="0F172A"/>
-                </a:solidFill>
-              </a:rPr>
-              <a:t>• Clear overrides snaps every follower back to the row</a:t>
-            </a:r>
-          </a:p>
-          <a:p>
-            <a:pPr>
-              <a:spcAft>
-                <a:spcPts val="600"/>
-              </a:spcAft>
-            </a:pPr>
-            <a:r>
-              <a:rPr sz="1300" b="0">
-                <a:solidFill>
-                  <a:srgbClr val="0F172A"/>
-                </a:solidFill>
-              </a:rPr>
-              <a:t>• 6–8 kinds is what a group can read; the panel warns above 8, and says how many elements follow no row at all</a:t>
+              <a:t>Press P, or click Present. Toolbar, sidebar, search box, mode banners and hint strip all disappear, the browser goes fullscreen, and the graph is refitted to the whole window. Escape brings it back at the pan and zoom you left.</a:t>
             </a:r>
           </a:p>
         </p:txBody>
@@ -6684,8 +6770,8 @@
         </p:nvSpPr>
         <p:spPr>
           <a:xfrm>
-            <a:off x="6126480" y="1143000"/>
-            <a:ext cx="5669280" cy="5257800"/>
+            <a:off x="457200" y="3063240"/>
+            <a:ext cx="11247120" cy="1005840"/>
           </a:xfrm>
           <a:prstGeom prst="rect">
             <a:avLst/>
@@ -6696,7 +6782,6 @@
           <a:ln>
             <a:noFill/>
           </a:ln>
-          <a:effectLst/>
         </p:spPr>
         <p:style>
           <a:lnRef idx="1">
@@ -6728,32 +6813,1265 @@
         </p:nvSpPr>
         <p:spPr>
           <a:xfrm>
-            <a:off x="6309360" y="1234440"/>
-            <a:ext cx="5303520" cy="502920"/>
-          </a:xfrm>
-          <a:prstGeom prst="rect">
-            <a:avLst/>
-          </a:prstGeom>
-          <a:noFill/>
-        </p:spPr>
-        <p:txBody>
-          <a:bodyPr wrap="square">
-            <a:spAutoFit/>
-          </a:bodyPr>
-          <a:lstStyle/>
-          <a:p>
-            <a:pPr>
-              <a:spcAft>
-                <a:spcPts val="600"/>
-              </a:spcAft>
-            </a:pPr>
+            <a:off x="640080" y="3118104"/>
+            <a:ext cx="3840480" cy="457200"/>
+          </a:xfrm>
+          <a:prstGeom prst="rect">
+            <a:avLst/>
+          </a:prstGeom>
+          <a:noFill/>
+        </p:spPr>
+        <p:txBody>
+          <a:bodyPr wrap="square">
+            <a:spAutoFit/>
+          </a:bodyPr>
+          <a:lstStyle/>
+          <a:p>
+            <a:pPr algn="l"/>
+            <a:r>
+              <a:rPr sz="1400" b="1" i="0">
+                <a:solidFill>
+                  <a:srgbClr val="0F766E"/>
+                </a:solidFill>
+              </a:rPr>
+              <a:t>What stays is the picture</a:t>
+            </a:r>
+          </a:p>
+        </p:txBody>
+      </p:sp>
+      <p:sp>
+        <p:nvSpPr>
+          <p:cNvPr id="11" name="TextBox 10"/>
+          <p:cNvSpPr txBox="1"/>
+          <p:nvPr/>
+        </p:nvSpPr>
+        <p:spPr>
+          <a:xfrm>
+            <a:off x="640080" y="3520440"/>
+            <a:ext cx="10789920" cy="502920"/>
+          </a:xfrm>
+          <a:prstGeom prst="rect">
+            <a:avLst/>
+          </a:prstGeom>
+          <a:noFill/>
+        </p:spPr>
+        <p:txBody>
+          <a:bodyPr wrap="square">
+            <a:spAutoFit/>
+          </a:bodyPr>
+          <a:lstStyle/>
+          <a:p>
+            <a:pPr algn="l"/>
+            <a:r>
+              <a:rPr sz="1300" b="0" i="0">
+                <a:solidFill>
+                  <a:srgbClr val="334155"/>
+                </a:solidFill>
+              </a:rPr>
+              <a:t>The legend, the EIP columns and the CLD loop labels stay on screen. They belong to the diagram, not to the tool — so nothing the room needs to read the graph goes away with the controls.</a:t>
+            </a:r>
+          </a:p>
+        </p:txBody>
+      </p:sp>
+      <p:sp>
+        <p:nvSpPr>
+          <p:cNvPr id="12" name="Rectangle 11"/>
+          <p:cNvSpPr/>
+          <p:nvPr/>
+        </p:nvSpPr>
+        <p:spPr>
+          <a:xfrm>
+            <a:off x="457200" y="4206240"/>
+            <a:ext cx="11247120" cy="1005840"/>
+          </a:xfrm>
+          <a:prstGeom prst="rect">
+            <a:avLst/>
+          </a:prstGeom>
+          <a:solidFill>
+            <a:srgbClr val="FFFFFF"/>
+          </a:solidFill>
+          <a:ln>
+            <a:noFill/>
+          </a:ln>
+        </p:spPr>
+        <p:style>
+          <a:lnRef idx="1">
+            <a:schemeClr val="accent1"/>
+          </a:lnRef>
+          <a:fillRef idx="3">
+            <a:schemeClr val="accent1"/>
+          </a:fillRef>
+          <a:effectRef idx="2">
+            <a:schemeClr val="accent1"/>
+          </a:effectRef>
+          <a:fontRef idx="minor">
+            <a:schemeClr val="lt1"/>
+          </a:fontRef>
+        </p:style>
+        <p:txBody>
+          <a:bodyPr rtlCol="0" anchor="ctr"/>
+          <a:lstStyle/>
+          <a:p>
+            <a:pPr algn="ctr"/>
+          </a:p>
+        </p:txBody>
+      </p:sp>
+      <p:sp>
+        <p:nvSpPr>
+          <p:cNvPr id="13" name="TextBox 12"/>
+          <p:cNvSpPr txBox="1"/>
+          <p:nvPr/>
+        </p:nvSpPr>
+        <p:spPr>
+          <a:xfrm>
+            <a:off x="640080" y="4261103"/>
+            <a:ext cx="3840480" cy="457200"/>
+          </a:xfrm>
+          <a:prstGeom prst="rect">
+            <a:avLst/>
+          </a:prstGeom>
+          <a:noFill/>
+        </p:spPr>
+        <p:txBody>
+          <a:bodyPr wrap="square">
+            <a:spAutoFit/>
+          </a:bodyPr>
+          <a:lstStyle/>
+          <a:p>
+            <a:pPr algn="l"/>
+            <a:r>
+              <a:rPr sz="1400" b="1" i="0">
+                <a:solidFill>
+                  <a:srgbClr val="0F766E"/>
+                </a:solidFill>
+              </a:rPr>
+              <a:t>Still live, not a slide</a:t>
+            </a:r>
+          </a:p>
+        </p:txBody>
+      </p:sp>
+      <p:sp>
+        <p:nvSpPr>
+          <p:cNvPr id="14" name="TextBox 13"/>
+          <p:cNvSpPr txBox="1"/>
+          <p:nvPr/>
+        </p:nvSpPr>
+        <p:spPr>
+          <a:xfrm>
+            <a:off x="640080" y="4663440"/>
+            <a:ext cx="10789920" cy="502920"/>
+          </a:xfrm>
+          <a:prstGeom prst="rect">
+            <a:avLst/>
+          </a:prstGeom>
+          <a:noFill/>
+        </p:spPr>
+        <p:txBody>
+          <a:bodyPr wrap="square">
+            <a:spAutoFit/>
+          </a:bodyPr>
+          <a:lstStyle/>
+          <a:p>
+            <a:pPr algn="l"/>
+            <a:r>
+              <a:rPr sz="1300" b="0" i="0">
+                <a:solidFill>
+                  <a:srgbClr val="334155"/>
+                </a:solidFill>
+              </a:rPr>
+              <a:t>Nothing is read-only: nodes drag, edges draw, labels edit. Run polarity propagation or a Trace animation in front of the room — those controls are among the few kept on screen, because a presenter uses them.</a:t>
+            </a:r>
+          </a:p>
+        </p:txBody>
+      </p:sp>
+      <p:sp>
+        <p:nvSpPr>
+          <p:cNvPr id="15" name="Rectangle 14"/>
+          <p:cNvSpPr/>
+          <p:nvPr/>
+        </p:nvSpPr>
+        <p:spPr>
+          <a:xfrm>
+            <a:off x="457200" y="5349240"/>
+            <a:ext cx="11247120" cy="1005840"/>
+          </a:xfrm>
+          <a:prstGeom prst="rect">
+            <a:avLst/>
+          </a:prstGeom>
+          <a:solidFill>
+            <a:srgbClr val="FFFFFF"/>
+          </a:solidFill>
+          <a:ln>
+            <a:noFill/>
+          </a:ln>
+        </p:spPr>
+        <p:style>
+          <a:lnRef idx="1">
+            <a:schemeClr val="accent1"/>
+          </a:lnRef>
+          <a:fillRef idx="3">
+            <a:schemeClr val="accent1"/>
+          </a:fillRef>
+          <a:effectRef idx="2">
+            <a:schemeClr val="accent1"/>
+          </a:effectRef>
+          <a:fontRef idx="minor">
+            <a:schemeClr val="lt1"/>
+          </a:fontRef>
+        </p:style>
+        <p:txBody>
+          <a:bodyPr rtlCol="0" anchor="ctr"/>
+          <a:lstStyle/>
+          <a:p>
+            <a:pPr algn="ctr"/>
+          </a:p>
+        </p:txBody>
+      </p:sp>
+      <p:sp>
+        <p:nvSpPr>
+          <p:cNvPr id="16" name="TextBox 15"/>
+          <p:cNvSpPr txBox="1"/>
+          <p:nvPr/>
+        </p:nvSpPr>
+        <p:spPr>
+          <a:xfrm>
+            <a:off x="640080" y="5404103"/>
+            <a:ext cx="3840480" cy="457200"/>
+          </a:xfrm>
+          <a:prstGeom prst="rect">
+            <a:avLst/>
+          </a:prstGeom>
+          <a:noFill/>
+        </p:spPr>
+        <p:txBody>
+          <a:bodyPr wrap="square">
+            <a:spAutoFit/>
+          </a:bodyPr>
+          <a:lstStyle/>
+          <a:p>
+            <a:pPr algn="l"/>
+            <a:r>
+              <a:rPr sz="1400" b="1" i="0">
+                <a:solidFill>
+                  <a:srgbClr val="0F766E"/>
+                </a:solidFill>
+              </a:rPr>
+              <a:t>Hover still answers the question</a:t>
+            </a:r>
+          </a:p>
+        </p:txBody>
+      </p:sp>
+      <p:sp>
+        <p:nvSpPr>
+          <p:cNvPr id="17" name="TextBox 16"/>
+          <p:cNvSpPr txBox="1"/>
+          <p:nvPr/>
+        </p:nvSpPr>
+        <p:spPr>
+          <a:xfrm>
+            <a:off x="640080" y="5806440"/>
+            <a:ext cx="10789920" cy="502920"/>
+          </a:xfrm>
+          <a:prstGeom prst="rect">
+            <a:avLst/>
+          </a:prstGeom>
+          <a:noFill/>
+        </p:spPr>
+        <p:txBody>
+          <a:bodyPr wrap="square">
+            <a:spAutoFit/>
+          </a:bodyPr>
+          <a:lstStyle/>
+          <a:p>
+            <a:pPr algn="l"/>
+            <a:r>
+              <a:rPr sz="1300" b="0" i="0">
+                <a:solidFill>
+                  <a:srgbClr val="334155"/>
+                </a:solidFill>
+              </a:rPr>
+              <a:t>Notes, properties and source links appear on hover, so a challenge from the room is answered from the diagram itself rather than from a separate document.</a:t>
+            </a:r>
+          </a:p>
+        </p:txBody>
+      </p:sp>
+    </p:spTree>
+  </p:cSld>
+  <p:clrMapOvr>
+    <a:masterClrMapping/>
+  </p:clrMapOvr>
+</p:sld>
+</file>
+
+<file path=ppt/slides/slide15.xml><?xml version="1.0" encoding="utf-8"?>
+<p:sld xmlns:a="http://schemas.openxmlformats.org/drawingml/2006/main" xmlns:p="http://schemas.openxmlformats.org/presentationml/2006/main" xmlns:r="http://schemas.openxmlformats.org/officeDocument/2006/relationships">
+  <p:cSld>
+    <p:spTree>
+      <p:nvGrpSpPr>
+        <p:cNvPr id="1" name=""/>
+        <p:cNvGrpSpPr/>
+        <p:nvPr/>
+      </p:nvGrpSpPr>
+      <p:grpSpPr/>
+      <p:sp>
+        <p:nvSpPr>
+          <p:cNvPr id="2" name="Rectangle 1"/>
+          <p:cNvSpPr/>
+          <p:nvPr/>
+        </p:nvSpPr>
+        <p:spPr>
+          <a:xfrm>
+            <a:off x="0" y="0"/>
+            <a:ext cx="12188952" cy="6858000"/>
+          </a:xfrm>
+          <a:prstGeom prst="rect">
+            <a:avLst/>
+          </a:prstGeom>
+          <a:solidFill>
+            <a:srgbClr val="F8FAFC"/>
+          </a:solidFill>
+          <a:ln>
+            <a:noFill/>
+          </a:ln>
+        </p:spPr>
+        <p:style>
+          <a:lnRef idx="1">
+            <a:schemeClr val="accent1"/>
+          </a:lnRef>
+          <a:fillRef idx="3">
+            <a:schemeClr val="accent1"/>
+          </a:fillRef>
+          <a:effectRef idx="2">
+            <a:schemeClr val="accent1"/>
+          </a:effectRef>
+          <a:fontRef idx="minor">
+            <a:schemeClr val="lt1"/>
+          </a:fontRef>
+        </p:style>
+        <p:txBody>
+          <a:bodyPr rtlCol="0" anchor="ctr"/>
+          <a:lstStyle/>
+          <a:p>
+            <a:pPr algn="ctr"/>
+          </a:p>
+        </p:txBody>
+      </p:sp>
+      <p:sp>
+        <p:nvSpPr>
+          <p:cNvPr id="3" name="Rectangle 2"/>
+          <p:cNvSpPr/>
+          <p:nvPr/>
+        </p:nvSpPr>
+        <p:spPr>
+          <a:xfrm>
+            <a:off x="0" y="0"/>
+            <a:ext cx="12188952" cy="1005840"/>
+          </a:xfrm>
+          <a:prstGeom prst="rect">
+            <a:avLst/>
+          </a:prstGeom>
+          <a:solidFill>
+            <a:srgbClr val="1D4ED8"/>
+          </a:solidFill>
+          <a:ln>
+            <a:noFill/>
+          </a:ln>
+        </p:spPr>
+        <p:style>
+          <a:lnRef idx="1">
+            <a:schemeClr val="accent1"/>
+          </a:lnRef>
+          <a:fillRef idx="3">
+            <a:schemeClr val="accent1"/>
+          </a:fillRef>
+          <a:effectRef idx="2">
+            <a:schemeClr val="accent1"/>
+          </a:effectRef>
+          <a:fontRef idx="minor">
+            <a:schemeClr val="lt1"/>
+          </a:fontRef>
+        </p:style>
+        <p:txBody>
+          <a:bodyPr rtlCol="0" anchor="ctr"/>
+          <a:lstStyle/>
+          <a:p>
+            <a:pPr algn="ctr"/>
+          </a:p>
+        </p:txBody>
+      </p:sp>
+      <p:sp>
+        <p:nvSpPr>
+          <p:cNvPr id="4" name="TextBox 3"/>
+          <p:cNvSpPr txBox="1"/>
+          <p:nvPr/>
+        </p:nvSpPr>
+        <p:spPr>
+          <a:xfrm>
+            <a:off x="457200" y="137160"/>
+            <a:ext cx="11247120" cy="731520"/>
+          </a:xfrm>
+          <a:prstGeom prst="rect">
+            <a:avLst/>
+          </a:prstGeom>
+          <a:noFill/>
+        </p:spPr>
+        <p:txBody>
+          <a:bodyPr wrap="square">
+            <a:spAutoFit/>
+          </a:bodyPr>
+          <a:lstStyle/>
+          <a:p>
+            <a:pPr algn="l"/>
+            <a:r>
+              <a:rPr sz="2800" b="1" i="0">
+                <a:solidFill>
+                  <a:srgbClr val="FFFFFF"/>
+                </a:solidFill>
+              </a:rPr>
+              <a:t>What you can map for a neighborhood</a:t>
+            </a:r>
+          </a:p>
+        </p:txBody>
+      </p:sp>
+      <p:sp>
+        <p:nvSpPr>
+          <p:cNvPr id="5" name="Rectangle 4"/>
+          <p:cNvSpPr/>
+          <p:nvPr/>
+        </p:nvSpPr>
+        <p:spPr>
+          <a:xfrm>
+            <a:off x="365760" y="1143000"/>
+            <a:ext cx="5577840" cy="2423160"/>
+          </a:xfrm>
+          <a:prstGeom prst="rect">
+            <a:avLst/>
+          </a:prstGeom>
+          <a:solidFill>
+            <a:srgbClr val="FFFFFF"/>
+          </a:solidFill>
+          <a:ln>
+            <a:noFill/>
+          </a:ln>
+        </p:spPr>
+        <p:style>
+          <a:lnRef idx="1">
+            <a:schemeClr val="accent1"/>
+          </a:lnRef>
+          <a:fillRef idx="3">
+            <a:schemeClr val="accent1"/>
+          </a:fillRef>
+          <a:effectRef idx="2">
+            <a:schemeClr val="accent1"/>
+          </a:effectRef>
+          <a:fontRef idx="minor">
+            <a:schemeClr val="lt1"/>
+          </a:fontRef>
+        </p:style>
+        <p:txBody>
+          <a:bodyPr rtlCol="0" anchor="ctr"/>
+          <a:lstStyle/>
+          <a:p>
+            <a:pPr algn="ctr"/>
+          </a:p>
+        </p:txBody>
+      </p:sp>
+      <p:sp>
+        <p:nvSpPr>
+          <p:cNvPr id="6" name="TextBox 5"/>
+          <p:cNvSpPr txBox="1"/>
+          <p:nvPr/>
+        </p:nvSpPr>
+        <p:spPr>
+          <a:xfrm>
+            <a:off x="548640" y="1234440"/>
+            <a:ext cx="5212080" cy="731520"/>
+          </a:xfrm>
+          <a:prstGeom prst="rect">
+            <a:avLst/>
+          </a:prstGeom>
+          <a:noFill/>
+        </p:spPr>
+        <p:txBody>
+          <a:bodyPr wrap="square">
+            <a:spAutoFit/>
+          </a:bodyPr>
+          <a:lstStyle/>
+          <a:p>
+            <a:pPr algn="l"/>
+            <a:r>
+              <a:rPr sz="1800" b="1" i="0">
+                <a:solidFill>
+                  <a:srgbClr val="1D4ED8"/>
+                </a:solidFill>
+              </a:rPr>
+              <a:t>Commercial district
+systems</a:t>
+            </a:r>
+          </a:p>
+        </p:txBody>
+      </p:sp>
+      <p:sp>
+        <p:nvSpPr>
+          <p:cNvPr id="7" name="TextBox 6"/>
+          <p:cNvSpPr txBox="1"/>
+          <p:nvPr/>
+        </p:nvSpPr>
+        <p:spPr>
+          <a:xfrm>
+            <a:off x="548640" y="2011680"/>
+            <a:ext cx="5212080" cy="1463040"/>
+          </a:xfrm>
+          <a:prstGeom prst="rect">
+            <a:avLst/>
+          </a:prstGeom>
+          <a:noFill/>
+        </p:spPr>
+        <p:txBody>
+          <a:bodyPr wrap="square">
+            <a:spAutoFit/>
+          </a:bodyPr>
+          <a:lstStyle/>
+          <a:p>
+            <a:pPr algn="l"/>
+            <a:r>
+              <a:rPr sz="1300" b="0" i="0">
+                <a:solidFill>
+                  <a:srgbClr val="334155"/>
+                </a:solidFill>
+              </a:rPr>
+              <a:t>Map businesses by type (OPM: Classification-Instantiation), ownership structure (Aggregation-Participation), and governance relationships (EIP). Export OPL as documentation.</a:t>
+            </a:r>
+          </a:p>
+        </p:txBody>
+      </p:sp>
+      <p:sp>
+        <p:nvSpPr>
+          <p:cNvPr id="8" name="Rectangle 7"/>
+          <p:cNvSpPr/>
+          <p:nvPr/>
+        </p:nvSpPr>
+        <p:spPr>
+          <a:xfrm>
+            <a:off x="6263640" y="1143000"/>
+            <a:ext cx="5577840" cy="2423160"/>
+          </a:xfrm>
+          <a:prstGeom prst="rect">
+            <a:avLst/>
+          </a:prstGeom>
+          <a:solidFill>
+            <a:srgbClr val="FFFFFF"/>
+          </a:solidFill>
+          <a:ln>
+            <a:noFill/>
+          </a:ln>
+        </p:spPr>
+        <p:style>
+          <a:lnRef idx="1">
+            <a:schemeClr val="accent1"/>
+          </a:lnRef>
+          <a:fillRef idx="3">
+            <a:schemeClr val="accent1"/>
+          </a:fillRef>
+          <a:effectRef idx="2">
+            <a:schemeClr val="accent1"/>
+          </a:effectRef>
+          <a:fontRef idx="minor">
+            <a:schemeClr val="lt1"/>
+          </a:fontRef>
+        </p:style>
+        <p:txBody>
+          <a:bodyPr rtlCol="0" anchor="ctr"/>
+          <a:lstStyle/>
+          <a:p>
+            <a:pPr algn="ctr"/>
+          </a:p>
+        </p:txBody>
+      </p:sp>
+      <p:sp>
+        <p:nvSpPr>
+          <p:cNvPr id="9" name="TextBox 8"/>
+          <p:cNvSpPr txBox="1"/>
+          <p:nvPr/>
+        </p:nvSpPr>
+        <p:spPr>
+          <a:xfrm>
+            <a:off x="6446520" y="1234440"/>
+            <a:ext cx="5212080" cy="731520"/>
+          </a:xfrm>
+          <a:prstGeom prst="rect">
+            <a:avLst/>
+          </a:prstGeom>
+          <a:noFill/>
+        </p:spPr>
+        <p:txBody>
+          <a:bodyPr wrap="square">
+            <a:spAutoFit/>
+          </a:bodyPr>
+          <a:lstStyle/>
+          <a:p>
+            <a:pPr algn="l"/>
+            <a:r>
+              <a:rPr sz="1800" b="1" i="0">
+                <a:solidFill>
+                  <a:srgbClr val="1D4ED8"/>
+                </a:solidFill>
+              </a:rPr>
+              <a:t>Causal chains in
+community risk</a:t>
+            </a:r>
+          </a:p>
+        </p:txBody>
+      </p:sp>
+      <p:sp>
+        <p:nvSpPr>
+          <p:cNvPr id="10" name="TextBox 9"/>
+          <p:cNvSpPr txBox="1"/>
+          <p:nvPr/>
+        </p:nvSpPr>
+        <p:spPr>
+          <a:xfrm>
+            <a:off x="6446520" y="2011680"/>
+            <a:ext cx="5212080" cy="1463040"/>
+          </a:xfrm>
+          <a:prstGeom prst="rect">
+            <a:avLst/>
+          </a:prstGeom>
+          <a:noFill/>
+        </p:spPr>
+        <p:txBody>
+          <a:bodyPr wrap="square">
+            <a:spAutoFit/>
+          </a:bodyPr>
+          <a:lstStyle/>
+          <a:p>
+            <a:pPr algn="l"/>
+            <a:r>
+              <a:rPr sz="1300" b="0" i="0">
+                <a:solidFill>
+                  <a:srgbClr val="334155"/>
+                </a:solidFill>
+              </a:rPr>
+              <a:t>Use NRM mode to trace from Underlying Causes through Preconditions to Incident. Identify missing or failed barriers. Switch to CLD to find reinforcing loops.</a:t>
+            </a:r>
+          </a:p>
+        </p:txBody>
+      </p:sp>
+      <p:sp>
+        <p:nvSpPr>
+          <p:cNvPr id="11" name="Rectangle 10"/>
+          <p:cNvSpPr/>
+          <p:nvPr/>
+        </p:nvSpPr>
+        <p:spPr>
+          <a:xfrm>
+            <a:off x="365760" y="3794760"/>
+            <a:ext cx="5577840" cy="2423160"/>
+          </a:xfrm>
+          <a:prstGeom prst="rect">
+            <a:avLst/>
+          </a:prstGeom>
+          <a:solidFill>
+            <a:srgbClr val="FFFFFF"/>
+          </a:solidFill>
+          <a:ln>
+            <a:noFill/>
+          </a:ln>
+        </p:spPr>
+        <p:style>
+          <a:lnRef idx="1">
+            <a:schemeClr val="accent1"/>
+          </a:lnRef>
+          <a:fillRef idx="3">
+            <a:schemeClr val="accent1"/>
+          </a:fillRef>
+          <a:effectRef idx="2">
+            <a:schemeClr val="accent1"/>
+          </a:effectRef>
+          <a:fontRef idx="minor">
+            <a:schemeClr val="lt1"/>
+          </a:fontRef>
+        </p:style>
+        <p:txBody>
+          <a:bodyPr rtlCol="0" anchor="ctr"/>
+          <a:lstStyle/>
+          <a:p>
+            <a:pPr algn="ctr"/>
+          </a:p>
+        </p:txBody>
+      </p:sp>
+      <p:sp>
+        <p:nvSpPr>
+          <p:cNvPr id="12" name="TextBox 11"/>
+          <p:cNvSpPr txBox="1"/>
+          <p:nvPr/>
+        </p:nvSpPr>
+        <p:spPr>
+          <a:xfrm>
+            <a:off x="548640" y="3886200"/>
+            <a:ext cx="5212080" cy="731520"/>
+          </a:xfrm>
+          <a:prstGeom prst="rect">
+            <a:avLst/>
+          </a:prstGeom>
+          <a:noFill/>
+        </p:spPr>
+        <p:txBody>
+          <a:bodyPr wrap="square">
+            <a:spAutoFit/>
+          </a:bodyPr>
+          <a:lstStyle/>
+          <a:p>
+            <a:pPr algn="l"/>
+            <a:r>
+              <a:rPr sz="1800" b="1" i="0">
+                <a:solidFill>
+                  <a:srgbClr val="1D4ED8"/>
+                </a:solidFill>
+              </a:rPr>
+              <a:t>Health systems
+mapping</a:t>
+            </a:r>
+          </a:p>
+        </p:txBody>
+      </p:sp>
+      <p:sp>
+        <p:nvSpPr>
+          <p:cNvPr id="13" name="TextBox 12"/>
+          <p:cNvSpPr txBox="1"/>
+          <p:nvPr/>
+        </p:nvSpPr>
+        <p:spPr>
+          <a:xfrm>
+            <a:off x="548640" y="4663440"/>
+            <a:ext cx="5212080" cy="1463040"/>
+          </a:xfrm>
+          <a:prstGeom prst="rect">
+            <a:avLst/>
+          </a:prstGeom>
+          <a:noFill/>
+        </p:spPr>
+        <p:txBody>
+          <a:bodyPr wrap="square">
+            <a:spAutoFit/>
+          </a:bodyPr>
+          <a:lstStyle/>
+          <a:p>
+            <a:pPr algn="l"/>
+            <a:r>
+              <a:rPr sz="1300" b="0" i="0">
+                <a:solidFill>
+                  <a:srgbClr val="334155"/>
+                </a:solidFill>
+              </a:rPr>
+              <a:t>Map service providers (Objects), care processes (Processes), and the relationships between them. Generate OPL for shared care plan documentation. Export Cypher for database integration.</a:t>
+            </a:r>
+          </a:p>
+        </p:txBody>
+      </p:sp>
+      <p:sp>
+        <p:nvSpPr>
+          <p:cNvPr id="14" name="Rectangle 13"/>
+          <p:cNvSpPr/>
+          <p:nvPr/>
+        </p:nvSpPr>
+        <p:spPr>
+          <a:xfrm>
+            <a:off x="6263640" y="3794760"/>
+            <a:ext cx="5577840" cy="2423160"/>
+          </a:xfrm>
+          <a:prstGeom prst="rect">
+            <a:avLst/>
+          </a:prstGeom>
+          <a:solidFill>
+            <a:srgbClr val="FFFFFF"/>
+          </a:solidFill>
+          <a:ln>
+            <a:noFill/>
+          </a:ln>
+        </p:spPr>
+        <p:style>
+          <a:lnRef idx="1">
+            <a:schemeClr val="accent1"/>
+          </a:lnRef>
+          <a:fillRef idx="3">
+            <a:schemeClr val="accent1"/>
+          </a:fillRef>
+          <a:effectRef idx="2">
+            <a:schemeClr val="accent1"/>
+          </a:effectRef>
+          <a:fontRef idx="minor">
+            <a:schemeClr val="lt1"/>
+          </a:fontRef>
+        </p:style>
+        <p:txBody>
+          <a:bodyPr rtlCol="0" anchor="ctr"/>
+          <a:lstStyle/>
+          <a:p>
+            <a:pPr algn="ctr"/>
+          </a:p>
+        </p:txBody>
+      </p:sp>
+      <p:sp>
+        <p:nvSpPr>
+          <p:cNvPr id="15" name="TextBox 14"/>
+          <p:cNvSpPr txBox="1"/>
+          <p:nvPr/>
+        </p:nvSpPr>
+        <p:spPr>
+          <a:xfrm>
+            <a:off x="6446520" y="3886200"/>
+            <a:ext cx="5212080" cy="731520"/>
+          </a:xfrm>
+          <a:prstGeom prst="rect">
+            <a:avLst/>
+          </a:prstGeom>
+          <a:noFill/>
+        </p:spPr>
+        <p:txBody>
+          <a:bodyPr wrap="square">
+            <a:spAutoFit/>
+          </a:bodyPr>
+          <a:lstStyle/>
+          <a:p>
+            <a:pPr algn="l"/>
+            <a:r>
+              <a:rPr sz="1800" b="1" i="0">
+                <a:solidFill>
+                  <a:srgbClr val="1D4ED8"/>
+                </a:solidFill>
+              </a:rPr>
+              <a:t>Policy and
+governance</a:t>
+            </a:r>
+          </a:p>
+        </p:txBody>
+      </p:sp>
+      <p:sp>
+        <p:nvSpPr>
+          <p:cNvPr id="16" name="TextBox 15"/>
+          <p:cNvSpPr txBox="1"/>
+          <p:nvPr/>
+        </p:nvSpPr>
+        <p:spPr>
+          <a:xfrm>
+            <a:off x="6446520" y="4663440"/>
+            <a:ext cx="5212080" cy="1463040"/>
+          </a:xfrm>
+          <a:prstGeom prst="rect">
+            <a:avLst/>
+          </a:prstGeom>
+          <a:noFill/>
+        </p:spPr>
+        <p:txBody>
+          <a:bodyPr wrap="square">
+            <a:spAutoFit/>
+          </a:bodyPr>
+          <a:lstStyle/>
+          <a:p>
+            <a:pPr algn="l"/>
+            <a:r>
+              <a:rPr sz="1300" b="0" i="0">
+                <a:solidFill>
+                  <a:srgbClr val="334155"/>
+                </a:solidFill>
+              </a:rPr>
+              <a:t>Use EIP columns to position stakeholders, institutions, and ecological factors. Use Triples to attach agreements or interventions to specific causal links. Animate pathways with Trace mode for presentations.</a:t>
+            </a:r>
+          </a:p>
+        </p:txBody>
+      </p:sp>
+    </p:spTree>
+  </p:cSld>
+  <p:clrMapOvr>
+    <a:masterClrMapping/>
+  </p:clrMapOvr>
+</p:sld>
+</file>
+
+<file path=ppt/slides/slide16.xml><?xml version="1.0" encoding="utf-8"?>
+<p:sld xmlns:a="http://schemas.openxmlformats.org/drawingml/2006/main" xmlns:p="http://schemas.openxmlformats.org/presentationml/2006/main" xmlns:r="http://schemas.openxmlformats.org/officeDocument/2006/relationships">
+  <p:cSld>
+    <p:spTree>
+      <p:nvGrpSpPr>
+        <p:cNvPr id="1" name=""/>
+        <p:cNvGrpSpPr/>
+        <p:nvPr/>
+      </p:nvGrpSpPr>
+      <p:grpSpPr/>
+      <p:sp>
+        <p:nvSpPr>
+          <p:cNvPr id="2" name="Rectangle 1"/>
+          <p:cNvSpPr/>
+          <p:nvPr/>
+        </p:nvSpPr>
+        <p:spPr>
+          <a:xfrm>
+            <a:off x="0" y="0"/>
+            <a:ext cx="12188952" cy="6858000"/>
+          </a:xfrm>
+          <a:prstGeom prst="rect">
+            <a:avLst/>
+          </a:prstGeom>
+          <a:solidFill>
+            <a:srgbClr val="F8FAFC"/>
+          </a:solidFill>
+          <a:ln>
+            <a:noFill/>
+          </a:ln>
+        </p:spPr>
+        <p:style>
+          <a:lnRef idx="1">
+            <a:schemeClr val="accent1"/>
+          </a:lnRef>
+          <a:fillRef idx="3">
+            <a:schemeClr val="accent1"/>
+          </a:fillRef>
+          <a:effectRef idx="2">
+            <a:schemeClr val="accent1"/>
+          </a:effectRef>
+          <a:fontRef idx="minor">
+            <a:schemeClr val="lt1"/>
+          </a:fontRef>
+        </p:style>
+        <p:txBody>
+          <a:bodyPr rtlCol="0" anchor="ctr"/>
+          <a:lstStyle/>
+          <a:p>
+            <a:pPr algn="ctr"/>
+          </a:p>
+        </p:txBody>
+      </p:sp>
+      <p:sp>
+        <p:nvSpPr>
+          <p:cNvPr id="3" name="Rectangle 2"/>
+          <p:cNvSpPr/>
+          <p:nvPr/>
+        </p:nvSpPr>
+        <p:spPr>
+          <a:xfrm>
+            <a:off x="0" y="0"/>
+            <a:ext cx="12188952" cy="1005840"/>
+          </a:xfrm>
+          <a:prstGeom prst="rect">
+            <a:avLst/>
+          </a:prstGeom>
+          <a:solidFill>
+            <a:srgbClr val="0F766E"/>
+          </a:solidFill>
+          <a:ln>
+            <a:noFill/>
+          </a:ln>
+        </p:spPr>
+        <p:style>
+          <a:lnRef idx="1">
+            <a:schemeClr val="accent1"/>
+          </a:lnRef>
+          <a:fillRef idx="3">
+            <a:schemeClr val="accent1"/>
+          </a:fillRef>
+          <a:effectRef idx="2">
+            <a:schemeClr val="accent1"/>
+          </a:effectRef>
+          <a:fontRef idx="minor">
+            <a:schemeClr val="lt1"/>
+          </a:fontRef>
+        </p:style>
+        <p:txBody>
+          <a:bodyPr rtlCol="0" anchor="ctr"/>
+          <a:lstStyle/>
+          <a:p>
+            <a:pPr algn="ctr"/>
+          </a:p>
+        </p:txBody>
+      </p:sp>
+      <p:sp>
+        <p:nvSpPr>
+          <p:cNvPr id="4" name="TextBox 3"/>
+          <p:cNvSpPr txBox="1"/>
+          <p:nvPr/>
+        </p:nvSpPr>
+        <p:spPr>
+          <a:xfrm>
+            <a:off x="457200" y="137160"/>
+            <a:ext cx="11247120" cy="731520"/>
+          </a:xfrm>
+          <a:prstGeom prst="rect">
+            <a:avLst/>
+          </a:prstGeom>
+          <a:noFill/>
+        </p:spPr>
+        <p:txBody>
+          <a:bodyPr wrap="square">
+            <a:spAutoFit/>
+          </a:bodyPr>
+          <a:lstStyle/>
+          <a:p>
+            <a:pPr algn="l"/>
+            <a:r>
+              <a:rPr sz="2800" b="1" i="0">
+                <a:solidFill>
+                  <a:srgbClr val="FFFFFF"/>
+                </a:solidFill>
+              </a:rPr>
+              <a:t>Getting started — in under 5 minutes</a:t>
+            </a:r>
+          </a:p>
+        </p:txBody>
+      </p:sp>
+      <p:sp>
+        <p:nvSpPr>
+          <p:cNvPr id="5" name="Rectangle 4"/>
+          <p:cNvSpPr/>
+          <p:nvPr/>
+        </p:nvSpPr>
+        <p:spPr>
+          <a:xfrm>
+            <a:off x="365760" y="1188720"/>
+            <a:ext cx="5577840" cy="1645920"/>
+          </a:xfrm>
+          <a:prstGeom prst="rect">
+            <a:avLst/>
+          </a:prstGeom>
+          <a:solidFill>
+            <a:srgbClr val="FFFFFF"/>
+          </a:solidFill>
+          <a:ln>
+            <a:noFill/>
+          </a:ln>
+        </p:spPr>
+        <p:style>
+          <a:lnRef idx="1">
+            <a:schemeClr val="accent1"/>
+          </a:lnRef>
+          <a:fillRef idx="3">
+            <a:schemeClr val="accent1"/>
+          </a:fillRef>
+          <a:effectRef idx="2">
+            <a:schemeClr val="accent1"/>
+          </a:effectRef>
+          <a:fontRef idx="minor">
+            <a:schemeClr val="lt1"/>
+          </a:fontRef>
+        </p:style>
+        <p:txBody>
+          <a:bodyPr rtlCol="0" anchor="ctr"/>
+          <a:lstStyle/>
+          <a:p>
+            <a:pPr algn="ctr"/>
+          </a:p>
+        </p:txBody>
+      </p:sp>
+      <p:sp>
+        <p:nvSpPr>
+          <p:cNvPr id="6" name="Rectangle 5"/>
+          <p:cNvSpPr/>
+          <p:nvPr/>
+        </p:nvSpPr>
+        <p:spPr>
+          <a:xfrm>
+            <a:off x="502920" y="1325880"/>
+            <a:ext cx="502920" cy="502920"/>
+          </a:xfrm>
+          <a:prstGeom prst="rect">
+            <a:avLst/>
+          </a:prstGeom>
+          <a:solidFill>
+            <a:srgbClr val="0F766E"/>
+          </a:solidFill>
+          <a:ln>
+            <a:noFill/>
+          </a:ln>
+        </p:spPr>
+        <p:style>
+          <a:lnRef idx="1">
+            <a:schemeClr val="accent1"/>
+          </a:lnRef>
+          <a:fillRef idx="3">
+            <a:schemeClr val="accent1"/>
+          </a:fillRef>
+          <a:effectRef idx="2">
+            <a:schemeClr val="accent1"/>
+          </a:effectRef>
+          <a:fontRef idx="minor">
+            <a:schemeClr val="lt1"/>
+          </a:fontRef>
+        </p:style>
+        <p:txBody>
+          <a:bodyPr rtlCol="0" anchor="ctr"/>
+          <a:lstStyle/>
+          <a:p>
+            <a:pPr algn="ctr"/>
             <a:r>
               <a:rPr sz="1600" b="1">
                 <a:solidFill>
-                  <a:srgbClr val="166A34"/>
-                </a:solidFill>
-              </a:rPr>
-              <a:t>Exports that describe themselves</a:t>
+                  <a:srgbClr val="FFFFFF"/>
+                </a:solidFill>
+              </a:rPr>
+              <a:t>1</a:t>
+            </a:r>
+          </a:p>
+        </p:txBody>
+      </p:sp>
+      <p:sp>
+        <p:nvSpPr>
+          <p:cNvPr id="7" name="TextBox 6"/>
+          <p:cNvSpPr txBox="1"/>
+          <p:nvPr/>
+        </p:nvSpPr>
+        <p:spPr>
+          <a:xfrm>
+            <a:off x="1115568" y="1298448"/>
+            <a:ext cx="4663440" cy="411480"/>
+          </a:xfrm>
+          <a:prstGeom prst="rect">
+            <a:avLst/>
+          </a:prstGeom>
+          <a:noFill/>
+        </p:spPr>
+        <p:txBody>
+          <a:bodyPr wrap="square">
+            <a:spAutoFit/>
+          </a:bodyPr>
+          <a:lstStyle/>
+          <a:p>
+            <a:pPr algn="l"/>
+            <a:r>
+              <a:rPr sz="1500" b="1" i="0">
+                <a:solidFill>
+                  <a:srgbClr val="0F172A"/>
+                </a:solidFill>
+              </a:rPr>
+              <a:t>Open the file</a:t>
+            </a:r>
+          </a:p>
+        </p:txBody>
+      </p:sp>
+      <p:sp>
+        <p:nvSpPr>
+          <p:cNvPr id="8" name="TextBox 7"/>
+          <p:cNvSpPr txBox="1"/>
+          <p:nvPr/>
+        </p:nvSpPr>
+        <p:spPr>
+          <a:xfrm>
+            <a:off x="1115568" y="1737360"/>
+            <a:ext cx="4663440" cy="914400"/>
+          </a:xfrm>
+          <a:prstGeom prst="rect">
+            <a:avLst/>
+          </a:prstGeom>
+          <a:noFill/>
+        </p:spPr>
+        <p:txBody>
+          <a:bodyPr wrap="square">
+            <a:spAutoFit/>
+          </a:bodyPr>
+          <a:lstStyle/>
+          <a:p>
+            <a:pPr algn="l"/>
+            <a:r>
+              <a:rPr sz="1300" b="0" i="0">
+                <a:solidFill>
+                  <a:srgbClr val="334155"/>
+                </a:solidFill>
+              </a:rPr>
+              <a:t>Open graph-tool-v22.html in any modern browser.
+No install. No account. No internet required after loading.</a:t>
+            </a:r>
+          </a:p>
+        </p:txBody>
+      </p:sp>
+      <p:sp>
+        <p:nvSpPr>
+          <p:cNvPr id="9" name="Rectangle 8"/>
+          <p:cNvSpPr/>
+          <p:nvPr/>
+        </p:nvSpPr>
+        <p:spPr>
+          <a:xfrm>
+            <a:off x="6263640" y="1188720"/>
+            <a:ext cx="5577840" cy="1645920"/>
+          </a:xfrm>
+          <a:prstGeom prst="rect">
+            <a:avLst/>
+          </a:prstGeom>
+          <a:solidFill>
+            <a:srgbClr val="FFFFFF"/>
+          </a:solidFill>
+          <a:ln>
+            <a:noFill/>
+          </a:ln>
+        </p:spPr>
+        <p:style>
+          <a:lnRef idx="1">
+            <a:schemeClr val="accent1"/>
+          </a:lnRef>
+          <a:fillRef idx="3">
+            <a:schemeClr val="accent1"/>
+          </a:fillRef>
+          <a:effectRef idx="2">
+            <a:schemeClr val="accent1"/>
+          </a:effectRef>
+          <a:fontRef idx="minor">
+            <a:schemeClr val="lt1"/>
+          </a:fontRef>
+        </p:style>
+        <p:txBody>
+          <a:bodyPr rtlCol="0" anchor="ctr"/>
+          <a:lstStyle/>
+          <a:p>
+            <a:pPr algn="ctr"/>
+          </a:p>
+        </p:txBody>
+      </p:sp>
+      <p:sp>
+        <p:nvSpPr>
+          <p:cNvPr id="10" name="Rectangle 9"/>
+          <p:cNvSpPr/>
+          <p:nvPr/>
+        </p:nvSpPr>
+        <p:spPr>
+          <a:xfrm>
+            <a:off x="6400800" y="1325880"/>
+            <a:ext cx="502920" cy="502920"/>
+          </a:xfrm>
+          <a:prstGeom prst="rect">
+            <a:avLst/>
+          </a:prstGeom>
+          <a:solidFill>
+            <a:srgbClr val="0F766E"/>
+          </a:solidFill>
+          <a:ln>
+            <a:noFill/>
+          </a:ln>
+        </p:spPr>
+        <p:style>
+          <a:lnRef idx="1">
+            <a:schemeClr val="accent1"/>
+          </a:lnRef>
+          <a:fillRef idx="3">
+            <a:schemeClr val="accent1"/>
+          </a:fillRef>
+          <a:effectRef idx="2">
+            <a:schemeClr val="accent1"/>
+          </a:effectRef>
+          <a:fontRef idx="minor">
+            <a:schemeClr val="lt1"/>
+          </a:fontRef>
+        </p:style>
+        <p:txBody>
+          <a:bodyPr rtlCol="0" anchor="ctr"/>
+          <a:lstStyle/>
+          <a:p>
+            <a:pPr algn="ctr"/>
+            <a:r>
+              <a:rPr sz="1600" b="1">
+                <a:solidFill>
+                  <a:srgbClr val="FFFFFF"/>
+                </a:solidFill>
+              </a:rPr>
+              <a:t>2</a:t>
             </a:r>
           </a:p>
         </p:txBody>
@@ -6766,130 +8084,960 @@
         </p:nvSpPr>
         <p:spPr>
           <a:xfrm>
-            <a:off x="6309360" y="1810512"/>
-            <a:ext cx="5303520" cy="457200"/>
-          </a:xfrm>
-          <a:prstGeom prst="rect">
-            <a:avLst/>
-          </a:prstGeom>
-          <a:noFill/>
-        </p:spPr>
-        <p:txBody>
-          <a:bodyPr wrap="square">
-            <a:spAutoFit/>
-          </a:bodyPr>
-          <a:lstStyle/>
-          <a:p>
-            <a:pPr>
-              <a:spcAft>
-                <a:spcPts val="600"/>
-              </a:spcAft>
-            </a:pPr>
-            <a:r>
-              <a:rPr sz="1300" b="0">
+            <a:off x="7013448" y="1298448"/>
+            <a:ext cx="4663440" cy="411480"/>
+          </a:xfrm>
+          <a:prstGeom prst="rect">
+            <a:avLst/>
+          </a:prstGeom>
+          <a:noFill/>
+        </p:spPr>
+        <p:txBody>
+          <a:bodyPr wrap="square">
+            <a:spAutoFit/>
+          </a:bodyPr>
+          <a:lstStyle/>
+          <a:p>
+            <a:pPr algn="l"/>
+            <a:r>
+              <a:rPr sz="1500" b="1" i="0">
+                <a:solidFill>
+                  <a:srgbClr val="0F172A"/>
+                </a:solidFill>
+              </a:rPr>
+              <a:t>Set a model name</a:t>
+            </a:r>
+          </a:p>
+        </p:txBody>
+      </p:sp>
+      <p:sp>
+        <p:nvSpPr>
+          <p:cNvPr id="12" name="TextBox 11"/>
+          <p:cNvSpPr txBox="1"/>
+          <p:nvPr/>
+        </p:nvSpPr>
+        <p:spPr>
+          <a:xfrm>
+            <a:off x="7013448" y="1737360"/>
+            <a:ext cx="4663440" cy="914400"/>
+          </a:xfrm>
+          <a:prstGeom prst="rect">
+            <a:avLst/>
+          </a:prstGeom>
+          <a:noFill/>
+        </p:spPr>
+        <p:txBody>
+          <a:bodyPr wrap="square">
+            <a:spAutoFit/>
+          </a:bodyPr>
+          <a:lstStyle/>
+          <a:p>
+            <a:pPr algn="l"/>
+            <a:r>
+              <a:rPr sz="1300" b="0" i="0">
                 <a:solidFill>
                   <a:srgbClr val="334155"/>
                 </a:solidFill>
               </a:rPr>
-              <a:t>Styling by registry creates a trap, and the tool closes it on the way out.</a:t>
-            </a:r>
-          </a:p>
-        </p:txBody>
-      </p:sp>
-      <p:sp>
-        <p:nvSpPr>
-          <p:cNvPr id="12" name="TextBox 11"/>
-          <p:cNvSpPr txBox="1"/>
-          <p:nvPr/>
-        </p:nvSpPr>
-        <p:spPr>
-          <a:xfrm>
-            <a:off x="6309360" y="2468880"/>
-            <a:ext cx="5303520" cy="3657600"/>
-          </a:xfrm>
-          <a:prstGeom prst="rect">
-            <a:avLst/>
-          </a:prstGeom>
-          <a:noFill/>
-        </p:spPr>
-        <p:txBody>
-          <a:bodyPr wrap="square">
-            <a:spAutoFit/>
-          </a:bodyPr>
-          <a:lstStyle/>
-          <a:p>
-            <a:pPr>
-              <a:spcAft>
-                <a:spcPts val="600"/>
-              </a:spcAft>
-            </a:pPr>
-            <a:r>
-              <a:rPr sz="1300" b="0">
+              <a:t>Type a name in the Model Name field at the top of the sidebar.
+This becomes the filename for all exports.</a:t>
+            </a:r>
+          </a:p>
+        </p:txBody>
+      </p:sp>
+      <p:sp>
+        <p:nvSpPr>
+          <p:cNvPr id="13" name="Rectangle 12"/>
+          <p:cNvSpPr/>
+          <p:nvPr/>
+        </p:nvSpPr>
+        <p:spPr>
+          <a:xfrm>
+            <a:off x="365760" y="2971800"/>
+            <a:ext cx="5577840" cy="1645920"/>
+          </a:xfrm>
+          <a:prstGeom prst="rect">
+            <a:avLst/>
+          </a:prstGeom>
+          <a:solidFill>
+            <a:srgbClr val="FFFFFF"/>
+          </a:solidFill>
+          <a:ln>
+            <a:noFill/>
+          </a:ln>
+        </p:spPr>
+        <p:style>
+          <a:lnRef idx="1">
+            <a:schemeClr val="accent1"/>
+          </a:lnRef>
+          <a:fillRef idx="3">
+            <a:schemeClr val="accent1"/>
+          </a:fillRef>
+          <a:effectRef idx="2">
+            <a:schemeClr val="accent1"/>
+          </a:effectRef>
+          <a:fontRef idx="minor">
+            <a:schemeClr val="lt1"/>
+          </a:fontRef>
+        </p:style>
+        <p:txBody>
+          <a:bodyPr rtlCol="0" anchor="ctr"/>
+          <a:lstStyle/>
+          <a:p>
+            <a:pPr algn="ctr"/>
+          </a:p>
+        </p:txBody>
+      </p:sp>
+      <p:sp>
+        <p:nvSpPr>
+          <p:cNvPr id="14" name="Rectangle 13"/>
+          <p:cNvSpPr/>
+          <p:nvPr/>
+        </p:nvSpPr>
+        <p:spPr>
+          <a:xfrm>
+            <a:off x="502920" y="3108960"/>
+            <a:ext cx="502920" cy="502920"/>
+          </a:xfrm>
+          <a:prstGeom prst="rect">
+            <a:avLst/>
+          </a:prstGeom>
+          <a:solidFill>
+            <a:srgbClr val="0F766E"/>
+          </a:solidFill>
+          <a:ln>
+            <a:noFill/>
+          </a:ln>
+        </p:spPr>
+        <p:style>
+          <a:lnRef idx="1">
+            <a:schemeClr val="accent1"/>
+          </a:lnRef>
+          <a:fillRef idx="3">
+            <a:schemeClr val="accent1"/>
+          </a:fillRef>
+          <a:effectRef idx="2">
+            <a:schemeClr val="accent1"/>
+          </a:effectRef>
+          <a:fontRef idx="minor">
+            <a:schemeClr val="lt1"/>
+          </a:fontRef>
+        </p:style>
+        <p:txBody>
+          <a:bodyPr rtlCol="0" anchor="ctr"/>
+          <a:lstStyle/>
+          <a:p>
+            <a:pPr algn="ctr"/>
+            <a:r>
+              <a:rPr sz="1600" b="1">
+                <a:solidFill>
+                  <a:srgbClr val="FFFFFF"/>
+                </a:solidFill>
+              </a:rPr>
+              <a:t>3</a:t>
+            </a:r>
+          </a:p>
+        </p:txBody>
+      </p:sp>
+      <p:sp>
+        <p:nvSpPr>
+          <p:cNvPr id="15" name="TextBox 14"/>
+          <p:cNvSpPr txBox="1"/>
+          <p:nvPr/>
+        </p:nvSpPr>
+        <p:spPr>
+          <a:xfrm>
+            <a:off x="1115568" y="3081528"/>
+            <a:ext cx="4663440" cy="411480"/>
+          </a:xfrm>
+          <a:prstGeom prst="rect">
+            <a:avLst/>
+          </a:prstGeom>
+          <a:noFill/>
+        </p:spPr>
+        <p:txBody>
+          <a:bodyPr wrap="square">
+            <a:spAutoFit/>
+          </a:bodyPr>
+          <a:lstStyle/>
+          <a:p>
+            <a:pPr algn="l"/>
+            <a:r>
+              <a:rPr sz="1500" b="1" i="0">
                 <a:solidFill>
                   <a:srgbClr val="0F172A"/>
                 </a:solidFill>
               </a:rPr>
-              <a:t>• An element following a row needs no colour of its own to draw correctly</a:t>
-            </a:r>
-          </a:p>
-          <a:p>
-            <a:pPr>
-              <a:spcAft>
-                <a:spcPts val="600"/>
-              </a:spcAft>
-            </a:pPr>
-            <a:r>
-              <a:rPr sz="1300" b="0">
+              <a:t>Place nodes</a:t>
+            </a:r>
+          </a:p>
+        </p:txBody>
+      </p:sp>
+      <p:sp>
+        <p:nvSpPr>
+          <p:cNvPr id="16" name="TextBox 15"/>
+          <p:cNvSpPr txBox="1"/>
+          <p:nvPr/>
+        </p:nvSpPr>
+        <p:spPr>
+          <a:xfrm>
+            <a:off x="1115568" y="3520440"/>
+            <a:ext cx="4663440" cy="914400"/>
+          </a:xfrm>
+          <a:prstGeom prst="rect">
+            <a:avLst/>
+          </a:prstGeom>
+          <a:noFill/>
+        </p:spPr>
+        <p:txBody>
+          <a:bodyPr wrap="square">
+            <a:spAutoFit/>
+          </a:bodyPr>
+          <a:lstStyle/>
+          <a:p>
+            <a:pPr algn="l"/>
+            <a:r>
+              <a:rPr sz="1300" b="0" i="0">
+                <a:solidFill>
+                  <a:srgbClr val="334155"/>
+                </a:solidFill>
+              </a:rPr>
+              <a:t>Click + Node, then click the canvas to place it.
+Double-tap to type a label. Press n for sticky Node mode.</a:t>
+            </a:r>
+          </a:p>
+        </p:txBody>
+      </p:sp>
+      <p:sp>
+        <p:nvSpPr>
+          <p:cNvPr id="17" name="Rectangle 16"/>
+          <p:cNvSpPr/>
+          <p:nvPr/>
+        </p:nvSpPr>
+        <p:spPr>
+          <a:xfrm>
+            <a:off x="6263640" y="2971800"/>
+            <a:ext cx="5577840" cy="1645920"/>
+          </a:xfrm>
+          <a:prstGeom prst="rect">
+            <a:avLst/>
+          </a:prstGeom>
+          <a:solidFill>
+            <a:srgbClr val="FFFFFF"/>
+          </a:solidFill>
+          <a:ln>
+            <a:noFill/>
+          </a:ln>
+        </p:spPr>
+        <p:style>
+          <a:lnRef idx="1">
+            <a:schemeClr val="accent1"/>
+          </a:lnRef>
+          <a:fillRef idx="3">
+            <a:schemeClr val="accent1"/>
+          </a:fillRef>
+          <a:effectRef idx="2">
+            <a:schemeClr val="accent1"/>
+          </a:effectRef>
+          <a:fontRef idx="minor">
+            <a:schemeClr val="lt1"/>
+          </a:fontRef>
+        </p:style>
+        <p:txBody>
+          <a:bodyPr rtlCol="0" anchor="ctr"/>
+          <a:lstStyle/>
+          <a:p>
+            <a:pPr algn="ctr"/>
+          </a:p>
+        </p:txBody>
+      </p:sp>
+      <p:sp>
+        <p:nvSpPr>
+          <p:cNvPr id="18" name="Rectangle 17"/>
+          <p:cNvSpPr/>
+          <p:nvPr/>
+        </p:nvSpPr>
+        <p:spPr>
+          <a:xfrm>
+            <a:off x="6400800" y="3108960"/>
+            <a:ext cx="502920" cy="502920"/>
+          </a:xfrm>
+          <a:prstGeom prst="rect">
+            <a:avLst/>
+          </a:prstGeom>
+          <a:solidFill>
+            <a:srgbClr val="0F766E"/>
+          </a:solidFill>
+          <a:ln>
+            <a:noFill/>
+          </a:ln>
+        </p:spPr>
+        <p:style>
+          <a:lnRef idx="1">
+            <a:schemeClr val="accent1"/>
+          </a:lnRef>
+          <a:fillRef idx="3">
+            <a:schemeClr val="accent1"/>
+          </a:fillRef>
+          <a:effectRef idx="2">
+            <a:schemeClr val="accent1"/>
+          </a:effectRef>
+          <a:fontRef idx="minor">
+            <a:schemeClr val="lt1"/>
+          </a:fontRef>
+        </p:style>
+        <p:txBody>
+          <a:bodyPr rtlCol="0" anchor="ctr"/>
+          <a:lstStyle/>
+          <a:p>
+            <a:pPr algn="ctr"/>
+            <a:r>
+              <a:rPr sz="1600" b="1">
+                <a:solidFill>
+                  <a:srgbClr val="FFFFFF"/>
+                </a:solidFill>
+              </a:rPr>
+              <a:t>4</a:t>
+            </a:r>
+          </a:p>
+        </p:txBody>
+      </p:sp>
+      <p:sp>
+        <p:nvSpPr>
+          <p:cNvPr id="19" name="TextBox 18"/>
+          <p:cNvSpPr txBox="1"/>
+          <p:nvPr/>
+        </p:nvSpPr>
+        <p:spPr>
+          <a:xfrm>
+            <a:off x="7013448" y="3081528"/>
+            <a:ext cx="4663440" cy="411480"/>
+          </a:xfrm>
+          <a:prstGeom prst="rect">
+            <a:avLst/>
+          </a:prstGeom>
+          <a:noFill/>
+        </p:spPr>
+        <p:txBody>
+          <a:bodyPr wrap="square">
+            <a:spAutoFit/>
+          </a:bodyPr>
+          <a:lstStyle/>
+          <a:p>
+            <a:pPr algn="l"/>
+            <a:r>
+              <a:rPr sz="1500" b="1" i="0">
                 <a:solidFill>
                   <a:srgbClr val="0F172A"/>
                 </a:solidFill>
               </a:rPr>
-              <a:t>• So a saved file can be perfectly right on screen and look entirely unstyled to anything that is not this tool — a database projection, a converter, an AI assistant reading it, a person scanning the JSON</a:t>
-            </a:r>
-          </a:p>
-          <a:p>
-            <a:pPr>
-              <a:spcAft>
-                <a:spcPts val="600"/>
-              </a:spcAft>
-            </a:pPr>
-            <a:r>
-              <a:rPr sz="1300" b="0">
+              <a:t>Draw edges</a:t>
+            </a:r>
+          </a:p>
+        </p:txBody>
+      </p:sp>
+      <p:sp>
+        <p:nvSpPr>
+          <p:cNvPr id="20" name="TextBox 19"/>
+          <p:cNvSpPr txBox="1"/>
+          <p:nvPr/>
+        </p:nvSpPr>
+        <p:spPr>
+          <a:xfrm>
+            <a:off x="7013448" y="3520440"/>
+            <a:ext cx="4663440" cy="914400"/>
+          </a:xfrm>
+          <a:prstGeom prst="rect">
+            <a:avLst/>
+          </a:prstGeom>
+          <a:noFill/>
+        </p:spPr>
+        <p:txBody>
+          <a:bodyPr wrap="square">
+            <a:spAutoFit/>
+          </a:bodyPr>
+          <a:lstStyle/>
+          <a:p>
+            <a:pPr algn="l"/>
+            <a:r>
+              <a:rPr sz="1300" b="0" i="0">
+                <a:solidFill>
+                  <a:srgbClr val="334155"/>
+                </a:solidFill>
+              </a:rPr>
+              <a:t>Click + Edge, then drag from source to target.
+Press e for sticky Edge mode to chain many edges quickly.</a:t>
+            </a:r>
+          </a:p>
+        </p:txBody>
+      </p:sp>
+      <p:sp>
+        <p:nvSpPr>
+          <p:cNvPr id="21" name="Rectangle 20"/>
+          <p:cNvSpPr/>
+          <p:nvPr/>
+        </p:nvSpPr>
+        <p:spPr>
+          <a:xfrm>
+            <a:off x="365760" y="4754880"/>
+            <a:ext cx="5577840" cy="1645920"/>
+          </a:xfrm>
+          <a:prstGeom prst="rect">
+            <a:avLst/>
+          </a:prstGeom>
+          <a:solidFill>
+            <a:srgbClr val="FFFFFF"/>
+          </a:solidFill>
+          <a:ln>
+            <a:noFill/>
+          </a:ln>
+        </p:spPr>
+        <p:style>
+          <a:lnRef idx="1">
+            <a:schemeClr val="accent1"/>
+          </a:lnRef>
+          <a:fillRef idx="3">
+            <a:schemeClr val="accent1"/>
+          </a:fillRef>
+          <a:effectRef idx="2">
+            <a:schemeClr val="accent1"/>
+          </a:effectRef>
+          <a:fontRef idx="minor">
+            <a:schemeClr val="lt1"/>
+          </a:fontRef>
+        </p:style>
+        <p:txBody>
+          <a:bodyPr rtlCol="0" anchor="ctr"/>
+          <a:lstStyle/>
+          <a:p>
+            <a:pPr algn="ctr"/>
+          </a:p>
+        </p:txBody>
+      </p:sp>
+      <p:sp>
+        <p:nvSpPr>
+          <p:cNvPr id="22" name="Rectangle 21"/>
+          <p:cNvSpPr/>
+          <p:nvPr/>
+        </p:nvSpPr>
+        <p:spPr>
+          <a:xfrm>
+            <a:off x="502920" y="4892040"/>
+            <a:ext cx="502920" cy="502920"/>
+          </a:xfrm>
+          <a:prstGeom prst="rect">
+            <a:avLst/>
+          </a:prstGeom>
+          <a:solidFill>
+            <a:srgbClr val="0F766E"/>
+          </a:solidFill>
+          <a:ln>
+            <a:noFill/>
+          </a:ln>
+        </p:spPr>
+        <p:style>
+          <a:lnRef idx="1">
+            <a:schemeClr val="accent1"/>
+          </a:lnRef>
+          <a:fillRef idx="3">
+            <a:schemeClr val="accent1"/>
+          </a:fillRef>
+          <a:effectRef idx="2">
+            <a:schemeClr val="accent1"/>
+          </a:effectRef>
+          <a:fontRef idx="minor">
+            <a:schemeClr val="lt1"/>
+          </a:fontRef>
+        </p:style>
+        <p:txBody>
+          <a:bodyPr rtlCol="0" anchor="ctr"/>
+          <a:lstStyle/>
+          <a:p>
+            <a:pPr algn="ctr"/>
+            <a:r>
+              <a:rPr sz="1600" b="1">
+                <a:solidFill>
+                  <a:srgbClr val="FFFFFF"/>
+                </a:solidFill>
+              </a:rPr>
+              <a:t>5</a:t>
+            </a:r>
+          </a:p>
+        </p:txBody>
+      </p:sp>
+      <p:sp>
+        <p:nvSpPr>
+          <p:cNvPr id="23" name="TextBox 22"/>
+          <p:cNvSpPr txBox="1"/>
+          <p:nvPr/>
+        </p:nvSpPr>
+        <p:spPr>
+          <a:xfrm>
+            <a:off x="1115568" y="4864608"/>
+            <a:ext cx="4663440" cy="411480"/>
+          </a:xfrm>
+          <a:prstGeom prst="rect">
+            <a:avLst/>
+          </a:prstGeom>
+          <a:noFill/>
+        </p:spPr>
+        <p:txBody>
+          <a:bodyPr wrap="square">
+            <a:spAutoFit/>
+          </a:bodyPr>
+          <a:lstStyle/>
+          <a:p>
+            <a:pPr algn="l"/>
+            <a:r>
+              <a:rPr sz="1500" b="1" i="0">
                 <a:solidFill>
                   <a:srgbClr val="0F172A"/>
                 </a:solidFill>
               </a:rPr>
-              <a:t>• On export the tool stamps each element’s resolved appearance alongside the row it follows, so the file says what you saw</a:t>
-            </a:r>
-          </a:p>
-          <a:p>
-            <a:pPr>
-              <a:spcAft>
-                <a:spcPts val="600"/>
-              </a:spcAft>
-            </a:pPr>
-            <a:r>
-              <a:rPr sz="1300" b="0">
+              <a:t>Choose a mode</a:t>
+            </a:r>
+          </a:p>
+        </p:txBody>
+      </p:sp>
+      <p:sp>
+        <p:nvSpPr>
+          <p:cNvPr id="24" name="TextBox 23"/>
+          <p:cNvSpPr txBox="1"/>
+          <p:nvPr/>
+        </p:nvSpPr>
+        <p:spPr>
+          <a:xfrm>
+            <a:off x="1115568" y="5303520"/>
+            <a:ext cx="4663440" cy="914400"/>
+          </a:xfrm>
+          <a:prstGeom prst="rect">
+            <a:avLst/>
+          </a:prstGeom>
+          <a:noFill/>
+        </p:spPr>
+        <p:txBody>
+          <a:bodyPr wrap="square">
+            <a:spAutoFit/>
+          </a:bodyPr>
+          <a:lstStyle/>
+          <a:p>
+            <a:pPr algn="l"/>
+            <a:r>
+              <a:rPr sz="1300" b="0" i="0">
+                <a:solidFill>
+                  <a:srgbClr val="334155"/>
+                </a:solidFill>
+              </a:rPr>
+              <a:t>Click CLD for feedback loop analysis, OPM for typed relationships,
+NRM for risk mapping, or EIP for domain overlay.</a:t>
+            </a:r>
+          </a:p>
+        </p:txBody>
+      </p:sp>
+      <p:sp>
+        <p:nvSpPr>
+          <p:cNvPr id="25" name="Rectangle 24"/>
+          <p:cNvSpPr/>
+          <p:nvPr/>
+        </p:nvSpPr>
+        <p:spPr>
+          <a:xfrm>
+            <a:off x="6263640" y="4754880"/>
+            <a:ext cx="5577840" cy="1645920"/>
+          </a:xfrm>
+          <a:prstGeom prst="rect">
+            <a:avLst/>
+          </a:prstGeom>
+          <a:solidFill>
+            <a:srgbClr val="FFFFFF"/>
+          </a:solidFill>
+          <a:ln>
+            <a:noFill/>
+          </a:ln>
+        </p:spPr>
+        <p:style>
+          <a:lnRef idx="1">
+            <a:schemeClr val="accent1"/>
+          </a:lnRef>
+          <a:fillRef idx="3">
+            <a:schemeClr val="accent1"/>
+          </a:fillRef>
+          <a:effectRef idx="2">
+            <a:schemeClr val="accent1"/>
+          </a:effectRef>
+          <a:fontRef idx="minor">
+            <a:schemeClr val="lt1"/>
+          </a:fontRef>
+        </p:style>
+        <p:txBody>
+          <a:bodyPr rtlCol="0" anchor="ctr"/>
+          <a:lstStyle/>
+          <a:p>
+            <a:pPr algn="ctr"/>
+          </a:p>
+        </p:txBody>
+      </p:sp>
+      <p:sp>
+        <p:nvSpPr>
+          <p:cNvPr id="26" name="Rectangle 25"/>
+          <p:cNvSpPr/>
+          <p:nvPr/>
+        </p:nvSpPr>
+        <p:spPr>
+          <a:xfrm>
+            <a:off x="6400800" y="4892040"/>
+            <a:ext cx="502920" cy="502920"/>
+          </a:xfrm>
+          <a:prstGeom prst="rect">
+            <a:avLst/>
+          </a:prstGeom>
+          <a:solidFill>
+            <a:srgbClr val="0F766E"/>
+          </a:solidFill>
+          <a:ln>
+            <a:noFill/>
+          </a:ln>
+        </p:spPr>
+        <p:style>
+          <a:lnRef idx="1">
+            <a:schemeClr val="accent1"/>
+          </a:lnRef>
+          <a:fillRef idx="3">
+            <a:schemeClr val="accent1"/>
+          </a:fillRef>
+          <a:effectRef idx="2">
+            <a:schemeClr val="accent1"/>
+          </a:effectRef>
+          <a:fontRef idx="minor">
+            <a:schemeClr val="lt1"/>
+          </a:fontRef>
+        </p:style>
+        <p:txBody>
+          <a:bodyPr rtlCol="0" anchor="ctr"/>
+          <a:lstStyle/>
+          <a:p>
+            <a:pPr algn="ctr"/>
+            <a:r>
+              <a:rPr sz="1600" b="1">
+                <a:solidFill>
+                  <a:srgbClr val="FFFFFF"/>
+                </a:solidFill>
+              </a:rPr>
+              <a:t>6</a:t>
+            </a:r>
+          </a:p>
+        </p:txBody>
+      </p:sp>
+      <p:sp>
+        <p:nvSpPr>
+          <p:cNvPr id="27" name="TextBox 26"/>
+          <p:cNvSpPr txBox="1"/>
+          <p:nvPr/>
+        </p:nvSpPr>
+        <p:spPr>
+          <a:xfrm>
+            <a:off x="7013448" y="4864608"/>
+            <a:ext cx="4663440" cy="411480"/>
+          </a:xfrm>
+          <a:prstGeom prst="rect">
+            <a:avLst/>
+          </a:prstGeom>
+          <a:noFill/>
+        </p:spPr>
+        <p:txBody>
+          <a:bodyPr wrap="square">
+            <a:spAutoFit/>
+          </a:bodyPr>
+          <a:lstStyle/>
+          <a:p>
+            <a:pPr algn="l"/>
+            <a:r>
+              <a:rPr sz="1500" b="1" i="0">
                 <a:solidFill>
                   <a:srgbClr val="0F172A"/>
                 </a:solidFill>
               </a:rPr>
-              <a:t>• It also settles a contradiction: loading writes dash = solid onto every edge, so a dashed row drew dashed while the file claimed solid</a:t>
-            </a:r>
-          </a:p>
-          <a:p>
-            <a:pPr>
-              <a:spcAft>
-                <a:spcPts val="600"/>
-              </a:spcAft>
-            </a:pPr>
-            <a:r>
-              <a:rPr sz="1300" b="0">
-                <a:solidFill>
-                  <a:srgbClr val="0F172A"/>
-                </a:solidFill>
-              </a:rPr>
-              <a:t>• The row still wins on reload — the legend stays the single place to restyle</a:t>
+              <a:t>Export</a:t>
+            </a:r>
+          </a:p>
+        </p:txBody>
+      </p:sp>
+      <p:sp>
+        <p:nvSpPr>
+          <p:cNvPr id="28" name="TextBox 27"/>
+          <p:cNvSpPr txBox="1"/>
+          <p:nvPr/>
+        </p:nvSpPr>
+        <p:spPr>
+          <a:xfrm>
+            <a:off x="7013448" y="5303520"/>
+            <a:ext cx="4663440" cy="914400"/>
+          </a:xfrm>
+          <a:prstGeom prst="rect">
+            <a:avLst/>
+          </a:prstGeom>
+          <a:noFill/>
+        </p:spPr>
+        <p:txBody>
+          <a:bodyPr wrap="square">
+            <a:spAutoFit/>
+          </a:bodyPr>
+          <a:lstStyle/>
+          <a:p>
+            <a:pPr algn="l"/>
+            <a:r>
+              <a:rPr sz="1300" b="0" i="0">
+                <a:solidFill>
+                  <a:srgbClr val="334155"/>
+                </a:solidFill>
+              </a:rPr>
+              <a:t>Export JSON to save. SVG/PNG for presentation.
+Press P to present the graph itself, full screen.
+URL to share as a link. Snapshot to share as a single file.
+OPM→OPL for plain-text documentation.</a:t>
+            </a:r>
+          </a:p>
+        </p:txBody>
+      </p:sp>
+    </p:spTree>
+  </p:cSld>
+  <p:clrMapOvr>
+    <a:masterClrMapping/>
+  </p:clrMapOvr>
+</p:sld>
+</file>
+
+<file path=ppt/slides/slide17.xml><?xml version="1.0" encoding="utf-8"?>
+<p:sld xmlns:a="http://schemas.openxmlformats.org/drawingml/2006/main" xmlns:p="http://schemas.openxmlformats.org/presentationml/2006/main" xmlns:r="http://schemas.openxmlformats.org/officeDocument/2006/relationships">
+  <p:cSld>
+    <p:spTree>
+      <p:nvGrpSpPr>
+        <p:cNvPr id="1" name=""/>
+        <p:cNvGrpSpPr/>
+        <p:nvPr/>
+      </p:nvGrpSpPr>
+      <p:grpSpPr/>
+      <p:sp>
+        <p:nvSpPr>
+          <p:cNvPr id="2" name="Rectangle 1"/>
+          <p:cNvSpPr/>
+          <p:nvPr/>
+        </p:nvSpPr>
+        <p:spPr>
+          <a:xfrm>
+            <a:off x="0" y="0"/>
+            <a:ext cx="12188952" cy="6858000"/>
+          </a:xfrm>
+          <a:prstGeom prst="rect">
+            <a:avLst/>
+          </a:prstGeom>
+          <a:solidFill>
+            <a:srgbClr val="0F172A"/>
+          </a:solidFill>
+          <a:ln>
+            <a:noFill/>
+          </a:ln>
+        </p:spPr>
+        <p:style>
+          <a:lnRef idx="1">
+            <a:schemeClr val="accent1"/>
+          </a:lnRef>
+          <a:fillRef idx="3">
+            <a:schemeClr val="accent1"/>
+          </a:fillRef>
+          <a:effectRef idx="2">
+            <a:schemeClr val="accent1"/>
+          </a:effectRef>
+          <a:fontRef idx="minor">
+            <a:schemeClr val="lt1"/>
+          </a:fontRef>
+        </p:style>
+        <p:txBody>
+          <a:bodyPr rtlCol="0" anchor="ctr"/>
+          <a:lstStyle/>
+          <a:p>
+            <a:pPr algn="ctr"/>
+          </a:p>
+        </p:txBody>
+      </p:sp>
+      <p:sp>
+        <p:nvSpPr>
+          <p:cNvPr id="3" name="Rectangle 2"/>
+          <p:cNvSpPr/>
+          <p:nvPr/>
+        </p:nvSpPr>
+        <p:spPr>
+          <a:xfrm>
+            <a:off x="0" y="5303520"/>
+            <a:ext cx="12188952" cy="73152"/>
+          </a:xfrm>
+          <a:prstGeom prst="rect">
+            <a:avLst/>
+          </a:prstGeom>
+          <a:solidFill>
+            <a:srgbClr val="0F766E"/>
+          </a:solidFill>
+          <a:ln>
+            <a:noFill/>
+          </a:ln>
+        </p:spPr>
+        <p:style>
+          <a:lnRef idx="1">
+            <a:schemeClr val="accent1"/>
+          </a:lnRef>
+          <a:fillRef idx="3">
+            <a:schemeClr val="accent1"/>
+          </a:fillRef>
+          <a:effectRef idx="2">
+            <a:schemeClr val="accent1"/>
+          </a:effectRef>
+          <a:fontRef idx="minor">
+            <a:schemeClr val="lt1"/>
+          </a:fontRef>
+        </p:style>
+        <p:txBody>
+          <a:bodyPr rtlCol="0" anchor="ctr"/>
+          <a:lstStyle/>
+          <a:p>
+            <a:pPr algn="ctr"/>
+          </a:p>
+        </p:txBody>
+      </p:sp>
+      <p:sp>
+        <p:nvSpPr>
+          <p:cNvPr id="4" name="TextBox 3"/>
+          <p:cNvSpPr txBox="1"/>
+          <p:nvPr/>
+        </p:nvSpPr>
+        <p:spPr>
+          <a:xfrm>
+            <a:off x="640080" y="1371600"/>
+            <a:ext cx="10881360" cy="822960"/>
+          </a:xfrm>
+          <a:prstGeom prst="rect">
+            <a:avLst/>
+          </a:prstGeom>
+          <a:noFill/>
+        </p:spPr>
+        <p:txBody>
+          <a:bodyPr wrap="square">
+            <a:spAutoFit/>
+          </a:bodyPr>
+          <a:lstStyle/>
+          <a:p>
+            <a:pPr algn="ctr"/>
+            <a:r>
+              <a:rPr sz="4200" b="1" i="0">
+                <a:solidFill>
+                  <a:srgbClr val="FFFFFF"/>
+                </a:solidFill>
+              </a:rPr>
+              <a:t>Free. Open source. One file.</a:t>
+            </a:r>
+          </a:p>
+        </p:txBody>
+      </p:sp>
+      <p:sp>
+        <p:nvSpPr>
+          <p:cNvPr id="5" name="TextBox 4"/>
+          <p:cNvSpPr txBox="1"/>
+          <p:nvPr/>
+        </p:nvSpPr>
+        <p:spPr>
+          <a:xfrm>
+            <a:off x="640080" y="2423160"/>
+            <a:ext cx="10881360" cy="1645920"/>
+          </a:xfrm>
+          <a:prstGeom prst="rect">
+            <a:avLst/>
+          </a:prstGeom>
+          <a:noFill/>
+        </p:spPr>
+        <p:txBody>
+          <a:bodyPr wrap="square">
+            <a:spAutoFit/>
+          </a:bodyPr>
+          <a:lstStyle/>
+          <a:p>
+            <a:pPr algn="ctr"/>
+            <a:r>
+              <a:rPr sz="1700" b="0" i="0">
+                <a:solidFill>
+                  <a:srgbClr val="CBD5E1"/>
+                </a:solidFill>
+              </a:rPr>
+              <a:t>The RCN Graph Tool is the only free, browser-based tool that combines
+Neo4j data modeling · Causal Loop Diagrams · OPM typed relationships · OPL export
+Tripod Beta risk analysis · EIP overlay · Wardley mapping and rent bands · Pathway animation
+— all in a single HTML file, on the same graph.</a:t>
+            </a:r>
+          </a:p>
+        </p:txBody>
+      </p:sp>
+      <p:sp>
+        <p:nvSpPr>
+          <p:cNvPr id="6" name="TextBox 5"/>
+          <p:cNvSpPr txBox="1"/>
+          <p:nvPr/>
+        </p:nvSpPr>
+        <p:spPr>
+          <a:xfrm>
+            <a:off x="640080" y="4343400"/>
+            <a:ext cx="10881360" cy="457200"/>
+          </a:xfrm>
+          <a:prstGeom prst="rect">
+            <a:avLst/>
+          </a:prstGeom>
+          <a:noFill/>
+        </p:spPr>
+        <p:txBody>
+          <a:bodyPr wrap="square">
+            <a:spAutoFit/>
+          </a:bodyPr>
+          <a:lstStyle/>
+          <a:p>
+            <a:pPr algn="ctr"/>
+            <a:r>
+              <a:rPr sz="1400" b="0" i="0">
+                <a:solidFill>
+                  <a:srgbClr val="0F766E"/>
+                </a:solidFill>
+              </a:rPr>
+              <a:t>graph-tool-v22.html  ·  Introduction: graph-tool-intro.html  ·  Manual: graph-tool-manual.html</a:t>
+            </a:r>
+          </a:p>
+        </p:txBody>
+      </p:sp>
+      <p:sp>
+        <p:nvSpPr>
+          <p:cNvPr id="7" name="TextBox 6"/>
+          <p:cNvSpPr txBox="1"/>
+          <p:nvPr/>
+        </p:nvSpPr>
+        <p:spPr>
+          <a:xfrm>
+            <a:off x="640080" y="5577840"/>
+            <a:ext cx="10881360" cy="457200"/>
+          </a:xfrm>
+          <a:prstGeom prst="rect">
+            <a:avLst/>
+          </a:prstGeom>
+          <a:noFill/>
+        </p:spPr>
+        <p:txBody>
+          <a:bodyPr wrap="square">
+            <a:spAutoFit/>
+          </a:bodyPr>
+          <a:lstStyle/>
+          <a:p>
+            <a:pPr algn="ctr"/>
+            <a:r>
+              <a:rPr sz="1300" b="0" i="0">
+                <a:solidFill>
+                  <a:srgbClr val="94A3B8"/>
+                </a:solidFill>
+              </a:rPr>
+              <a:t>ReLocalize Creativity Network  ·  Open source  ·  Free by design</a:t>
             </a:r>
           </a:p>
         </p:txBody>
@@ -7773,7 +9921,7 @@
                   <a:srgbClr val="FFFFFF"/>
                 </a:solidFill>
               </a:rPr>
-              <a:t>Eight analytical modes — one graph</a:t>
+              <a:t>Analytical modes — one graph</a:t>
             </a:r>
           </a:p>
         </p:txBody>
@@ -7786,8 +9934,8 @@
         </p:nvSpPr>
         <p:spPr>
           <a:xfrm>
-            <a:off x="457200" y="1188720"/>
-            <a:ext cx="5486400" cy="1188720"/>
+            <a:off x="457200" y="1143000"/>
+            <a:ext cx="5486400" cy="987552"/>
           </a:xfrm>
           <a:prstGeom prst="rect">
             <a:avLst/>
@@ -7829,8 +9977,8 @@
         </p:nvSpPr>
         <p:spPr>
           <a:xfrm>
-            <a:off x="621792" y="1261872"/>
-            <a:ext cx="1371600" cy="457200"/>
+            <a:off x="621792" y="1179576"/>
+            <a:ext cx="1371600" cy="411480"/>
           </a:xfrm>
           <a:prstGeom prst="rect">
             <a:avLst/>
@@ -7845,7 +9993,7 @@
           <a:p>
             <a:pPr algn="l"/>
             <a:r>
-              <a:rPr sz="1500" b="1" i="0">
+              <a:rPr sz="1400" b="1" i="0">
                 <a:solidFill>
                   <a:srgbClr val="475569"/>
                 </a:solidFill>
@@ -7863,8 +10011,8 @@
         </p:nvSpPr>
         <p:spPr>
           <a:xfrm>
-            <a:off x="621792" y="1664208"/>
-            <a:ext cx="5120640" cy="594360"/>
+            <a:off x="621792" y="1545336"/>
+            <a:ext cx="5120640" cy="548640"/>
           </a:xfrm>
           <a:prstGeom prst="rect">
             <a:avLst/>
@@ -7879,7 +10027,7 @@
           <a:p>
             <a:pPr algn="l"/>
             <a:r>
-              <a:rPr sz="1300" b="0" i="0">
+              <a:rPr sz="1200" b="0" i="0">
                 <a:solidFill>
                   <a:srgbClr val="334155"/>
                 </a:solidFill>
@@ -7897,8 +10045,8 @@
         </p:nvSpPr>
         <p:spPr>
           <a:xfrm>
-            <a:off x="6309360" y="1188720"/>
-            <a:ext cx="5486400" cy="1188720"/>
+            <a:off x="6309360" y="1143000"/>
+            <a:ext cx="5486400" cy="987552"/>
           </a:xfrm>
           <a:prstGeom prst="rect">
             <a:avLst/>
@@ -7940,8 +10088,8 @@
         </p:nvSpPr>
         <p:spPr>
           <a:xfrm>
-            <a:off x="6473952" y="1261872"/>
-            <a:ext cx="1371600" cy="457200"/>
+            <a:off x="6473952" y="1179576"/>
+            <a:ext cx="1371600" cy="411480"/>
           </a:xfrm>
           <a:prstGeom prst="rect">
             <a:avLst/>
@@ -7956,7 +10104,7 @@
           <a:p>
             <a:pPr algn="l"/>
             <a:r>
-              <a:rPr sz="1500" b="1" i="0">
+              <a:rPr sz="1400" b="1" i="0">
                 <a:solidFill>
                   <a:srgbClr val="6B21A8"/>
                 </a:solidFill>
@@ -7974,8 +10122,8 @@
         </p:nvSpPr>
         <p:spPr>
           <a:xfrm>
-            <a:off x="6473952" y="1664208"/>
-            <a:ext cx="5120640" cy="594360"/>
+            <a:off x="6473952" y="1545336"/>
+            <a:ext cx="5120640" cy="548640"/>
           </a:xfrm>
           <a:prstGeom prst="rect">
             <a:avLst/>
@@ -7990,7 +10138,7 @@
           <a:p>
             <a:pPr algn="l"/>
             <a:r>
-              <a:rPr sz="1300" b="0" i="0">
+              <a:rPr sz="1200" b="0" i="0">
                 <a:solidFill>
                   <a:srgbClr val="334155"/>
                 </a:solidFill>
@@ -8008,8 +10156,8 @@
         </p:nvSpPr>
         <p:spPr>
           <a:xfrm>
-            <a:off x="457200" y="2542032"/>
-            <a:ext cx="5486400" cy="1188720"/>
+            <a:off x="457200" y="2258568"/>
+            <a:ext cx="5486400" cy="987552"/>
           </a:xfrm>
           <a:prstGeom prst="rect">
             <a:avLst/>
@@ -8051,8 +10199,8 @@
         </p:nvSpPr>
         <p:spPr>
           <a:xfrm>
-            <a:off x="621792" y="2615184"/>
-            <a:ext cx="1371600" cy="457200"/>
+            <a:off x="621792" y="2295144"/>
+            <a:ext cx="1371600" cy="411480"/>
           </a:xfrm>
           <a:prstGeom prst="rect">
             <a:avLst/>
@@ -8067,7 +10215,7 @@
           <a:p>
             <a:pPr algn="l"/>
             <a:r>
-              <a:rPr sz="1500" b="1" i="0">
+              <a:rPr sz="1400" b="1" i="0">
                 <a:solidFill>
                   <a:srgbClr val="0F766E"/>
                 </a:solidFill>
@@ -8085,8 +10233,8 @@
         </p:nvSpPr>
         <p:spPr>
           <a:xfrm>
-            <a:off x="621792" y="3017520"/>
-            <a:ext cx="5120640" cy="594360"/>
+            <a:off x="621792" y="2660903"/>
+            <a:ext cx="5120640" cy="548640"/>
           </a:xfrm>
           <a:prstGeom prst="rect">
             <a:avLst/>
@@ -8101,7 +10249,7 @@
           <a:p>
             <a:pPr algn="l"/>
             <a:r>
-              <a:rPr sz="1300" b="0" i="0">
+              <a:rPr sz="1200" b="0" i="0">
                 <a:solidFill>
                   <a:srgbClr val="334155"/>
                 </a:solidFill>
@@ -8119,8 +10267,8 @@
         </p:nvSpPr>
         <p:spPr>
           <a:xfrm>
-            <a:off x="6309360" y="2542032"/>
-            <a:ext cx="5486400" cy="1188720"/>
+            <a:off x="6309360" y="2258568"/>
+            <a:ext cx="5486400" cy="987552"/>
           </a:xfrm>
           <a:prstGeom prst="rect">
             <a:avLst/>
@@ -8162,8 +10310,8 @@
         </p:nvSpPr>
         <p:spPr>
           <a:xfrm>
-            <a:off x="6473952" y="2615184"/>
-            <a:ext cx="1371600" cy="457200"/>
+            <a:off x="6473952" y="2295144"/>
+            <a:ext cx="1371600" cy="411480"/>
           </a:xfrm>
           <a:prstGeom prst="rect">
             <a:avLst/>
@@ -8178,7 +10326,7 @@
           <a:p>
             <a:pPr algn="l"/>
             <a:r>
-              <a:rPr sz="1500" b="1" i="0">
+              <a:rPr sz="1400" b="1" i="0">
                 <a:solidFill>
                   <a:srgbClr val="166A34"/>
                 </a:solidFill>
@@ -8196,8 +10344,8 @@
         </p:nvSpPr>
         <p:spPr>
           <a:xfrm>
-            <a:off x="6473952" y="3017520"/>
-            <a:ext cx="5120640" cy="594360"/>
+            <a:off x="6473952" y="2660903"/>
+            <a:ext cx="5120640" cy="548640"/>
           </a:xfrm>
           <a:prstGeom prst="rect">
             <a:avLst/>
@@ -8212,7 +10360,7 @@
           <a:p>
             <a:pPr algn="l"/>
             <a:r>
-              <a:rPr sz="1300" b="0" i="0">
+              <a:rPr sz="1200" b="0" i="0">
                 <a:solidFill>
                   <a:srgbClr val="334155"/>
                 </a:solidFill>
@@ -8230,8 +10378,8 @@
         </p:nvSpPr>
         <p:spPr>
           <a:xfrm>
-            <a:off x="457200" y="3895344"/>
-            <a:ext cx="5486400" cy="1188720"/>
+            <a:off x="457200" y="3374136"/>
+            <a:ext cx="5486400" cy="987552"/>
           </a:xfrm>
           <a:prstGeom prst="rect">
             <a:avLst/>
@@ -8273,8 +10421,8 @@
         </p:nvSpPr>
         <p:spPr>
           <a:xfrm>
-            <a:off x="621792" y="3968496"/>
-            <a:ext cx="1371600" cy="457200"/>
+            <a:off x="621792" y="3410712"/>
+            <a:ext cx="1371600" cy="411480"/>
           </a:xfrm>
           <a:prstGeom prst="rect">
             <a:avLst/>
@@ -8289,7 +10437,7 @@
           <a:p>
             <a:pPr algn="l"/>
             <a:r>
-              <a:rPr sz="1500" b="1" i="0">
+              <a:rPr sz="1400" b="1" i="0">
                 <a:solidFill>
                   <a:srgbClr val="991B1B"/>
                 </a:solidFill>
@@ -8307,8 +10455,8 @@
         </p:nvSpPr>
         <p:spPr>
           <a:xfrm>
-            <a:off x="621792" y="4370831"/>
-            <a:ext cx="5120640" cy="594360"/>
+            <a:off x="621792" y="3776472"/>
+            <a:ext cx="5120640" cy="548640"/>
           </a:xfrm>
           <a:prstGeom prst="rect">
             <a:avLst/>
@@ -8323,7 +10471,7 @@
           <a:p>
             <a:pPr algn="l"/>
             <a:r>
-              <a:rPr sz="1300" b="0" i="0">
+              <a:rPr sz="1200" b="0" i="0">
                 <a:solidFill>
                   <a:srgbClr val="334155"/>
                 </a:solidFill>
@@ -8341,8 +10489,8 @@
         </p:nvSpPr>
         <p:spPr>
           <a:xfrm>
-            <a:off x="6309360" y="3895344"/>
-            <a:ext cx="5486400" cy="1188720"/>
+            <a:off x="6309360" y="3374136"/>
+            <a:ext cx="5486400" cy="987552"/>
           </a:xfrm>
           <a:prstGeom prst="rect">
             <a:avLst/>
@@ -8384,8 +10532,8 @@
         </p:nvSpPr>
         <p:spPr>
           <a:xfrm>
-            <a:off x="6473952" y="3968496"/>
-            <a:ext cx="1371600" cy="457200"/>
+            <a:off x="6473952" y="3410712"/>
+            <a:ext cx="1371600" cy="411480"/>
           </a:xfrm>
           <a:prstGeom prst="rect">
             <a:avLst/>
@@ -8400,7 +10548,7 @@
           <a:p>
             <a:pPr algn="l"/>
             <a:r>
-              <a:rPr sz="1500" b="1" i="0">
+              <a:rPr sz="1400" b="1" i="0">
                 <a:solidFill>
                   <a:srgbClr val="1D4ED8"/>
                 </a:solidFill>
@@ -8418,8 +10566,8 @@
         </p:nvSpPr>
         <p:spPr>
           <a:xfrm>
-            <a:off x="6473952" y="4370831"/>
-            <a:ext cx="5120640" cy="594360"/>
+            <a:off x="6473952" y="3776472"/>
+            <a:ext cx="5120640" cy="548640"/>
           </a:xfrm>
           <a:prstGeom prst="rect">
             <a:avLst/>
@@ -8434,7 +10582,7 @@
           <a:p>
             <a:pPr algn="l"/>
             <a:r>
-              <a:rPr sz="1300" b="0" i="0">
+              <a:rPr sz="1200" b="0" i="0">
                 <a:solidFill>
                   <a:srgbClr val="334155"/>
                 </a:solidFill>
@@ -8452,8 +10600,8 @@
         </p:nvSpPr>
         <p:spPr>
           <a:xfrm>
-            <a:off x="457200" y="5248655"/>
-            <a:ext cx="5486400" cy="1188720"/>
+            <a:off x="457200" y="4489704"/>
+            <a:ext cx="5486400" cy="987552"/>
           </a:xfrm>
           <a:prstGeom prst="rect">
             <a:avLst/>
@@ -8495,8 +10643,8 @@
         </p:nvSpPr>
         <p:spPr>
           <a:xfrm>
-            <a:off x="621792" y="5321807"/>
-            <a:ext cx="1371600" cy="457200"/>
+            <a:off x="621792" y="4526280"/>
+            <a:ext cx="1371600" cy="411480"/>
           </a:xfrm>
           <a:prstGeom prst="rect">
             <a:avLst/>
@@ -8511,7 +10659,7 @@
           <a:p>
             <a:pPr algn="l"/>
             <a:r>
-              <a:rPr sz="1500" b="1" i="0">
+              <a:rPr sz="1400" b="1" i="0">
                 <a:solidFill>
                   <a:srgbClr val="1D4ED8"/>
                 </a:solidFill>
@@ -8529,8 +10677,8 @@
         </p:nvSpPr>
         <p:spPr>
           <a:xfrm>
-            <a:off x="621792" y="5724144"/>
-            <a:ext cx="5120640" cy="594360"/>
+            <a:off x="621792" y="4892040"/>
+            <a:ext cx="5120640" cy="548640"/>
           </a:xfrm>
           <a:prstGeom prst="rect">
             <a:avLst/>
@@ -8545,7 +10693,7 @@
           <a:p>
             <a:pPr algn="l"/>
             <a:r>
-              <a:rPr sz="1300" b="0" i="0">
+              <a:rPr sz="1200" b="0" i="0">
                 <a:solidFill>
                   <a:srgbClr val="334155"/>
                 </a:solidFill>
@@ -8563,8 +10711,8 @@
         </p:nvSpPr>
         <p:spPr>
           <a:xfrm>
-            <a:off x="6309360" y="5248655"/>
-            <a:ext cx="5486400" cy="1188720"/>
+            <a:off x="6309360" y="4489704"/>
+            <a:ext cx="5486400" cy="987552"/>
           </a:xfrm>
           <a:prstGeom prst="rect">
             <a:avLst/>
@@ -8606,8 +10754,8 @@
         </p:nvSpPr>
         <p:spPr>
           <a:xfrm>
-            <a:off x="6473952" y="5321807"/>
-            <a:ext cx="1371600" cy="457200"/>
+            <a:off x="6473952" y="4526280"/>
+            <a:ext cx="1371600" cy="411480"/>
           </a:xfrm>
           <a:prstGeom prst="rect">
             <a:avLst/>
@@ -8622,7 +10770,118 @@
           <a:p>
             <a:pPr algn="l"/>
             <a:r>
-              <a:rPr sz="1500" b="1" i="0">
+              <a:rPr sz="1400" b="1" i="0">
+                <a:solidFill>
+                  <a:srgbClr val="0F766E"/>
+                </a:solidFill>
+              </a:rPr>
+              <a:t>LOP</a:t>
+            </a:r>
+          </a:p>
+        </p:txBody>
+      </p:sp>
+      <p:sp>
+        <p:nvSpPr>
+          <p:cNvPr id="28" name="TextBox 27"/>
+          <p:cNvSpPr txBox="1"/>
+          <p:nvPr/>
+        </p:nvSpPr>
+        <p:spPr>
+          <a:xfrm>
+            <a:off x="6473952" y="4892040"/>
+            <a:ext cx="5120640" cy="548640"/>
+          </a:xfrm>
+          <a:prstGeom prst="rect">
+            <a:avLst/>
+          </a:prstGeom>
+          <a:noFill/>
+        </p:spPr>
+        <p:txBody>
+          <a:bodyPr wrap="square">
+            <a:spAutoFit/>
+          </a:bodyPr>
+          <a:lstStyle/>
+          <a:p>
+            <a:pPr algn="l"/>
+            <a:r>
+              <a:rPr sz="1200" b="0" i="0">
+                <a:solidFill>
+                  <a:srgbClr val="334155"/>
+                </a:solidFill>
+              </a:rPr>
+              <a:t>Linkage of Processes — Deming's organization-as-a-system, four labelled bands</a:t>
+            </a:r>
+          </a:p>
+        </p:txBody>
+      </p:sp>
+      <p:sp>
+        <p:nvSpPr>
+          <p:cNvPr id="29" name="Rectangle 28"/>
+          <p:cNvSpPr/>
+          <p:nvPr/>
+        </p:nvSpPr>
+        <p:spPr>
+          <a:xfrm>
+            <a:off x="457200" y="5605272"/>
+            <a:ext cx="5486400" cy="987552"/>
+          </a:xfrm>
+          <a:prstGeom prst="rect">
+            <a:avLst/>
+          </a:prstGeom>
+          <a:solidFill>
+            <a:srgbClr val="FFFFFF"/>
+          </a:solidFill>
+          <a:ln>
+            <a:noFill/>
+          </a:ln>
+        </p:spPr>
+        <p:style>
+          <a:lnRef idx="1">
+            <a:schemeClr val="accent1"/>
+          </a:lnRef>
+          <a:fillRef idx="3">
+            <a:schemeClr val="accent1"/>
+          </a:fillRef>
+          <a:effectRef idx="2">
+            <a:schemeClr val="accent1"/>
+          </a:effectRef>
+          <a:fontRef idx="minor">
+            <a:schemeClr val="lt1"/>
+          </a:fontRef>
+        </p:style>
+        <p:txBody>
+          <a:bodyPr rtlCol="0" anchor="ctr"/>
+          <a:lstStyle/>
+          <a:p>
+            <a:pPr algn="ctr"/>
+          </a:p>
+        </p:txBody>
+      </p:sp>
+      <p:sp>
+        <p:nvSpPr>
+          <p:cNvPr id="30" name="TextBox 29"/>
+          <p:cNvSpPr txBox="1"/>
+          <p:nvPr/>
+        </p:nvSpPr>
+        <p:spPr>
+          <a:xfrm>
+            <a:off x="621792" y="5641848"/>
+            <a:ext cx="1371600" cy="411480"/>
+          </a:xfrm>
+          <a:prstGeom prst="rect">
+            <a:avLst/>
+          </a:prstGeom>
+          <a:noFill/>
+        </p:spPr>
+        <p:txBody>
+          <a:bodyPr wrap="square">
+            <a:spAutoFit/>
+          </a:bodyPr>
+          <a:lstStyle/>
+          <a:p>
+            <a:pPr algn="l"/>
+            <a:r>
+              <a:rPr sz="1400" b="1" i="0">
                 <a:solidFill>
                   <a:srgbClr val="475569"/>
                 </a:solidFill>
@@ -8634,14 +10893,14 @@
       </p:sp>
       <p:sp>
         <p:nvSpPr>
-          <p:cNvPr id="28" name="TextBox 27"/>
-          <p:cNvSpPr txBox="1"/>
-          <p:nvPr/>
-        </p:nvSpPr>
-        <p:spPr>
-          <a:xfrm>
-            <a:off x="6473952" y="5724144"/>
-            <a:ext cx="5120640" cy="594360"/>
+          <p:cNvPr id="31" name="TextBox 30"/>
+          <p:cNvSpPr txBox="1"/>
+          <p:nvPr/>
+        </p:nvSpPr>
+        <p:spPr>
+          <a:xfrm>
+            <a:off x="621792" y="6007608"/>
+            <a:ext cx="5120640" cy="548640"/>
           </a:xfrm>
           <a:prstGeom prst="rect">
             <a:avLst/>
@@ -8656,7 +10915,7 @@
           <a:p>
             <a:pPr algn="l"/>
             <a:r>
-              <a:rPr sz="1300" b="0" i="0">
+              <a:rPr sz="1200" b="0" i="0">
                 <a:solidFill>
                   <a:srgbClr val="334155"/>
                 </a:solidFill>
@@ -9609,7 +11868,7 @@
                   <a:srgbClr val="334155"/>
                 </a:solidFill>
               </a:rPr>
-              <a:t>  exhibits</a:t>
+              <a:t>  characterizes</a:t>
             </a:r>
           </a:p>
           <a:p>
@@ -9804,143 +12063,130 @@
           <a:lstStyle/>
           <a:p>
             <a:r>
-              <a:rPr sz="1250">
+              <a:rPr sz="1250" b="0">
                 <a:solidFill>
                   <a:srgbClr val="F0FDFA"/>
                 </a:solidFill>
-                <a:latin typeface="Courier New"/>
               </a:rPr>
               <a:t>City of Bellingham is an Object.</a:t>
             </a:r>
           </a:p>
           <a:p>
             <a:r>
-              <a:rPr sz="1250">
+              <a:rPr sz="1250" b="0">
                 <a:solidFill>
                   <a:srgbClr val="F0FDFA"/>
                 </a:solidFill>
-                <a:latin typeface="Courier New"/>
               </a:rPr>
               <a:t>On Street Business is an Object.</a:t>
             </a:r>
           </a:p>
           <a:p>
             <a:r>
-              <a:rPr sz="1250">
+              <a:rPr sz="1250" b="0">
                 <a:solidFill>
                   <a:srgbClr val="F0FDFA"/>
                 </a:solidFill>
-                <a:latin typeface="Courier New"/>
               </a:rPr>
               <a:t>Restaurant is an Object.</a:t>
             </a:r>
           </a:p>
           <a:p>
             <a:r>
-              <a:rPr sz="1250">
+              <a:rPr sz="1250" b="0">
                 <a:solidFill>
                   <a:srgbClr val="F0FDFA"/>
                 </a:solidFill>
-                <a:latin typeface="Courier New"/>
               </a:rPr>
               <a:t>Bantam Restaurant is an Object.</a:t>
             </a:r>
           </a:p>
           <a:p>
             <a:r>
-              <a:rPr sz="1250">
+              <a:rPr sz="1250" b="0">
                 <a:solidFill>
                   <a:srgbClr val="F0FDFA"/>
                 </a:solidFill>
-                <a:latin typeface="Courier New"/>
               </a:rPr>
               <a:t>Ordering is a Process.</a:t>
             </a:r>
           </a:p>
           <a:p>
             <a:r>
-              <a:rPr sz="1250">
+              <a:rPr sz="1250" b="0">
                 <a:solidFill>
                   <a:srgbClr val="F0FDFA"/>
                 </a:solidFill>
-                <a:latin typeface="Courier New"/>
               </a:rPr>
               <a:t>Cooking is a Process.</a:t>
             </a:r>
           </a:p>
           <a:p>
             <a:r>
-              <a:rPr sz="1250">
-                <a:solidFill>
-                  <a:srgbClr val="FFFFFF"/>
-                </a:solidFill>
-                <a:latin typeface="Courier New"/>
+              <a:rPr sz="1250" b="0">
+                <a:solidFill>
+                  <a:srgbClr val="F0FDFA"/>
+                </a:solidFill>
               </a:rPr>
               <a:t/>
             </a:r>
           </a:p>
           <a:p>
             <a:r>
-              <a:rPr sz="1250">
+              <a:rPr sz="1250" b="0">
                 <a:solidFill>
                   <a:srgbClr val="F0FDFA"/>
                 </a:solidFill>
-                <a:latin typeface="Courier New"/>
               </a:rPr>
               <a:t>City of Bellingham consists of On Street</a:t>
             </a:r>
           </a:p>
           <a:p>
             <a:r>
-              <a:rPr sz="1250">
+              <a:rPr sz="1250" b="0">
                 <a:solidFill>
                   <a:srgbClr val="F0FDFA"/>
                 </a:solidFill>
-                <a:latin typeface="Courier New"/>
               </a:rPr>
               <a:t>Business and Waterfront Businesses.</a:t>
             </a:r>
           </a:p>
           <a:p>
             <a:r>
-              <a:rPr sz="1250">
+              <a:rPr sz="1250" b="0">
                 <a:solidFill>
                   <a:srgbClr val="F0FDFA"/>
                 </a:solidFill>
-                <a:latin typeface="Courier New"/>
               </a:rPr>
               <a:t>Restaurant is a type of On Street Business.</a:t>
             </a:r>
           </a:p>
           <a:p>
             <a:r>
-              <a:rPr sz="1250">
+              <a:rPr sz="1250" b="0">
                 <a:solidFill>
                   <a:srgbClr val="F0FDFA"/>
                 </a:solidFill>
-                <a:latin typeface="Courier New"/>
               </a:rPr>
               <a:t>Bantam Restaurant is an instance of Restaurant.</a:t>
             </a:r>
           </a:p>
           <a:p>
             <a:r>
-              <a:rPr sz="1250">
+              <a:rPr sz="1250" b="0">
                 <a:solidFill>
                   <a:srgbClr val="F0FDFA"/>
                 </a:solidFill>
-                <a:latin typeface="Courier New"/>
               </a:rPr>
               <a:t>Bantam Restaurant handles Ordering,</a:t>
             </a:r>
           </a:p>
           <a:p>
             <a:r>
-              <a:rPr sz="1250">
+              <a:rPr sz="1250" b="0">
                 <a:solidFill>
                   <a:srgbClr val="F0FDFA"/>
                 </a:solidFill>
-                <a:latin typeface="Courier New"/>
               </a:rPr>
               <a:t>Cooking, and Serving.</a:t>
             </a:r>
@@ -10517,7 +12763,7 @@
                   <a:srgbClr val="0F766E"/>
                 </a:solidFill>
               </a:rPr>
-              <a:t>exhibits</a:t>
+              <a:t>characterizes</a:t>
             </a:r>
           </a:p>
         </p:txBody>
@@ -10585,7 +12831,7 @@
                   <a:srgbClr val="334155"/>
                 </a:solidFill>
               </a:rPr>
-              <a:t>Attribute → Object.</a:t>
+              <a:t>Feature → Exhibitor.</a:t>
             </a:r>
           </a:p>
         </p:txBody>
@@ -10619,8 +12865,8 @@
                   <a:srgbClr val="0F172A"/>
                 </a:solidFill>
               </a:rPr>
-              <a:t>"Seating Capacity exhibits Restaurant."
-"Crime Rate exhibits Neighborhood."</a:t>
+              <a:t>"Seating Capacity characterizes Restaurant."
+OPL: "Restaurant exhibits Seating Capacity."</a:t>
             </a:r>
           </a:p>
         </p:txBody>
@@ -11082,11 +13328,10 @@
               </a:spcBef>
             </a:pPr>
             <a:r>
-              <a:rPr sz="1200">
+              <a:rPr sz="1200" b="0">
                 <a:solidFill>
                   <a:srgbClr val="F0FDFA"/>
                 </a:solidFill>
-                <a:latin typeface="Courier New"/>
               </a:rPr>
               <a:t>City of Bellingham  —[consists of]→  On Street Business</a:t>
             </a:r>
@@ -11098,11 +13343,10 @@
               </a:spcBef>
             </a:pPr>
             <a:r>
-              <a:rPr sz="1200">
+              <a:rPr sz="1200" b="0">
                 <a:solidFill>
                   <a:srgbClr val="F0FDFA"/>
                 </a:solidFill>
-                <a:latin typeface="Courier New"/>
               </a:rPr>
               <a:t>City of Bellingham  —[consists of]→  Waterfront Businesses</a:t>
             </a:r>
@@ -11114,11 +13358,10 @@
               </a:spcBef>
             </a:pPr>
             <a:r>
-              <a:rPr sz="1200">
+              <a:rPr sz="1200" b="0">
                 <a:solidFill>
                   <a:srgbClr val="F0FDFA"/>
                 </a:solidFill>
-                <a:latin typeface="Courier New"/>
               </a:rPr>
               <a:t>Restaurant  —[is a type of]→  On Street Business</a:t>
             </a:r>
@@ -11130,11 +13373,10 @@
               </a:spcBef>
             </a:pPr>
             <a:r>
-              <a:rPr sz="1200">
+              <a:rPr sz="1200" b="0">
                 <a:solidFill>
                   <a:srgbClr val="F0FDFA"/>
                 </a:solidFill>
-                <a:latin typeface="Courier New"/>
               </a:rPr>
               <a:t>Bantam Restaurant  —[is an instance of]→  Restaurant</a:t>
             </a:r>
@@ -11146,11 +13388,10 @@
               </a:spcBef>
             </a:pPr>
             <a:r>
-              <a:rPr sz="1200">
+              <a:rPr sz="1200" b="0">
                 <a:solidFill>
                   <a:srgbClr val="F0FDFA"/>
                 </a:solidFill>
-                <a:latin typeface="Courier New"/>
               </a:rPr>
               <a:t>Bantam Restaurant  —[handles]→  Ordering</a:t>
             </a:r>
@@ -11162,11 +13403,10 @@
               </a:spcBef>
             </a:pPr>
             <a:r>
-              <a:rPr sz="1200">
+              <a:rPr sz="1200" b="0">
                 <a:solidFill>
                   <a:srgbClr val="F0FDFA"/>
                 </a:solidFill>
-                <a:latin typeface="Courier New"/>
               </a:rPr>
               <a:t>Bantam Restaurant  —[handles]→  Cooking</a:t>
             </a:r>
@@ -11178,11 +13418,10 @@
               </a:spcBef>
             </a:pPr>
             <a:r>
-              <a:rPr sz="1200">
+              <a:rPr sz="1200" b="0">
                 <a:solidFill>
                   <a:srgbClr val="F0FDFA"/>
                 </a:solidFill>
-                <a:latin typeface="Courier New"/>
               </a:rPr>
               <a:t>Bantam Restaurant  —[handles]→  Serving</a:t>
             </a:r>
@@ -11294,11 +13533,10 @@
               </a:spcBef>
             </a:pPr>
             <a:r>
-              <a:rPr sz="1250">
+              <a:rPr sz="1250" b="0">
                 <a:solidFill>
                   <a:srgbClr val="0F172A"/>
                 </a:solidFill>
-                <a:latin typeface="Courier New"/>
               </a:rPr>
               <a:t>City of Bellingham is an Object.</a:t>
             </a:r>
@@ -11310,11 +13548,10 @@
               </a:spcBef>
             </a:pPr>
             <a:r>
-              <a:rPr sz="1250">
+              <a:rPr sz="1250" b="0">
                 <a:solidFill>
                   <a:srgbClr val="0F172A"/>
                 </a:solidFill>
-                <a:latin typeface="Courier New"/>
               </a:rPr>
               <a:t>On Street Business is an Object.</a:t>
             </a:r>
@@ -11326,11 +13563,10 @@
               </a:spcBef>
             </a:pPr>
             <a:r>
-              <a:rPr sz="1250">
+              <a:rPr sz="1250" b="0">
                 <a:solidFill>
                   <a:srgbClr val="0F172A"/>
                 </a:solidFill>
-                <a:latin typeface="Courier New"/>
               </a:rPr>
               <a:t>Restaurant is an Object.</a:t>
             </a:r>
@@ -11342,11 +13578,10 @@
               </a:spcBef>
             </a:pPr>
             <a:r>
-              <a:rPr sz="1250">
+              <a:rPr sz="1250" b="0">
                 <a:solidFill>
                   <a:srgbClr val="0F172A"/>
                 </a:solidFill>
-                <a:latin typeface="Courier New"/>
               </a:rPr>
               <a:t>Bantam Restaurant is an Object.</a:t>
             </a:r>
@@ -11358,11 +13593,10 @@
               </a:spcBef>
             </a:pPr>
             <a:r>
-              <a:rPr sz="1250">
-                <a:solidFill>
-                  <a:srgbClr val="FFFFFF"/>
-                </a:solidFill>
-                <a:latin typeface="Courier New"/>
+              <a:rPr sz="1250" b="0">
+                <a:solidFill>
+                  <a:srgbClr val="0F172A"/>
+                </a:solidFill>
               </a:rPr>
               <a:t/>
             </a:r>
@@ -11374,11 +13608,10 @@
               </a:spcBef>
             </a:pPr>
             <a:r>
-              <a:rPr sz="1250">
+              <a:rPr sz="1250" b="0">
                 <a:solidFill>
                   <a:srgbClr val="0F172A"/>
                 </a:solidFill>
-                <a:latin typeface="Courier New"/>
               </a:rPr>
               <a:t>City of Bellingham consists of On Street</a:t>
             </a:r>
@@ -11390,11 +13623,10 @@
               </a:spcBef>
             </a:pPr>
             <a:r>
-              <a:rPr sz="1250">
+              <a:rPr sz="1250" b="0">
                 <a:solidFill>
                   <a:srgbClr val="0F172A"/>
                 </a:solidFill>
-                <a:latin typeface="Courier New"/>
               </a:rPr>
               <a:t>  Business and Waterfront Businesses.</a:t>
             </a:r>
@@ -11406,11 +13638,10 @@
               </a:spcBef>
             </a:pPr>
             <a:r>
-              <a:rPr sz="1250">
+              <a:rPr sz="1250" b="0">
                 <a:solidFill>
                   <a:srgbClr val="0F172A"/>
                 </a:solidFill>
-                <a:latin typeface="Courier New"/>
               </a:rPr>
               <a:t>Restaurant is a type of On Street Business.</a:t>
             </a:r>
@@ -11422,11 +13653,10 @@
               </a:spcBef>
             </a:pPr>
             <a:r>
-              <a:rPr sz="1250">
+              <a:rPr sz="1250" b="0">
                 <a:solidFill>
                   <a:srgbClr val="0F172A"/>
                 </a:solidFill>
-                <a:latin typeface="Courier New"/>
               </a:rPr>
               <a:t>Bantam Restaurant is an instance of Restaurant.</a:t>
             </a:r>
@@ -11438,11 +13668,10 @@
               </a:spcBef>
             </a:pPr>
             <a:r>
-              <a:rPr sz="1250">
+              <a:rPr sz="1250" b="0">
                 <a:solidFill>
                   <a:srgbClr val="0F172A"/>
                 </a:solidFill>
-                <a:latin typeface="Courier New"/>
               </a:rPr>
               <a:t>Bantam Restaurant handles Ordering,</a:t>
             </a:r>
@@ -11454,11 +13683,10 @@
               </a:spcBef>
             </a:pPr>
             <a:r>
-              <a:rPr sz="1250">
+              <a:rPr sz="1250" b="0">
                 <a:solidFill>
                   <a:srgbClr val="0F172A"/>
                 </a:solidFill>
-                <a:latin typeface="Courier New"/>
               </a:rPr>
               <a:t>  Cooking, and Serving.</a:t>
             </a:r>
